--- a/docs/Presentacion_Ejecutiva_BD_Ecommify.pptx
+++ b/docs/Presentacion_Ejecutiva_BD_Ecommify.pptx
@@ -4,6 +4,9 @@
   <p:sldMasterIdLst>
     <p:sldMasterId id="2147483648" r:id="rId1"/>
   </p:sldMasterIdLst>
+  <p:notesMasterIdLst>
+    <p:notesMasterId r:id="rId14"/>
+  </p:notesMasterIdLst>
   <p:sldIdLst>
     <p:sldId id="256" r:id="rId2"/>
     <p:sldId id="257" r:id="rId3"/>
@@ -18,10 +21,7 @@
     <p:sldId id="266" r:id="rId12"/>
     <p:sldId id="267" r:id="rId13"/>
   </p:sldIdLst>
-  <p:notesMasterIdLst>
-    <p:notesMasterId r:id="rId14"/>
-  </p:notesMasterIdLst>
-  <p:sldSz cx="9144000" cy="5143500"/>
+  <p:sldSz cx="9144000" cy="5143500" type="screen16x9"/>
   <p:notesSz cx="5143500" cy="9144000"/>
   <p:defaultTextStyle>
     <a:lvl1pPr marL="0" algn="l" defTabSz="914400" rtl="0" eaLnBrk="1" latinLnBrk="0" hangingPunct="1">
@@ -115,6 +115,11 @@
       </a:defRPr>
     </a:lvl9pPr>
   </p:defaultTextStyle>
+  <p:extLst>
+    <p:ext uri="{EFAFB233-063F-42B5-8137-9DF3F51BA10A}">
+      <p15:sldGuideLst xmlns:p15="http://schemas.microsoft.com/office/powerpoint/2012/main"/>
+    </p:ext>
+  </p:extLst>
 </p:presentation>
 </file>
 
@@ -140,234 +145,10 @@
           <a:chExt cx="0" cy="0"/>
         </a:xfrm>
       </p:grpSpPr>
-      <p:sp>
-        <p:nvSpPr>
-          <p:cNvPr id="2" name="Header Placeholder 1"/>
-          <p:cNvSpPr>
-            <a:spLocks noGrp="1"/>
-          </p:cNvSpPr>
-          <p:nvPr>
-            <p:ph type="hdr" sz="quarter"/>
-          </p:nvPr>
-        </p:nvSpPr>
-        <p:spPr>
-          <a:xfrm>
-            <a:off x="0" y="0"/>
-            <a:ext cx="2971800" cy="458788"/>
-          </a:xfrm>
-          <a:prstGeom prst="rect">
-            <a:avLst/>
-          </a:prstGeom>
-        </p:spPr>
-        <p:txBody>
-          <a:bodyPr vert="horz" lIns="91440" tIns="45720" rIns="91440" bIns="45720" rtlCol="0"/>
-          <a:lstStyle>
-            <a:lvl1pPr algn="l">
-              <a:defRPr sz="1200"/>
-            </a:lvl1pPr>
-          </a:lstStyle>
-          <a:p>
-            <a:endParaRPr lang="en-US"/>
-          </a:p>
-        </p:txBody>
-      </p:sp>
-      <p:sp>
-        <p:nvSpPr>
-          <p:cNvPr id="3" name="Date Placeholder 2"/>
-          <p:cNvSpPr>
-            <a:spLocks noGrp="1"/>
-          </p:cNvSpPr>
-          <p:nvPr>
-            <p:ph type="dt" idx="1"/>
-          </p:nvPr>
-        </p:nvSpPr>
-        <p:spPr>
-          <a:xfrm>
-            <a:off x="3884613" y="0"/>
-            <a:ext cx="2971800" cy="458788"/>
-          </a:xfrm>
-          <a:prstGeom prst="rect">
-            <a:avLst/>
-          </a:prstGeom>
-        </p:spPr>
-        <p:txBody>
-          <a:bodyPr vert="horz" lIns="91440" tIns="45720" rIns="91440" bIns="45720" rtlCol="0"/>
-          <a:lstStyle>
-            <a:lvl1pPr algn="r">
-              <a:defRPr sz="1200"/>
-            </a:lvl1pPr>
-          </a:lstStyle>
-          <a:p>
-            <a:fld id="{5282F153-3F37-0F45-9E97-73ACFA13230C}" type="datetimeFigureOut">
-              <a:rPr lang="en-US"/>
-              <a:t>7/23/19</a:t>
-            </a:fld>
-            <a:endParaRPr lang="en-US"/>
-          </a:p>
-        </p:txBody>
-      </p:sp>
-      <p:sp>
-        <p:nvSpPr>
-          <p:cNvPr id="4" name="Slide Image Placeholder 3"/>
-          <p:cNvSpPr>
-            <a:spLocks noGrp="1" noRot="1" noChangeAspect="1"/>
-          </p:cNvSpPr>
-          <p:nvPr>
-            <p:ph type="sldImg" idx="2"/>
-          </p:nvPr>
-        </p:nvSpPr>
-        <p:spPr>
-          <a:xfrm>
-            <a:off x="685800" y="1143000"/>
-            <a:ext cx="5486400" cy="3086100"/>
-          </a:xfrm>
-          <a:prstGeom prst="rect">
-            <a:avLst/>
-          </a:prstGeom>
-          <a:noFill/>
-          <a:ln w="12700">
-            <a:solidFill>
-              <a:prstClr val="black"/>
-            </a:solidFill>
-          </a:ln>
-        </p:spPr>
-        <p:txBody>
-          <a:bodyPr vert="horz" lIns="91440" tIns="45720" rIns="91440" bIns="45720" rtlCol="0" anchor="ctr"/>
-          <a:lstStyle/>
-          <a:p>
-            <a:endParaRPr lang="en-US"/>
-          </a:p>
-        </p:txBody>
-      </p:sp>
-      <p:sp>
-        <p:nvSpPr>
-          <p:cNvPr id="5" name="Notes Placeholder 4"/>
-          <p:cNvSpPr>
-            <a:spLocks noGrp="1"/>
-          </p:cNvSpPr>
-          <p:nvPr>
-            <p:ph type="body" sz="quarter" idx="3"/>
-          </p:nvPr>
-        </p:nvSpPr>
-        <p:spPr>
-          <a:xfrm>
-            <a:off x="685800" y="4400550"/>
-            <a:ext cx="5486400" cy="3600450"/>
-          </a:xfrm>
-          <a:prstGeom prst="rect">
-            <a:avLst/>
-          </a:prstGeom>
-        </p:spPr>
-        <p:txBody>
-          <a:bodyPr vert="horz" lIns="91440" tIns="45720" rIns="91440" bIns="45720" rtlCol="0"/>
-          <a:lstStyle/>
-          <a:p>
-            <a:pPr lvl="0"/>
-            <a:r>
-              <a:rPr lang="en-US"/>
-              <a:t>Click to edit Master text styles</a:t>
-            </a:r>
-          </a:p>
-          <a:p>
-            <a:pPr lvl="1"/>
-            <a:r>
-              <a:rPr lang="en-US"/>
-              <a:t>Second level</a:t>
-            </a:r>
-          </a:p>
-          <a:p>
-            <a:pPr lvl="2"/>
-            <a:r>
-              <a:rPr lang="en-US"/>
-              <a:t>Third level</a:t>
-            </a:r>
-          </a:p>
-          <a:p>
-            <a:pPr lvl="3"/>
-            <a:r>
-              <a:rPr lang="en-US"/>
-              <a:t>Fourth level</a:t>
-            </a:r>
-          </a:p>
-          <a:p>
-            <a:pPr lvl="4"/>
-            <a:r>
-              <a:rPr lang="en-US"/>
-              <a:t>Fifth level</a:t>
-            </a:r>
-          </a:p>
-        </p:txBody>
-      </p:sp>
-      <p:sp>
-        <p:nvSpPr>
-          <p:cNvPr id="6" name="Footer Placeholder 5"/>
-          <p:cNvSpPr>
-            <a:spLocks noGrp="1"/>
-          </p:cNvSpPr>
-          <p:nvPr>
-            <p:ph type="ftr" sz="quarter" idx="4"/>
-          </p:nvPr>
-        </p:nvSpPr>
-        <p:spPr>
-          <a:xfrm>
-            <a:off x="0" y="8685213"/>
-            <a:ext cx="2971800" cy="458787"/>
-          </a:xfrm>
-          <a:prstGeom prst="rect">
-            <a:avLst/>
-          </a:prstGeom>
-        </p:spPr>
-        <p:txBody>
-          <a:bodyPr vert="horz" lIns="91440" tIns="45720" rIns="91440" bIns="45720" rtlCol="0" anchor="b"/>
-          <a:lstStyle>
-            <a:lvl1pPr algn="l">
-              <a:defRPr sz="1200"/>
-            </a:lvl1pPr>
-          </a:lstStyle>
-          <a:p>
-            <a:endParaRPr lang="en-US"/>
-          </a:p>
-        </p:txBody>
-      </p:sp>
-      <p:sp>
-        <p:nvSpPr>
-          <p:cNvPr id="7" name="Slide Number Placeholder 6"/>
-          <p:cNvSpPr>
-            <a:spLocks noGrp="1"/>
-          </p:cNvSpPr>
-          <p:nvPr>
-            <p:ph type="sldNum" sz="quarter" idx="5"/>
-          </p:nvPr>
-        </p:nvSpPr>
-        <p:spPr>
-          <a:xfrm>
-            <a:off x="3884613" y="8685213"/>
-            <a:ext cx="2971800" cy="458787"/>
-          </a:xfrm>
-          <a:prstGeom prst="rect">
-            <a:avLst/>
-          </a:prstGeom>
-        </p:spPr>
-        <p:txBody>
-          <a:bodyPr vert="horz" lIns="91440" tIns="45720" rIns="91440" bIns="45720" rtlCol="0" anchor="b"/>
-          <a:lstStyle>
-            <a:lvl1pPr algn="r">
-              <a:defRPr sz="1200"/>
-            </a:lvl1pPr>
-          </a:lstStyle>
-          <a:p>
-            <a:fld id="{CE5E9CC1-C706-0F49-92D6-E571CC5EEA8F}" type="slidenum">
-              <a:rPr lang="en-US"/>
-              <a:t>‹#›</a:t>
-            </a:fld>
-            <a:endParaRPr lang="en-US"/>
-          </a:p>
-        </p:txBody>
-      </p:sp>
     </p:spTree>
     <p:extLst>
       <p:ext uri="{BB962C8B-B14F-4D97-AF65-F5344CB8AC3E}">
-        <p14:creationId xmlns:p14="http://schemas.microsoft.com/office/powerpoint/2010/main" val="1024086991"/>
+        <p14:creationId xmlns:p14="http://schemas.microsoft.com/office/powerpoint/2010/main" val="1405730700"/>
       </p:ext>
     </p:extLst>
   </p:cSld>
@@ -511,10 +292,6 @@
           <a:bodyPr/>
           <a:lstStyle/>
           <a:p>
-            <a:r>
-              <a:rPr lang="en-US" dirty="0"/>
-              <a:t/>
-            </a:r>
             <a:endParaRPr lang="en-US" dirty="0"/>
           </a:p>
         </p:txBody>
@@ -599,10 +376,6 @@
           <a:bodyPr/>
           <a:lstStyle/>
           <a:p>
-            <a:r>
-              <a:rPr lang="en-US" dirty="0"/>
-              <a:t/>
-            </a:r>
             <a:endParaRPr lang="en-US" dirty="0"/>
           </a:p>
         </p:txBody>
@@ -687,10 +460,6 @@
           <a:bodyPr/>
           <a:lstStyle/>
           <a:p>
-            <a:r>
-              <a:rPr lang="en-US" dirty="0"/>
-              <a:t/>
-            </a:r>
             <a:endParaRPr lang="en-US" dirty="0"/>
           </a:p>
         </p:txBody>
@@ -775,10 +544,6 @@
           <a:bodyPr/>
           <a:lstStyle/>
           <a:p>
-            <a:r>
-              <a:rPr lang="en-US" dirty="0"/>
-              <a:t/>
-            </a:r>
             <a:endParaRPr lang="en-US" dirty="0"/>
           </a:p>
         </p:txBody>
@@ -863,10 +628,6 @@
           <a:bodyPr/>
           <a:lstStyle/>
           <a:p>
-            <a:r>
-              <a:rPr lang="en-US" dirty="0"/>
-              <a:t/>
-            </a:r>
             <a:endParaRPr lang="en-US" dirty="0"/>
           </a:p>
         </p:txBody>
@@ -951,10 +712,6 @@
           <a:bodyPr/>
           <a:lstStyle/>
           <a:p>
-            <a:r>
-              <a:rPr lang="en-US" dirty="0"/>
-              <a:t/>
-            </a:r>
             <a:endParaRPr lang="en-US" dirty="0"/>
           </a:p>
         </p:txBody>
@@ -1039,10 +796,6 @@
           <a:bodyPr/>
           <a:lstStyle/>
           <a:p>
-            <a:r>
-              <a:rPr lang="en-US" dirty="0"/>
-              <a:t/>
-            </a:r>
             <a:endParaRPr lang="en-US" dirty="0"/>
           </a:p>
         </p:txBody>
@@ -1127,10 +880,6 @@
           <a:bodyPr/>
           <a:lstStyle/>
           <a:p>
-            <a:r>
-              <a:rPr lang="en-US" dirty="0"/>
-              <a:t/>
-            </a:r>
             <a:endParaRPr lang="en-US" dirty="0"/>
           </a:p>
         </p:txBody>
@@ -1215,10 +964,6 @@
           <a:bodyPr/>
           <a:lstStyle/>
           <a:p>
-            <a:r>
-              <a:rPr lang="en-US" dirty="0"/>
-              <a:t/>
-            </a:r>
             <a:endParaRPr lang="en-US" dirty="0"/>
           </a:p>
         </p:txBody>
@@ -1303,10 +1048,6 @@
           <a:bodyPr/>
           <a:lstStyle/>
           <a:p>
-            <a:r>
-              <a:rPr lang="en-US" dirty="0"/>
-              <a:t/>
-            </a:r>
             <a:endParaRPr lang="en-US" dirty="0"/>
           </a:p>
         </p:txBody>
@@ -1391,10 +1132,6 @@
           <a:bodyPr/>
           <a:lstStyle/>
           <a:p>
-            <a:r>
-              <a:rPr lang="en-US" dirty="0"/>
-              <a:t/>
-            </a:r>
             <a:endParaRPr lang="en-US" dirty="0"/>
           </a:p>
         </p:txBody>
@@ -1479,10 +1216,6 @@
           <a:bodyPr/>
           <a:lstStyle/>
           <a:p>
-            <a:r>
-              <a:rPr lang="en-US" dirty="0"/>
-              <a:t/>
-            </a:r>
             <a:endParaRPr lang="en-US" dirty="0"/>
           </a:p>
         </p:txBody>
@@ -1556,6 +1289,11 @@
 <file path=ppt/slideMasters/slideMaster1.xml><?xml version="1.0" encoding="utf-8"?>
 <p:sldMaster xmlns:a="http://schemas.openxmlformats.org/drawingml/2006/main" xmlns:r="http://schemas.openxmlformats.org/officeDocument/2006/relationships" xmlns:p="http://schemas.openxmlformats.org/presentationml/2006/main">
   <p:cSld>
+    <p:bg>
+      <p:bgRef idx="1001">
+        <a:schemeClr val="bg1"/>
+      </p:bgRef>
+    </p:bg>
     <p:spTree>
       <p:nvGrpSpPr>
         <p:cNvPr id="1" name=""/>
@@ -1838,6 +1576,7 @@
         <a:solidFill>
           <a:srgbClr val="0D3B6E"/>
         </a:solidFill>
+        <a:effectLst/>
       </p:bgPr>
     </p:bg>
     <p:spTree>
@@ -1856,17 +1595,458 @@
       </p:grpSpPr>
       <p:sp>
         <p:nvSpPr>
-          <p:cNvPr id="2" name="Shape 0"/>
-          <p:cNvSpPr/>
-          <p:nvPr/>
-        </p:nvSpPr>
-        <p:spPr>
-          <a:xfrm>
-            <a:off x="0" y="4389120"/>
-            <a:ext cx="9144000" cy="109728"/>
-          </a:xfrm>
-          <a:prstGeom prst="rect">
-            <a:avLst/>
+          <p:cNvPr id="3" name="Text 1"/>
+          <p:cNvSpPr/>
+          <p:nvPr/>
+        </p:nvSpPr>
+        <p:spPr>
+          <a:xfrm>
+            <a:off x="548640" y="457200"/>
+            <a:ext cx="8046720" cy="457200"/>
+          </a:xfrm>
+          <a:prstGeom prst="rect">
+            <a:avLst/>
+          </a:prstGeom>
+          <a:noFill/>
+          <a:ln/>
+        </p:spPr>
+        <p:txBody>
+          <a:bodyPr wrap="square" rtlCol="0" anchor="ctr"/>
+          <a:lstStyle/>
+          <a:p>
+            <a:pPr marL="0" indent="0">
+              <a:buNone/>
+            </a:pPr>
+            <a:r>
+              <a:rPr lang="en-US" sz="1400" kern="0" spc="300" dirty="0">
+                <a:solidFill>
+                  <a:srgbClr val="A0C4E8"/>
+                </a:solidFill>
+                <a:latin typeface="Arial" pitchFamily="34" charset="0"/>
+                <a:ea typeface="Arial" pitchFamily="34" charset="-122"/>
+                <a:cs typeface="Arial" pitchFamily="34" charset="-120"/>
+              </a:rPr>
+              <a:t>ARQUITECTURA HÍBRIDA DE BASE DE DATOS</a:t>
+            </a:r>
+            <a:endParaRPr lang="en-US" sz="1400" dirty="0"/>
+          </a:p>
+        </p:txBody>
+      </p:sp>
+      <p:sp>
+        <p:nvSpPr>
+          <p:cNvPr id="4" name="Text 2"/>
+          <p:cNvSpPr/>
+          <p:nvPr/>
+        </p:nvSpPr>
+        <p:spPr>
+          <a:xfrm>
+            <a:off x="548640" y="1005840"/>
+            <a:ext cx="8046720" cy="1005840"/>
+          </a:xfrm>
+          <a:prstGeom prst="rect">
+            <a:avLst/>
+          </a:prstGeom>
+          <a:noFill/>
+          <a:ln/>
+        </p:spPr>
+        <p:txBody>
+          <a:bodyPr wrap="square" rtlCol="0" anchor="ctr"/>
+          <a:lstStyle/>
+          <a:p>
+            <a:pPr marL="0" indent="0">
+              <a:buNone/>
+            </a:pPr>
+            <a:r>
+              <a:rPr lang="en-US" sz="5200" b="1" dirty="0">
+                <a:solidFill>
+                  <a:srgbClr val="FFFFFF"/>
+                </a:solidFill>
+                <a:latin typeface="Arial" pitchFamily="34" charset="0"/>
+                <a:ea typeface="Arial" pitchFamily="34" charset="-122"/>
+                <a:cs typeface="Arial" pitchFamily="34" charset="-120"/>
+              </a:rPr>
+              <a:t>Ecommify</a:t>
+            </a:r>
+            <a:endParaRPr lang="en-US" sz="5200" dirty="0"/>
+          </a:p>
+        </p:txBody>
+      </p:sp>
+      <p:sp>
+        <p:nvSpPr>
+          <p:cNvPr id="5" name="Text 3"/>
+          <p:cNvSpPr/>
+          <p:nvPr/>
+        </p:nvSpPr>
+        <p:spPr>
+          <a:xfrm>
+            <a:off x="548640" y="2011680"/>
+            <a:ext cx="8046720" cy="914400"/>
+          </a:xfrm>
+          <a:prstGeom prst="rect">
+            <a:avLst/>
+          </a:prstGeom>
+          <a:noFill/>
+          <a:ln/>
+        </p:spPr>
+        <p:txBody>
+          <a:bodyPr wrap="square" rtlCol="0" anchor="ctr"/>
+          <a:lstStyle/>
+          <a:p>
+            <a:pPr marL="0" indent="0">
+              <a:buNone/>
+            </a:pPr>
+            <a:r>
+              <a:rPr lang="en-US" sz="1800" dirty="0">
+                <a:solidFill>
+                  <a:srgbClr val="A0C4E8"/>
+                </a:solidFill>
+                <a:latin typeface="Arial" pitchFamily="34" charset="0"/>
+                <a:ea typeface="Arial" pitchFamily="34" charset="-122"/>
+                <a:cs typeface="Arial" pitchFamily="34" charset="-120"/>
+              </a:rPr>
+              <a:t>Diseño Conceptual y Lógico</a:t>
+            </a:r>
+            <a:endParaRPr lang="en-US" sz="1800" dirty="0"/>
+          </a:p>
+          <a:p>
+            <a:pPr marL="0" indent="0">
+              <a:buNone/>
+            </a:pPr>
+            <a:r>
+              <a:rPr lang="en-US" sz="1800" dirty="0">
+                <a:solidFill>
+                  <a:srgbClr val="A0C4E8"/>
+                </a:solidFill>
+                <a:latin typeface="Arial" pitchFamily="34" charset="0"/>
+                <a:ea typeface="Arial" pitchFamily="34" charset="-122"/>
+                <a:cs typeface="Arial" pitchFamily="34" charset="-120"/>
+              </a:rPr>
+              <a:t>Plataforma e-commerce multivendedor de productos tecnológicos</a:t>
+            </a:r>
+            <a:endParaRPr lang="en-US" sz="1800" dirty="0"/>
+          </a:p>
+        </p:txBody>
+      </p:sp>
+      <p:sp>
+        <p:nvSpPr>
+          <p:cNvPr id="6" name="Shape 4"/>
+          <p:cNvSpPr/>
+          <p:nvPr/>
+        </p:nvSpPr>
+        <p:spPr>
+          <a:xfrm>
+            <a:off x="548640" y="3108960"/>
+            <a:ext cx="8046720" cy="0"/>
+          </a:xfrm>
+          <a:prstGeom prst="line">
+            <a:avLst/>
+          </a:prstGeom>
+          <a:noFill/>
+          <a:ln w="12700">
+            <a:solidFill>
+              <a:srgbClr val="1A5276"/>
+            </a:solidFill>
+            <a:prstDash val="solid"/>
+          </a:ln>
+        </p:spPr>
+        <p:txBody>
+          <a:bodyPr/>
+          <a:lstStyle/>
+          <a:p>
+            <a:endParaRPr lang="es-CO"/>
+          </a:p>
+        </p:txBody>
+      </p:sp>
+      <p:sp>
+        <p:nvSpPr>
+          <p:cNvPr id="7" name="Text 5"/>
+          <p:cNvSpPr/>
+          <p:nvPr/>
+        </p:nvSpPr>
+        <p:spPr>
+          <a:xfrm>
+            <a:off x="548640" y="3291840"/>
+            <a:ext cx="8046720" cy="822960"/>
+          </a:xfrm>
+          <a:prstGeom prst="rect">
+            <a:avLst/>
+          </a:prstGeom>
+          <a:noFill/>
+          <a:ln/>
+        </p:spPr>
+        <p:txBody>
+          <a:bodyPr wrap="square" rtlCol="0" anchor="ctr"/>
+          <a:lstStyle/>
+          <a:p>
+            <a:pPr marL="0" indent="0">
+              <a:buNone/>
+            </a:pPr>
+            <a:r>
+              <a:rPr lang="en-US" sz="1300" dirty="0">
+                <a:solidFill>
+                  <a:srgbClr val="7FB3D3"/>
+                </a:solidFill>
+                <a:latin typeface="Arial" pitchFamily="34" charset="0"/>
+                <a:ea typeface="Arial" pitchFamily="34" charset="-122"/>
+                <a:cs typeface="Arial" pitchFamily="34" charset="-120"/>
+              </a:rPr>
+              <a:t>David Ricardo Grandas Cárdenas  ·  Danilo Andrés Cortés Saavedra  ·  Edisson Steven Bustos Galeano</a:t>
+            </a:r>
+            <a:endParaRPr lang="en-US" sz="1300" dirty="0"/>
+          </a:p>
+          <a:p>
+            <a:pPr marL="0" indent="0">
+              <a:buNone/>
+            </a:pPr>
+            <a:r>
+              <a:rPr lang="en-US" sz="1300" dirty="0">
+                <a:solidFill>
+                  <a:srgbClr val="7FB3D3"/>
+                </a:solidFill>
+                <a:latin typeface="Arial" pitchFamily="34" charset="0"/>
+                <a:ea typeface="Arial" pitchFamily="34" charset="-122"/>
+                <a:cs typeface="Arial" pitchFamily="34" charset="-120"/>
+              </a:rPr>
+              <a:t>Universidad de La Sabana  ·  Maestría en Arquitectura de Software  ·  Mayo 2026</a:t>
+            </a:r>
+            <a:endParaRPr lang="en-US" sz="1300" dirty="0"/>
+          </a:p>
+        </p:txBody>
+      </p:sp>
+      <p:sp>
+        <p:nvSpPr>
+          <p:cNvPr id="8" name="Shape 6"/>
+          <p:cNvSpPr/>
+          <p:nvPr/>
+        </p:nvSpPr>
+        <p:spPr>
+          <a:xfrm>
+            <a:off x="548640" y="4206240"/>
+            <a:ext cx="1463040" cy="365760"/>
+          </a:xfrm>
+          <a:prstGeom prst="roundRect">
+            <a:avLst>
+              <a:gd name="adj" fmla="val 12500"/>
+            </a:avLst>
+          </a:prstGeom>
+          <a:solidFill>
+            <a:srgbClr val="2E86C1"/>
+          </a:solidFill>
+          <a:ln w="12700">
+            <a:solidFill>
+              <a:srgbClr val="2E86C1"/>
+            </a:solidFill>
+            <a:prstDash val="solid"/>
+          </a:ln>
+        </p:spPr>
+        <p:txBody>
+          <a:bodyPr/>
+          <a:lstStyle/>
+          <a:p>
+            <a:endParaRPr lang="es-CO"/>
+          </a:p>
+        </p:txBody>
+      </p:sp>
+      <p:sp>
+        <p:nvSpPr>
+          <p:cNvPr id="9" name="Text 7"/>
+          <p:cNvSpPr/>
+          <p:nvPr/>
+        </p:nvSpPr>
+        <p:spPr>
+          <a:xfrm>
+            <a:off x="548640" y="4206240"/>
+            <a:ext cx="1463040" cy="365760"/>
+          </a:xfrm>
+          <a:prstGeom prst="rect">
+            <a:avLst/>
+          </a:prstGeom>
+          <a:noFill/>
+          <a:ln/>
+        </p:spPr>
+        <p:txBody>
+          <a:bodyPr wrap="square" lIns="0" tIns="0" rIns="0" bIns="0" rtlCol="0" anchor="ctr"/>
+          <a:lstStyle/>
+          <a:p>
+            <a:pPr marL="0" indent="0" algn="ctr">
+              <a:buNone/>
+            </a:pPr>
+            <a:r>
+              <a:rPr lang="en-US" sz="1100" b="1" dirty="0">
+                <a:solidFill>
+                  <a:srgbClr val="FFFFFF"/>
+                </a:solidFill>
+                <a:latin typeface="Arial" pitchFamily="34" charset="0"/>
+                <a:ea typeface="Arial" pitchFamily="34" charset="-122"/>
+                <a:cs typeface="Arial" pitchFamily="34" charset="-120"/>
+              </a:rPr>
+              <a:t>PostgreSQL</a:t>
+            </a:r>
+            <a:endParaRPr lang="en-US" sz="1100" dirty="0"/>
+          </a:p>
+        </p:txBody>
+      </p:sp>
+      <p:sp>
+        <p:nvSpPr>
+          <p:cNvPr id="10" name="Shape 8"/>
+          <p:cNvSpPr/>
+          <p:nvPr/>
+        </p:nvSpPr>
+        <p:spPr>
+          <a:xfrm>
+            <a:off x="2468880" y="4206240"/>
+            <a:ext cx="1463040" cy="365760"/>
+          </a:xfrm>
+          <a:prstGeom prst="roundRect">
+            <a:avLst>
+              <a:gd name="adj" fmla="val 12500"/>
+            </a:avLst>
+          </a:prstGeom>
+          <a:solidFill>
+            <a:srgbClr val="2E8B57"/>
+          </a:solidFill>
+          <a:ln w="12700">
+            <a:solidFill>
+              <a:srgbClr val="2E8B57"/>
+            </a:solidFill>
+            <a:prstDash val="solid"/>
+          </a:ln>
+        </p:spPr>
+        <p:txBody>
+          <a:bodyPr/>
+          <a:lstStyle/>
+          <a:p>
+            <a:endParaRPr lang="es-CO"/>
+          </a:p>
+        </p:txBody>
+      </p:sp>
+      <p:sp>
+        <p:nvSpPr>
+          <p:cNvPr id="11" name="Text 9"/>
+          <p:cNvSpPr/>
+          <p:nvPr/>
+        </p:nvSpPr>
+        <p:spPr>
+          <a:xfrm>
+            <a:off x="2468880" y="4206240"/>
+            <a:ext cx="1463040" cy="365760"/>
+          </a:xfrm>
+          <a:prstGeom prst="rect">
+            <a:avLst/>
+          </a:prstGeom>
+          <a:noFill/>
+          <a:ln/>
+        </p:spPr>
+        <p:txBody>
+          <a:bodyPr wrap="square" lIns="0" tIns="0" rIns="0" bIns="0" rtlCol="0" anchor="ctr"/>
+          <a:lstStyle/>
+          <a:p>
+            <a:pPr marL="0" indent="0" algn="ctr">
+              <a:buNone/>
+            </a:pPr>
+            <a:r>
+              <a:rPr lang="en-US" sz="1100" b="1" dirty="0">
+                <a:solidFill>
+                  <a:srgbClr val="FFFFFF"/>
+                </a:solidFill>
+                <a:latin typeface="Arial" pitchFamily="34" charset="0"/>
+                <a:ea typeface="Arial" pitchFamily="34" charset="-122"/>
+                <a:cs typeface="Arial" pitchFamily="34" charset="-120"/>
+              </a:rPr>
+              <a:t>MongoDB</a:t>
+            </a:r>
+            <a:endParaRPr lang="en-US" sz="1100" dirty="0"/>
+          </a:p>
+        </p:txBody>
+      </p:sp>
+      <p:sp>
+        <p:nvSpPr>
+          <p:cNvPr id="12" name="Shape 10"/>
+          <p:cNvSpPr/>
+          <p:nvPr/>
+        </p:nvSpPr>
+        <p:spPr>
+          <a:xfrm>
+            <a:off x="4206240" y="4206240"/>
+            <a:ext cx="1463040" cy="365760"/>
+          </a:xfrm>
+          <a:prstGeom prst="roundRect">
+            <a:avLst>
+              <a:gd name="adj" fmla="val 12500"/>
+            </a:avLst>
+          </a:prstGeom>
+          <a:solidFill>
+            <a:srgbClr val="555555"/>
+          </a:solidFill>
+          <a:ln w="12700">
+            <a:solidFill>
+              <a:srgbClr val="555555"/>
+            </a:solidFill>
+            <a:prstDash val="solid"/>
+          </a:ln>
+        </p:spPr>
+        <p:txBody>
+          <a:bodyPr/>
+          <a:lstStyle/>
+          <a:p>
+            <a:endParaRPr lang="es-CO"/>
+          </a:p>
+        </p:txBody>
+      </p:sp>
+      <p:sp>
+        <p:nvSpPr>
+          <p:cNvPr id="13" name="Text 11"/>
+          <p:cNvSpPr/>
+          <p:nvPr/>
+        </p:nvSpPr>
+        <p:spPr>
+          <a:xfrm>
+            <a:off x="4206240" y="4206240"/>
+            <a:ext cx="1463040" cy="365760"/>
+          </a:xfrm>
+          <a:prstGeom prst="rect">
+            <a:avLst/>
+          </a:prstGeom>
+          <a:noFill/>
+          <a:ln/>
+        </p:spPr>
+        <p:txBody>
+          <a:bodyPr wrap="square" lIns="0" tIns="0" rIns="0" bIns="0" rtlCol="0" anchor="ctr"/>
+          <a:lstStyle/>
+          <a:p>
+            <a:pPr marL="0" indent="0" algn="ctr">
+              <a:buNone/>
+            </a:pPr>
+            <a:r>
+              <a:rPr lang="en-US" sz="1100" b="1" dirty="0">
+                <a:solidFill>
+                  <a:srgbClr val="FFFFFF"/>
+                </a:solidFill>
+                <a:latin typeface="Arial" pitchFamily="34" charset="0"/>
+                <a:ea typeface="Arial" pitchFamily="34" charset="-122"/>
+                <a:cs typeface="Arial" pitchFamily="34" charset="-120"/>
+              </a:rPr>
+              <a:t>Supabase</a:t>
+            </a:r>
+            <a:endParaRPr lang="en-US" sz="1100" dirty="0"/>
+          </a:p>
+        </p:txBody>
+      </p:sp>
+      <p:sp>
+        <p:nvSpPr>
+          <p:cNvPr id="14" name="Shape 12"/>
+          <p:cNvSpPr/>
+          <p:nvPr/>
+        </p:nvSpPr>
+        <p:spPr>
+          <a:xfrm>
+            <a:off x="5760720" y="4206240"/>
+            <a:ext cx="1463040" cy="365760"/>
+          </a:xfrm>
+          <a:prstGeom prst="roundRect">
+            <a:avLst>
+              <a:gd name="adj" fmla="val 12500"/>
+            </a:avLst>
           </a:prstGeom>
           <a:solidFill>
             <a:srgbClr val="F0A500"/>
@@ -1878,421 +2058,17 @@
             <a:prstDash val="solid"/>
           </a:ln>
         </p:spPr>
-      </p:sp>
-      <p:sp>
-        <p:nvSpPr>
-          <p:cNvPr id="3" name="Text 1"/>
-          <p:cNvSpPr/>
-          <p:nvPr/>
-        </p:nvSpPr>
-        <p:spPr>
-          <a:xfrm>
-            <a:off x="548640" y="457200"/>
-            <a:ext cx="8046720" cy="457200"/>
-          </a:xfrm>
-          <a:prstGeom prst="rect">
-            <a:avLst/>
-          </a:prstGeom>
-          <a:noFill/>
-          <a:ln/>
-        </p:spPr>
-        <p:txBody>
-          <a:bodyPr wrap="square" rtlCol="0" anchor="ctr"/>
-          <a:lstStyle/>
-          <a:p>
-            <a:pPr indent="0" marL="0">
-              <a:buNone/>
-            </a:pPr>
-            <a:r>
-              <a:rPr lang="en-US" sz="1400" spc="300" kern="0" dirty="0">
-                <a:solidFill>
-                  <a:srgbClr val="A0C4E8"/>
-                </a:solidFill>
-                <a:latin typeface="Arial" pitchFamily="34" charset="0"/>
-                <a:ea typeface="Arial" pitchFamily="34" charset="-122"/>
-                <a:cs typeface="Arial" pitchFamily="34" charset="-120"/>
-              </a:rPr>
-              <a:t>ARQUITECTURA HÍBRIDA DE BASE DE DATOS</a:t>
-            </a:r>
-            <a:endParaRPr lang="en-US" sz="1400" dirty="0"/>
-          </a:p>
-        </p:txBody>
-      </p:sp>
-      <p:sp>
-        <p:nvSpPr>
-          <p:cNvPr id="4" name="Text 2"/>
-          <p:cNvSpPr/>
-          <p:nvPr/>
-        </p:nvSpPr>
-        <p:spPr>
-          <a:xfrm>
-            <a:off x="548640" y="1005840"/>
-            <a:ext cx="8046720" cy="1005840"/>
-          </a:xfrm>
-          <a:prstGeom prst="rect">
-            <a:avLst/>
-          </a:prstGeom>
-          <a:noFill/>
-          <a:ln/>
-        </p:spPr>
-        <p:txBody>
-          <a:bodyPr wrap="square" rtlCol="0" anchor="ctr"/>
-          <a:lstStyle/>
-          <a:p>
-            <a:pPr indent="0" marL="0">
-              <a:buNone/>
-            </a:pPr>
-            <a:r>
-              <a:rPr lang="en-US" sz="5200" b="1" dirty="0">
-                <a:solidFill>
-                  <a:srgbClr val="FFFFFF"/>
-                </a:solidFill>
-                <a:latin typeface="Arial" pitchFamily="34" charset="0"/>
-                <a:ea typeface="Arial" pitchFamily="34" charset="-122"/>
-                <a:cs typeface="Arial" pitchFamily="34" charset="-120"/>
-              </a:rPr>
-              <a:t>Ecommify</a:t>
-            </a:r>
-            <a:endParaRPr lang="en-US" sz="5200" dirty="0"/>
-          </a:p>
-        </p:txBody>
-      </p:sp>
-      <p:sp>
-        <p:nvSpPr>
-          <p:cNvPr id="5" name="Text 3"/>
-          <p:cNvSpPr/>
-          <p:nvPr/>
-        </p:nvSpPr>
-        <p:spPr>
-          <a:xfrm>
-            <a:off x="548640" y="2011680"/>
-            <a:ext cx="8046720" cy="914400"/>
-          </a:xfrm>
-          <a:prstGeom prst="rect">
-            <a:avLst/>
-          </a:prstGeom>
-          <a:noFill/>
-          <a:ln/>
-        </p:spPr>
-        <p:txBody>
-          <a:bodyPr wrap="square" rtlCol="0" anchor="ctr"/>
-          <a:lstStyle/>
-          <a:p>
-            <a:pPr indent="0" marL="0">
-              <a:buNone/>
-            </a:pPr>
-            <a:r>
-              <a:rPr lang="en-US" sz="1800" dirty="0">
-                <a:solidFill>
-                  <a:srgbClr val="A0C4E8"/>
-                </a:solidFill>
-                <a:latin typeface="Arial" pitchFamily="34" charset="0"/>
-                <a:ea typeface="Arial" pitchFamily="34" charset="-122"/>
-                <a:cs typeface="Arial" pitchFamily="34" charset="-120"/>
-              </a:rPr>
-              <a:t>Diseño Conceptual y Lógico</a:t>
-            </a:r>
-            <a:endParaRPr lang="en-US" sz="1800" dirty="0"/>
-          </a:p>
-          <a:p>
-            <a:pPr indent="0" marL="0">
-              <a:buNone/>
-            </a:pPr>
-            <a:r>
-              <a:rPr lang="en-US" sz="1800" dirty="0">
-                <a:solidFill>
-                  <a:srgbClr val="A0C4E8"/>
-                </a:solidFill>
-                <a:latin typeface="Arial" pitchFamily="34" charset="0"/>
-                <a:ea typeface="Arial" pitchFamily="34" charset="-122"/>
-                <a:cs typeface="Arial" pitchFamily="34" charset="-120"/>
-              </a:rPr>
-              <a:t>Plataforma e-commerce multivendedor de productos tecnológicos</a:t>
-            </a:r>
-            <a:endParaRPr lang="en-US" sz="1800" dirty="0"/>
-          </a:p>
-        </p:txBody>
-      </p:sp>
-      <p:sp>
-        <p:nvSpPr>
-          <p:cNvPr id="6" name="Shape 4"/>
-          <p:cNvSpPr/>
-          <p:nvPr/>
-        </p:nvSpPr>
-        <p:spPr>
-          <a:xfrm>
-            <a:off x="548640" y="3108960"/>
-            <a:ext cx="8046720" cy="0"/>
-          </a:xfrm>
-          <a:prstGeom prst="line">
-            <a:avLst/>
-          </a:prstGeom>
-          <a:noFill/>
-          <a:ln w="12700">
-            <a:solidFill>
-              <a:srgbClr val="1A5276"/>
-            </a:solidFill>
-            <a:prstDash val="solid"/>
-          </a:ln>
-        </p:spPr>
-      </p:sp>
-      <p:sp>
-        <p:nvSpPr>
-          <p:cNvPr id="7" name="Text 5"/>
-          <p:cNvSpPr/>
-          <p:nvPr/>
-        </p:nvSpPr>
-        <p:spPr>
-          <a:xfrm>
-            <a:off x="548640" y="3291840"/>
-            <a:ext cx="8046720" cy="822960"/>
-          </a:xfrm>
-          <a:prstGeom prst="rect">
-            <a:avLst/>
-          </a:prstGeom>
-          <a:noFill/>
-          <a:ln/>
-        </p:spPr>
-        <p:txBody>
-          <a:bodyPr wrap="square" rtlCol="0" anchor="ctr"/>
-          <a:lstStyle/>
-          <a:p>
-            <a:pPr indent="0" marL="0">
-              <a:buNone/>
-            </a:pPr>
-            <a:r>
-              <a:rPr lang="en-US" sz="1300" dirty="0">
-                <a:solidFill>
-                  <a:srgbClr val="7FB3D3"/>
-                </a:solidFill>
-                <a:latin typeface="Arial" pitchFamily="34" charset="0"/>
-                <a:ea typeface="Arial" pitchFamily="34" charset="-122"/>
-                <a:cs typeface="Arial" pitchFamily="34" charset="-120"/>
-              </a:rPr>
-              <a:t>David Ricardo Grandas Cárdenas  ·  Danilo Andrés Cortés Saavedra  ·  Edisson Steven Bustos Galeano</a:t>
-            </a:r>
-            <a:endParaRPr lang="en-US" sz="1300" dirty="0"/>
-          </a:p>
-          <a:p>
-            <a:pPr indent="0" marL="0">
-              <a:buNone/>
-            </a:pPr>
-            <a:r>
-              <a:rPr lang="en-US" sz="1300" dirty="0">
-                <a:solidFill>
-                  <a:srgbClr val="7FB3D3"/>
-                </a:solidFill>
-                <a:latin typeface="Arial" pitchFamily="34" charset="0"/>
-                <a:ea typeface="Arial" pitchFamily="34" charset="-122"/>
-                <a:cs typeface="Arial" pitchFamily="34" charset="-120"/>
-              </a:rPr>
-              <a:t>Universidad de La Sabana  ·  Maestría en Arquitectura de Software  ·  Mayo 2026</a:t>
-            </a:r>
-            <a:endParaRPr lang="en-US" sz="1300" dirty="0"/>
-          </a:p>
-        </p:txBody>
-      </p:sp>
-      <p:sp>
-        <p:nvSpPr>
-          <p:cNvPr id="8" name="Shape 6"/>
-          <p:cNvSpPr/>
-          <p:nvPr/>
-        </p:nvSpPr>
-        <p:spPr>
-          <a:xfrm>
-            <a:off x="548640" y="4206240"/>
-            <a:ext cx="1463040" cy="365760"/>
-          </a:xfrm>
-          <a:prstGeom prst="roundRect">
-            <a:avLst>
-              <a:gd name="adj" fmla="val 12500"/>
-            </a:avLst>
-          </a:prstGeom>
-          <a:solidFill>
-            <a:srgbClr val="2E86C1"/>
-          </a:solidFill>
-          <a:ln w="12700">
-            <a:solidFill>
-              <a:srgbClr val="2E86C1"/>
-            </a:solidFill>
-            <a:prstDash val="solid"/>
-          </a:ln>
-        </p:spPr>
-      </p:sp>
-      <p:sp>
-        <p:nvSpPr>
-          <p:cNvPr id="9" name="Text 7"/>
-          <p:cNvSpPr/>
-          <p:nvPr/>
-        </p:nvSpPr>
-        <p:spPr>
-          <a:xfrm>
-            <a:off x="548640" y="4206240"/>
-            <a:ext cx="1463040" cy="365760"/>
-          </a:xfrm>
-          <a:prstGeom prst="rect">
-            <a:avLst/>
-          </a:prstGeom>
-          <a:noFill/>
-          <a:ln/>
-        </p:spPr>
-        <p:txBody>
-          <a:bodyPr wrap="square" lIns="0" tIns="0" rIns="0" bIns="0" rtlCol="0" anchor="ctr"/>
-          <a:lstStyle/>
-          <a:p>
-            <a:pPr algn="ctr" indent="0" marL="0">
-              <a:buNone/>
-            </a:pPr>
-            <a:r>
-              <a:rPr lang="en-US" sz="1100" b="1" dirty="0">
-                <a:solidFill>
-                  <a:srgbClr val="FFFFFF"/>
-                </a:solidFill>
-                <a:latin typeface="Arial" pitchFamily="34" charset="0"/>
-                <a:ea typeface="Arial" pitchFamily="34" charset="-122"/>
-                <a:cs typeface="Arial" pitchFamily="34" charset="-120"/>
-              </a:rPr>
-              <a:t>PostgreSQL</a:t>
-            </a:r>
-            <a:endParaRPr lang="en-US" sz="1100" dirty="0"/>
-          </a:p>
-        </p:txBody>
-      </p:sp>
-      <p:sp>
-        <p:nvSpPr>
-          <p:cNvPr id="10" name="Shape 8"/>
-          <p:cNvSpPr/>
-          <p:nvPr/>
-        </p:nvSpPr>
-        <p:spPr>
-          <a:xfrm>
-            <a:off x="2468880" y="4206240"/>
-            <a:ext cx="1463040" cy="365760"/>
-          </a:xfrm>
-          <a:prstGeom prst="roundRect">
-            <a:avLst>
-              <a:gd name="adj" fmla="val 12500"/>
-            </a:avLst>
-          </a:prstGeom>
-          <a:solidFill>
-            <a:srgbClr val="2E8B57"/>
-          </a:solidFill>
-          <a:ln w="12700">
-            <a:solidFill>
-              <a:srgbClr val="2E8B57"/>
-            </a:solidFill>
-            <a:prstDash val="solid"/>
-          </a:ln>
-        </p:spPr>
-      </p:sp>
-      <p:sp>
-        <p:nvSpPr>
-          <p:cNvPr id="11" name="Text 9"/>
-          <p:cNvSpPr/>
-          <p:nvPr/>
-        </p:nvSpPr>
-        <p:spPr>
-          <a:xfrm>
-            <a:off x="2468880" y="4206240"/>
-            <a:ext cx="1463040" cy="365760"/>
-          </a:xfrm>
-          <a:prstGeom prst="rect">
-            <a:avLst/>
-          </a:prstGeom>
-          <a:noFill/>
-          <a:ln/>
-        </p:spPr>
-        <p:txBody>
-          <a:bodyPr wrap="square" lIns="0" tIns="0" rIns="0" bIns="0" rtlCol="0" anchor="ctr"/>
-          <a:lstStyle/>
-          <a:p>
-            <a:pPr algn="ctr" indent="0" marL="0">
-              <a:buNone/>
-            </a:pPr>
-            <a:r>
-              <a:rPr lang="en-US" sz="1100" b="1" dirty="0">
-                <a:solidFill>
-                  <a:srgbClr val="FFFFFF"/>
-                </a:solidFill>
-                <a:latin typeface="Arial" pitchFamily="34" charset="0"/>
-                <a:ea typeface="Arial" pitchFamily="34" charset="-122"/>
-                <a:cs typeface="Arial" pitchFamily="34" charset="-120"/>
-              </a:rPr>
-              <a:t>MongoDB</a:t>
-            </a:r>
-            <a:endParaRPr lang="en-US" sz="1100" dirty="0"/>
-          </a:p>
-        </p:txBody>
-      </p:sp>
-      <p:sp>
-        <p:nvSpPr>
-          <p:cNvPr id="12" name="Shape 10"/>
-          <p:cNvSpPr/>
-          <p:nvPr/>
-        </p:nvSpPr>
-        <p:spPr>
-          <a:xfrm>
-            <a:off x="4206240" y="4206240"/>
-            <a:ext cx="1463040" cy="365760"/>
-          </a:xfrm>
-          <a:prstGeom prst="roundRect">
-            <a:avLst>
-              <a:gd name="adj" fmla="val 12500"/>
-            </a:avLst>
-          </a:prstGeom>
-          <a:solidFill>
-            <a:srgbClr val="555555"/>
-          </a:solidFill>
-          <a:ln w="12700">
-            <a:solidFill>
-              <a:srgbClr val="555555"/>
-            </a:solidFill>
-            <a:prstDash val="solid"/>
-          </a:ln>
-        </p:spPr>
-      </p:sp>
-      <p:sp>
-        <p:nvSpPr>
-          <p:cNvPr id="13" name="Text 11"/>
-          <p:cNvSpPr/>
-          <p:nvPr/>
-        </p:nvSpPr>
-        <p:spPr>
-          <a:xfrm>
-            <a:off x="4206240" y="4206240"/>
-            <a:ext cx="1463040" cy="365760"/>
-          </a:xfrm>
-          <a:prstGeom prst="rect">
-            <a:avLst/>
-          </a:prstGeom>
-          <a:noFill/>
-          <a:ln/>
-        </p:spPr>
-        <p:txBody>
-          <a:bodyPr wrap="square" lIns="0" tIns="0" rIns="0" bIns="0" rtlCol="0" anchor="ctr"/>
-          <a:lstStyle/>
-          <a:p>
-            <a:pPr algn="ctr" indent="0" marL="0">
-              <a:buNone/>
-            </a:pPr>
-            <a:r>
-              <a:rPr lang="en-US" sz="1100" b="1" dirty="0">
-                <a:solidFill>
-                  <a:srgbClr val="FFFFFF"/>
-                </a:solidFill>
-                <a:latin typeface="Arial" pitchFamily="34" charset="0"/>
-                <a:ea typeface="Arial" pitchFamily="34" charset="-122"/>
-                <a:cs typeface="Arial" pitchFamily="34" charset="-120"/>
-              </a:rPr>
-              <a:t>Supabase</a:t>
-            </a:r>
-            <a:endParaRPr lang="en-US" sz="1100" dirty="0"/>
-          </a:p>
-        </p:txBody>
-      </p:sp>
-      <p:sp>
-        <p:nvSpPr>
-          <p:cNvPr id="14" name="Shape 12"/>
+        <p:txBody>
+          <a:bodyPr/>
+          <a:lstStyle/>
+          <a:p>
+            <a:endParaRPr lang="es-CO"/>
+          </a:p>
+        </p:txBody>
+      </p:sp>
+      <p:sp>
+        <p:nvSpPr>
+          <p:cNvPr id="15" name="Text 13"/>
           <p:cNvSpPr/>
           <p:nvPr/>
         </p:nvSpPr>
@@ -2301,33 +2077,6 @@
             <a:off x="5760720" y="4206240"/>
             <a:ext cx="1463040" cy="365760"/>
           </a:xfrm>
-          <a:prstGeom prst="roundRect">
-            <a:avLst>
-              <a:gd name="adj" fmla="val 12500"/>
-            </a:avLst>
-          </a:prstGeom>
-          <a:solidFill>
-            <a:srgbClr val="F0A500"/>
-          </a:solidFill>
-          <a:ln w="12700">
-            <a:solidFill>
-              <a:srgbClr val="F0A500"/>
-            </a:solidFill>
-            <a:prstDash val="solid"/>
-          </a:ln>
-        </p:spPr>
-      </p:sp>
-      <p:sp>
-        <p:nvSpPr>
-          <p:cNvPr id="15" name="Text 13"/>
-          <p:cNvSpPr/>
-          <p:nvPr/>
-        </p:nvSpPr>
-        <p:spPr>
-          <a:xfrm>
-            <a:off x="5760720" y="4206240"/>
-            <a:ext cx="1463040" cy="365760"/>
-          </a:xfrm>
           <a:prstGeom prst="rect">
             <a:avLst/>
           </a:prstGeom>
@@ -2338,7 +2087,7 @@
           <a:bodyPr wrap="square" lIns="0" tIns="0" rIns="0" bIns="0" rtlCol="0" anchor="ctr"/>
           <a:lstStyle/>
           <a:p>
-            <a:pPr algn="ctr" indent="0" marL="0">
+            <a:pPr marL="0" indent="0" algn="ctr">
               <a:buNone/>
             </a:pPr>
             <a:r>
@@ -2372,6 +2121,7 @@
         <a:solidFill>
           <a:srgbClr val="F2F4F7"/>
         </a:solidFill>
+        <a:effectLst/>
       </p:bgPr>
     </p:bg>
     <p:spTree>
@@ -2412,6 +2162,13 @@
             <a:prstDash val="solid"/>
           </a:ln>
         </p:spPr>
+        <p:txBody>
+          <a:bodyPr/>
+          <a:lstStyle/>
+          <a:p>
+            <a:endParaRPr lang="es-CO"/>
+          </a:p>
+        </p:txBody>
       </p:sp>
       <p:sp>
         <p:nvSpPr>
@@ -2434,7 +2191,7 @@
           <a:bodyPr wrap="square" rtlCol="0" anchor="ctr"/>
           <a:lstStyle/>
           <a:p>
-            <a:pPr indent="0" marL="0">
+            <a:pPr marL="0" indent="0">
               <a:buNone/>
             </a:pPr>
             <a:r>
@@ -2476,13 +2233,20 @@
             <a:prstDash val="solid"/>
           </a:ln>
           <a:effectLst>
-            <a:outerShdw sx="100000" sy="100000" kx="0" ky="0" algn="bl" rotWithShape="0" blurRad="101600" dist="38100" dir="8100000">
+            <a:outerShdw blurRad="101600" dist="38100" dir="8100000" algn="bl" rotWithShape="0">
               <a:srgbClr val="000000">
                 <a:alpha val="12000"/>
               </a:srgbClr>
             </a:outerShdw>
           </a:effectLst>
         </p:spPr>
+        <p:txBody>
+          <a:bodyPr/>
+          <a:lstStyle/>
+          <a:p>
+            <a:endParaRPr lang="es-CO"/>
+          </a:p>
+        </p:txBody>
       </p:sp>
       <p:sp>
         <p:nvSpPr>
@@ -2505,7 +2269,7 @@
           <a:bodyPr wrap="square" rtlCol="0" anchor="ctr"/>
           <a:lstStyle/>
           <a:p>
-            <a:pPr algn="ctr" indent="0" marL="0">
+            <a:pPr marL="0" indent="0" algn="ctr">
               <a:buNone/>
             </a:pPr>
             <a:r>
@@ -2544,7 +2308,7 @@
           <a:bodyPr wrap="square" rtlCol="0" anchor="ctr"/>
           <a:lstStyle/>
           <a:p>
-            <a:pPr algn="ctr" indent="0" marL="0">
+            <a:pPr marL="0" indent="0" algn="ctr">
               <a:buNone/>
             </a:pPr>
             <a:r>
@@ -2586,6 +2350,13 @@
             <a:prstDash val="solid"/>
           </a:ln>
         </p:spPr>
+        <p:txBody>
+          <a:bodyPr/>
+          <a:lstStyle/>
+          <a:p>
+            <a:endParaRPr lang="es-CO"/>
+          </a:p>
+        </p:txBody>
       </p:sp>
       <p:sp>
         <p:nvSpPr>
@@ -2608,7 +2379,7 @@
           <a:bodyPr wrap="square" lIns="0" tIns="0" rIns="0" bIns="0" rtlCol="0" anchor="ctr"/>
           <a:lstStyle/>
           <a:p>
-            <a:pPr algn="ctr" indent="0" marL="0">
+            <a:pPr marL="0" indent="0" algn="ctr">
               <a:buNone/>
             </a:pPr>
             <a:r>
@@ -2647,7 +2418,7 @@
           <a:bodyPr wrap="square" rtlCol="0" anchor="ctr"/>
           <a:lstStyle/>
           <a:p>
-            <a:pPr algn="ctr" indent="0" marL="0">
+            <a:pPr marL="0" indent="0" algn="ctr">
               <a:buNone/>
             </a:pPr>
             <a:r>
@@ -2664,7 +2435,7 @@
             <a:endParaRPr lang="en-US" sz="900" dirty="0"/>
           </a:p>
           <a:p>
-            <a:pPr algn="ctr" indent="0" marL="0">
+            <a:pPr marL="0" indent="0" algn="ctr">
               <a:buNone/>
             </a:pPr>
             <a:r>
@@ -2706,13 +2477,20 @@
             <a:prstDash val="solid"/>
           </a:ln>
           <a:effectLst>
-            <a:outerShdw sx="100000" sy="100000" kx="0" ky="0" algn="bl" rotWithShape="0" blurRad="101600" dist="38100" dir="8100000">
+            <a:outerShdw blurRad="101600" dist="38100" dir="8100000" algn="bl" rotWithShape="0">
               <a:srgbClr val="000000">
                 <a:alpha val="12000"/>
               </a:srgbClr>
             </a:outerShdw>
           </a:effectLst>
         </p:spPr>
+        <p:txBody>
+          <a:bodyPr/>
+          <a:lstStyle/>
+          <a:p>
+            <a:endParaRPr lang="es-CO"/>
+          </a:p>
+        </p:txBody>
       </p:sp>
       <p:sp>
         <p:nvSpPr>
@@ -2735,7 +2513,7 @@
           <a:bodyPr wrap="square" rtlCol="0" anchor="ctr"/>
           <a:lstStyle/>
           <a:p>
-            <a:pPr algn="ctr" indent="0" marL="0">
+            <a:pPr marL="0" indent="0" algn="ctr">
               <a:buNone/>
             </a:pPr>
             <a:r>
@@ -2774,7 +2552,7 @@
           <a:bodyPr wrap="square" rtlCol="0" anchor="ctr"/>
           <a:lstStyle/>
           <a:p>
-            <a:pPr algn="ctr" indent="0" marL="0">
+            <a:pPr marL="0" indent="0" algn="ctr">
               <a:buNone/>
             </a:pPr>
             <a:r>
@@ -2816,6 +2594,13 @@
             <a:prstDash val="solid"/>
           </a:ln>
         </p:spPr>
+        <p:txBody>
+          <a:bodyPr/>
+          <a:lstStyle/>
+          <a:p>
+            <a:endParaRPr lang="es-CO"/>
+          </a:p>
+        </p:txBody>
       </p:sp>
       <p:sp>
         <p:nvSpPr>
@@ -2838,7 +2623,7 @@
           <a:bodyPr wrap="square" lIns="0" tIns="0" rIns="0" bIns="0" rtlCol="0" anchor="ctr"/>
           <a:lstStyle/>
           <a:p>
-            <a:pPr algn="ctr" indent="0" marL="0">
+            <a:pPr marL="0" indent="0" algn="ctr">
               <a:buNone/>
             </a:pPr>
             <a:r>
@@ -2877,7 +2662,7 @@
           <a:bodyPr wrap="square" rtlCol="0" anchor="ctr"/>
           <a:lstStyle/>
           <a:p>
-            <a:pPr algn="ctr" indent="0" marL="0">
+            <a:pPr marL="0" indent="0" algn="ctr">
               <a:buNone/>
             </a:pPr>
             <a:r>
@@ -2894,7 +2679,7 @@
             <a:endParaRPr lang="en-US" sz="900" dirty="0"/>
           </a:p>
           <a:p>
-            <a:pPr algn="ctr" indent="0" marL="0">
+            <a:pPr marL="0" indent="0" algn="ctr">
               <a:buNone/>
             </a:pPr>
             <a:r>
@@ -2936,13 +2721,20 @@
             <a:prstDash val="solid"/>
           </a:ln>
           <a:effectLst>
-            <a:outerShdw sx="100000" sy="100000" kx="0" ky="0" algn="bl" rotWithShape="0" blurRad="101600" dist="38100" dir="8100000">
+            <a:outerShdw blurRad="101600" dist="38100" dir="8100000" algn="bl" rotWithShape="0">
               <a:srgbClr val="000000">
                 <a:alpha val="12000"/>
               </a:srgbClr>
             </a:outerShdw>
           </a:effectLst>
         </p:spPr>
+        <p:txBody>
+          <a:bodyPr/>
+          <a:lstStyle/>
+          <a:p>
+            <a:endParaRPr lang="es-CO"/>
+          </a:p>
+        </p:txBody>
       </p:sp>
       <p:sp>
         <p:nvSpPr>
@@ -2965,7 +2757,7 @@
           <a:bodyPr wrap="square" rtlCol="0" anchor="ctr"/>
           <a:lstStyle/>
           <a:p>
-            <a:pPr algn="ctr" indent="0" marL="0">
+            <a:pPr marL="0" indent="0" algn="ctr">
               <a:buNone/>
             </a:pPr>
             <a:r>
@@ -3004,7 +2796,7 @@
           <a:bodyPr wrap="square" rtlCol="0" anchor="ctr"/>
           <a:lstStyle/>
           <a:p>
-            <a:pPr algn="ctr" indent="0" marL="0">
+            <a:pPr marL="0" indent="0" algn="ctr">
               <a:buNone/>
             </a:pPr>
             <a:r>
@@ -3046,6 +2838,13 @@
             <a:prstDash val="solid"/>
           </a:ln>
         </p:spPr>
+        <p:txBody>
+          <a:bodyPr/>
+          <a:lstStyle/>
+          <a:p>
+            <a:endParaRPr lang="es-CO"/>
+          </a:p>
+        </p:txBody>
       </p:sp>
       <p:sp>
         <p:nvSpPr>
@@ -3068,7 +2867,7 @@
           <a:bodyPr wrap="square" lIns="0" tIns="0" rIns="0" bIns="0" rtlCol="0" anchor="ctr"/>
           <a:lstStyle/>
           <a:p>
-            <a:pPr algn="ctr" indent="0" marL="0">
+            <a:pPr marL="0" indent="0" algn="ctr">
               <a:buNone/>
             </a:pPr>
             <a:r>
@@ -3107,7 +2906,7 @@
           <a:bodyPr wrap="square" rtlCol="0" anchor="ctr"/>
           <a:lstStyle/>
           <a:p>
-            <a:pPr algn="ctr" indent="0" marL="0">
+            <a:pPr marL="0" indent="0" algn="ctr">
               <a:buNone/>
             </a:pPr>
             <a:r>
@@ -3124,7 +2923,7 @@
             <a:endParaRPr lang="en-US" sz="900" dirty="0"/>
           </a:p>
           <a:p>
-            <a:pPr algn="ctr" indent="0" marL="0">
+            <a:pPr marL="0" indent="0" algn="ctr">
               <a:buNone/>
             </a:pPr>
             <a:r>
@@ -3166,13 +2965,20 @@
             <a:prstDash val="solid"/>
           </a:ln>
           <a:effectLst>
-            <a:outerShdw sx="100000" sy="100000" kx="0" ky="0" algn="bl" rotWithShape="0" blurRad="101600" dist="38100" dir="8100000">
+            <a:outerShdw blurRad="101600" dist="38100" dir="8100000" algn="bl" rotWithShape="0">
               <a:srgbClr val="000000">
                 <a:alpha val="12000"/>
               </a:srgbClr>
             </a:outerShdw>
           </a:effectLst>
         </p:spPr>
+        <p:txBody>
+          <a:bodyPr/>
+          <a:lstStyle/>
+          <a:p>
+            <a:endParaRPr lang="es-CO"/>
+          </a:p>
+        </p:txBody>
       </p:sp>
       <p:sp>
         <p:nvSpPr>
@@ -3195,7 +3001,7 @@
           <a:bodyPr wrap="square" rtlCol="0" anchor="ctr"/>
           <a:lstStyle/>
           <a:p>
-            <a:pPr algn="ctr" indent="0" marL="0">
+            <a:pPr marL="0" indent="0" algn="ctr">
               <a:buNone/>
             </a:pPr>
             <a:r>
@@ -3234,7 +3040,7 @@
           <a:bodyPr wrap="square" rtlCol="0" anchor="ctr"/>
           <a:lstStyle/>
           <a:p>
-            <a:pPr algn="ctr" indent="0" marL="0">
+            <a:pPr marL="0" indent="0" algn="ctr">
               <a:buNone/>
             </a:pPr>
             <a:r>
@@ -3276,6 +3082,13 @@
             <a:prstDash val="solid"/>
           </a:ln>
         </p:spPr>
+        <p:txBody>
+          <a:bodyPr/>
+          <a:lstStyle/>
+          <a:p>
+            <a:endParaRPr lang="es-CO"/>
+          </a:p>
+        </p:txBody>
       </p:sp>
       <p:sp>
         <p:nvSpPr>
@@ -3298,7 +3111,7 @@
           <a:bodyPr wrap="square" lIns="0" tIns="0" rIns="0" bIns="0" rtlCol="0" anchor="ctr"/>
           <a:lstStyle/>
           <a:p>
-            <a:pPr algn="ctr" indent="0" marL="0">
+            <a:pPr marL="0" indent="0" algn="ctr">
               <a:buNone/>
             </a:pPr>
             <a:r>
@@ -3337,7 +3150,7 @@
           <a:bodyPr wrap="square" rtlCol="0" anchor="ctr"/>
           <a:lstStyle/>
           <a:p>
-            <a:pPr algn="ctr" indent="0" marL="0">
+            <a:pPr marL="0" indent="0" algn="ctr">
               <a:buNone/>
             </a:pPr>
             <a:r>
@@ -3354,7 +3167,7 @@
             <a:endParaRPr lang="en-US" sz="900" dirty="0"/>
           </a:p>
           <a:p>
-            <a:pPr algn="ctr" indent="0" marL="0">
+            <a:pPr marL="0" indent="0" algn="ctr">
               <a:buNone/>
             </a:pPr>
             <a:r>
@@ -3396,13 +3209,20 @@
             <a:prstDash val="solid"/>
           </a:ln>
           <a:effectLst>
-            <a:outerShdw sx="100000" sy="100000" kx="0" ky="0" algn="bl" rotWithShape="0" blurRad="101600" dist="38100" dir="8100000">
+            <a:outerShdw blurRad="101600" dist="38100" dir="8100000" algn="bl" rotWithShape="0">
               <a:srgbClr val="000000">
                 <a:alpha val="12000"/>
               </a:srgbClr>
             </a:outerShdw>
           </a:effectLst>
         </p:spPr>
+        <p:txBody>
+          <a:bodyPr/>
+          <a:lstStyle/>
+          <a:p>
+            <a:endParaRPr lang="es-CO"/>
+          </a:p>
+        </p:txBody>
       </p:sp>
       <p:sp>
         <p:nvSpPr>
@@ -3425,7 +3245,7 @@
           <a:bodyPr wrap="square" rtlCol="0" anchor="ctr"/>
           <a:lstStyle/>
           <a:p>
-            <a:pPr algn="ctr" indent="0" marL="0">
+            <a:pPr marL="0" indent="0" algn="ctr">
               <a:buNone/>
             </a:pPr>
             <a:r>
@@ -3464,7 +3284,7 @@
           <a:bodyPr wrap="square" rtlCol="0" anchor="ctr"/>
           <a:lstStyle/>
           <a:p>
-            <a:pPr algn="ctr" indent="0" marL="0">
+            <a:pPr marL="0" indent="0" algn="ctr">
               <a:buNone/>
             </a:pPr>
             <a:r>
@@ -3506,6 +3326,13 @@
             <a:prstDash val="solid"/>
           </a:ln>
         </p:spPr>
+        <p:txBody>
+          <a:bodyPr/>
+          <a:lstStyle/>
+          <a:p>
+            <a:endParaRPr lang="es-CO"/>
+          </a:p>
+        </p:txBody>
       </p:sp>
       <p:sp>
         <p:nvSpPr>
@@ -3528,7 +3355,7 @@
           <a:bodyPr wrap="square" lIns="0" tIns="0" rIns="0" bIns="0" rtlCol="0" anchor="ctr"/>
           <a:lstStyle/>
           <a:p>
-            <a:pPr algn="ctr" indent="0" marL="0">
+            <a:pPr marL="0" indent="0" algn="ctr">
               <a:buNone/>
             </a:pPr>
             <a:r>
@@ -3567,7 +3394,7 @@
           <a:bodyPr wrap="square" rtlCol="0" anchor="ctr"/>
           <a:lstStyle/>
           <a:p>
-            <a:pPr algn="ctr" indent="0" marL="0">
+            <a:pPr marL="0" indent="0" algn="ctr">
               <a:buNone/>
             </a:pPr>
             <a:r>
@@ -3584,7 +3411,7 @@
             <a:endParaRPr lang="en-US" sz="900" dirty="0"/>
           </a:p>
           <a:p>
-            <a:pPr algn="ctr" indent="0" marL="0">
+            <a:pPr marL="0" indent="0" algn="ctr">
               <a:buNone/>
             </a:pPr>
             <a:r>
@@ -3623,7 +3450,7 @@
           <a:bodyPr wrap="square" rtlCol="0" anchor="ctr"/>
           <a:lstStyle/>
           <a:p>
-            <a:pPr indent="0" marL="0">
+            <a:pPr marL="0" indent="0">
               <a:buNone/>
             </a:pPr>
             <a:r>
@@ -3662,7 +3489,7 @@
           <a:bodyPr wrap="square" rtlCol="0" anchor="ctr"/>
           <a:lstStyle/>
           <a:p>
-            <a:pPr indent="0" marL="0">
+            <a:pPr marL="0" indent="0">
               <a:buNone/>
             </a:pPr>
             <a:r>
@@ -3676,9 +3503,6 @@
               </a:rPr>
               <a:t>OLTP (PostgreSQL): </a:t>
             </a:r>
-            <a:pPr indent="0" marL="0">
-              <a:buNone/>
-            </a:pPr>
             <a:r>
               <a:rPr lang="en-US" sz="1000" dirty="0">
                 <a:solidFill>
@@ -3693,7 +3517,7 @@
             <a:endParaRPr lang="en-US" sz="1000" dirty="0"/>
           </a:p>
           <a:p>
-            <a:pPr indent="0" marL="0">
+            <a:pPr marL="0" indent="0">
               <a:buNone/>
             </a:pPr>
             <a:r>
@@ -3707,9 +3531,6 @@
               </a:rPr>
               <a:t>OLAP (MongoDB): </a:t>
             </a:r>
-            <a:pPr indent="0" marL="0">
-              <a:buNone/>
-            </a:pPr>
             <a:r>
               <a:rPr lang="en-US" sz="1000" dirty="0">
                 <a:solidFill>
@@ -3741,6 +3562,7 @@
         <a:solidFill>
           <a:srgbClr val="FFFFFF"/>
         </a:solidFill>
+        <a:effectLst/>
       </p:bgPr>
     </p:bg>
     <p:spTree>
@@ -3781,6 +3603,13 @@
             <a:prstDash val="solid"/>
           </a:ln>
         </p:spPr>
+        <p:txBody>
+          <a:bodyPr/>
+          <a:lstStyle/>
+          <a:p>
+            <a:endParaRPr lang="es-CO"/>
+          </a:p>
+        </p:txBody>
       </p:sp>
       <p:sp>
         <p:nvSpPr>
@@ -3803,7 +3632,7 @@
           <a:bodyPr wrap="square" rtlCol="0" anchor="ctr"/>
           <a:lstStyle/>
           <a:p>
-            <a:pPr indent="0" marL="0">
+            <a:pPr marL="0" indent="0">
               <a:buNone/>
             </a:pPr>
             <a:r>
@@ -3845,6 +3674,13 @@
             <a:prstDash val="solid"/>
           </a:ln>
         </p:spPr>
+        <p:txBody>
+          <a:bodyPr/>
+          <a:lstStyle/>
+          <a:p>
+            <a:endParaRPr lang="es-CO"/>
+          </a:p>
+        </p:txBody>
       </p:sp>
       <p:sp>
         <p:nvSpPr>
@@ -3867,7 +3703,7 @@
           <a:bodyPr wrap="square" rtlCol="0" anchor="ctr"/>
           <a:lstStyle/>
           <a:p>
-            <a:pPr algn="ctr" indent="0" marL="0">
+            <a:pPr marL="0" indent="0" algn="ctr">
               <a:buNone/>
             </a:pPr>
             <a:r>
@@ -3909,6 +3745,13 @@
             <a:prstDash val="solid"/>
           </a:ln>
         </p:spPr>
+        <p:txBody>
+          <a:bodyPr/>
+          <a:lstStyle/>
+          <a:p>
+            <a:endParaRPr lang="es-CO"/>
+          </a:p>
+        </p:txBody>
       </p:sp>
       <p:sp>
         <p:nvSpPr>
@@ -3931,7 +3774,7 @@
           <a:bodyPr wrap="square" rtlCol="0" anchor="ctr"/>
           <a:lstStyle/>
           <a:p>
-            <a:pPr indent="0" marL="0">
+            <a:pPr marL="0" indent="0">
               <a:buNone/>
             </a:pPr>
             <a:r>
@@ -3973,6 +3816,13 @@
             <a:prstDash val="solid"/>
           </a:ln>
         </p:spPr>
+        <p:txBody>
+          <a:bodyPr/>
+          <a:lstStyle/>
+          <a:p>
+            <a:endParaRPr lang="es-CO"/>
+          </a:p>
+        </p:txBody>
       </p:sp>
       <p:sp>
         <p:nvSpPr>
@@ -3995,7 +3845,7 @@
           <a:bodyPr wrap="square" rtlCol="0" anchor="ctr"/>
           <a:lstStyle/>
           <a:p>
-            <a:pPr indent="0" marL="0">
+            <a:pPr marL="0" indent="0">
               <a:buNone/>
             </a:pPr>
             <a:r>
@@ -4037,6 +3887,13 @@
             <a:prstDash val="solid"/>
           </a:ln>
         </p:spPr>
+        <p:txBody>
+          <a:bodyPr/>
+          <a:lstStyle/>
+          <a:p>
+            <a:endParaRPr lang="es-CO"/>
+          </a:p>
+        </p:txBody>
       </p:sp>
       <p:sp>
         <p:nvSpPr>
@@ -4059,7 +3916,7 @@
           <a:bodyPr wrap="square" rtlCol="0" anchor="ctr"/>
           <a:lstStyle/>
           <a:p>
-            <a:pPr algn="ctr" indent="0" marL="0">
+            <a:pPr marL="0" indent="0" algn="ctr">
               <a:buNone/>
             </a:pPr>
             <a:r>
@@ -4101,6 +3958,13 @@
             <a:prstDash val="solid"/>
           </a:ln>
         </p:spPr>
+        <p:txBody>
+          <a:bodyPr/>
+          <a:lstStyle/>
+          <a:p>
+            <a:endParaRPr lang="es-CO"/>
+          </a:p>
+        </p:txBody>
       </p:sp>
       <p:sp>
         <p:nvSpPr>
@@ -4123,7 +3987,7 @@
           <a:bodyPr wrap="square" rtlCol="0" anchor="ctr"/>
           <a:lstStyle/>
           <a:p>
-            <a:pPr indent="0" marL="0">
+            <a:pPr marL="0" indent="0">
               <a:buNone/>
             </a:pPr>
             <a:r>
@@ -4165,6 +4029,13 @@
             <a:prstDash val="solid"/>
           </a:ln>
         </p:spPr>
+        <p:txBody>
+          <a:bodyPr/>
+          <a:lstStyle/>
+          <a:p>
+            <a:endParaRPr lang="es-CO"/>
+          </a:p>
+        </p:txBody>
       </p:sp>
       <p:sp>
         <p:nvSpPr>
@@ -4187,7 +4058,7 @@
           <a:bodyPr wrap="square" rtlCol="0" anchor="ctr"/>
           <a:lstStyle/>
           <a:p>
-            <a:pPr indent="0" marL="0">
+            <a:pPr marL="0" indent="0">
               <a:buNone/>
             </a:pPr>
             <a:r>
@@ -4229,6 +4100,13 @@
             <a:prstDash val="solid"/>
           </a:ln>
         </p:spPr>
+        <p:txBody>
+          <a:bodyPr/>
+          <a:lstStyle/>
+          <a:p>
+            <a:endParaRPr lang="es-CO"/>
+          </a:p>
+        </p:txBody>
       </p:sp>
       <p:sp>
         <p:nvSpPr>
@@ -4251,7 +4129,7 @@
           <a:bodyPr wrap="square" rtlCol="0" anchor="ctr"/>
           <a:lstStyle/>
           <a:p>
-            <a:pPr algn="ctr" indent="0" marL="0">
+            <a:pPr marL="0" indent="0" algn="ctr">
               <a:buNone/>
             </a:pPr>
             <a:r>
@@ -4293,6 +4171,13 @@
             <a:prstDash val="solid"/>
           </a:ln>
         </p:spPr>
+        <p:txBody>
+          <a:bodyPr/>
+          <a:lstStyle/>
+          <a:p>
+            <a:endParaRPr lang="es-CO"/>
+          </a:p>
+        </p:txBody>
       </p:sp>
       <p:sp>
         <p:nvSpPr>
@@ -4315,7 +4200,7 @@
           <a:bodyPr wrap="square" rtlCol="0" anchor="ctr"/>
           <a:lstStyle/>
           <a:p>
-            <a:pPr indent="0" marL="0">
+            <a:pPr marL="0" indent="0">
               <a:buNone/>
             </a:pPr>
             <a:r>
@@ -4357,6 +4242,13 @@
             <a:prstDash val="solid"/>
           </a:ln>
         </p:spPr>
+        <p:txBody>
+          <a:bodyPr/>
+          <a:lstStyle/>
+          <a:p>
+            <a:endParaRPr lang="es-CO"/>
+          </a:p>
+        </p:txBody>
       </p:sp>
       <p:sp>
         <p:nvSpPr>
@@ -4379,7 +4271,7 @@
           <a:bodyPr wrap="square" rtlCol="0" anchor="ctr"/>
           <a:lstStyle/>
           <a:p>
-            <a:pPr indent="0" marL="0">
+            <a:pPr marL="0" indent="0">
               <a:buNone/>
             </a:pPr>
             <a:r>
@@ -4421,6 +4313,13 @@
             <a:prstDash val="solid"/>
           </a:ln>
         </p:spPr>
+        <p:txBody>
+          <a:bodyPr/>
+          <a:lstStyle/>
+          <a:p>
+            <a:endParaRPr lang="es-CO"/>
+          </a:p>
+        </p:txBody>
       </p:sp>
       <p:sp>
         <p:nvSpPr>
@@ -4443,7 +4342,7 @@
           <a:bodyPr wrap="square" rtlCol="0" anchor="ctr"/>
           <a:lstStyle/>
           <a:p>
-            <a:pPr algn="ctr" indent="0" marL="0">
+            <a:pPr marL="0" indent="0" algn="ctr">
               <a:buNone/>
             </a:pPr>
             <a:r>
@@ -4485,6 +4384,13 @@
             <a:prstDash val="solid"/>
           </a:ln>
         </p:spPr>
+        <p:txBody>
+          <a:bodyPr/>
+          <a:lstStyle/>
+          <a:p>
+            <a:endParaRPr lang="es-CO"/>
+          </a:p>
+        </p:txBody>
       </p:sp>
       <p:sp>
         <p:nvSpPr>
@@ -4507,7 +4413,7 @@
           <a:bodyPr wrap="square" rtlCol="0" anchor="ctr"/>
           <a:lstStyle/>
           <a:p>
-            <a:pPr indent="0" marL="0">
+            <a:pPr marL="0" indent="0">
               <a:buNone/>
             </a:pPr>
             <a:r>
@@ -4549,6 +4455,13 @@
             <a:prstDash val="solid"/>
           </a:ln>
         </p:spPr>
+        <p:txBody>
+          <a:bodyPr/>
+          <a:lstStyle/>
+          <a:p>
+            <a:endParaRPr lang="es-CO"/>
+          </a:p>
+        </p:txBody>
       </p:sp>
       <p:sp>
         <p:nvSpPr>
@@ -4571,7 +4484,7 @@
           <a:bodyPr wrap="square" rtlCol="0" anchor="ctr"/>
           <a:lstStyle/>
           <a:p>
-            <a:pPr indent="0" marL="0">
+            <a:pPr marL="0" indent="0">
               <a:buNone/>
             </a:pPr>
             <a:r>
@@ -4613,6 +4526,13 @@
             <a:prstDash val="solid"/>
           </a:ln>
         </p:spPr>
+        <p:txBody>
+          <a:bodyPr/>
+          <a:lstStyle/>
+          <a:p>
+            <a:endParaRPr lang="es-CO"/>
+          </a:p>
+        </p:txBody>
       </p:sp>
       <p:sp>
         <p:nvSpPr>
@@ -4635,7 +4555,7 @@
           <a:bodyPr wrap="square" rtlCol="0" anchor="ctr"/>
           <a:lstStyle/>
           <a:p>
-            <a:pPr algn="ctr" indent="0" marL="0">
+            <a:pPr marL="0" indent="0" algn="ctr">
               <a:buNone/>
             </a:pPr>
             <a:r>
@@ -4677,6 +4597,13 @@
             <a:prstDash val="solid"/>
           </a:ln>
         </p:spPr>
+        <p:txBody>
+          <a:bodyPr/>
+          <a:lstStyle/>
+          <a:p>
+            <a:endParaRPr lang="es-CO"/>
+          </a:p>
+        </p:txBody>
       </p:sp>
       <p:sp>
         <p:nvSpPr>
@@ -4699,7 +4626,7 @@
           <a:bodyPr wrap="square" rtlCol="0" anchor="ctr"/>
           <a:lstStyle/>
           <a:p>
-            <a:pPr indent="0" marL="0">
+            <a:pPr marL="0" indent="0">
               <a:buNone/>
             </a:pPr>
             <a:r>
@@ -4741,6 +4668,13 @@
             <a:prstDash val="solid"/>
           </a:ln>
         </p:spPr>
+        <p:txBody>
+          <a:bodyPr/>
+          <a:lstStyle/>
+          <a:p>
+            <a:endParaRPr lang="es-CO"/>
+          </a:p>
+        </p:txBody>
       </p:sp>
       <p:sp>
         <p:nvSpPr>
@@ -4763,7 +4697,7 @@
           <a:bodyPr wrap="square" rtlCol="0" anchor="ctr"/>
           <a:lstStyle/>
           <a:p>
-            <a:pPr indent="0" marL="0">
+            <a:pPr marL="0" indent="0">
               <a:buNone/>
             </a:pPr>
             <a:r>
@@ -4797,6 +4731,7 @@
         <a:solidFill>
           <a:srgbClr val="0D3B6E"/>
         </a:solidFill>
+        <a:effectLst/>
       </p:bgPr>
     </p:bg>
     <p:spTree>
@@ -4815,31 +4750,6 @@
       </p:grpSpPr>
       <p:sp>
         <p:nvSpPr>
-          <p:cNvPr id="2" name="Shape 0"/>
-          <p:cNvSpPr/>
-          <p:nvPr/>
-        </p:nvSpPr>
-        <p:spPr>
-          <a:xfrm>
-            <a:off x="0" y="4389120"/>
-            <a:ext cx="9144000" cy="109728"/>
-          </a:xfrm>
-          <a:prstGeom prst="rect">
-            <a:avLst/>
-          </a:prstGeom>
-          <a:solidFill>
-            <a:srgbClr val="F0A500"/>
-          </a:solidFill>
-          <a:ln w="12700">
-            <a:solidFill>
-              <a:srgbClr val="F0A500"/>
-            </a:solidFill>
-            <a:prstDash val="solid"/>
-          </a:ln>
-        </p:spPr>
-      </p:sp>
-      <p:sp>
-        <p:nvSpPr>
           <p:cNvPr id="3" name="Text 1"/>
           <p:cNvSpPr/>
           <p:nvPr/>
@@ -4859,7 +4769,7 @@
           <a:bodyPr wrap="square" rtlCol="0" anchor="ctr"/>
           <a:lstStyle/>
           <a:p>
-            <a:pPr indent="0" marL="0">
+            <a:pPr marL="0" indent="0">
               <a:buNone/>
             </a:pPr>
             <a:r>
@@ -4898,7 +4808,7 @@
           <a:bodyPr wrap="square" rtlCol="0" anchor="ctr"/>
           <a:lstStyle/>
           <a:p>
-            <a:pPr algn="ctr" indent="0" marL="0">
+            <a:pPr marL="0" indent="0" algn="ctr">
               <a:buNone/>
             </a:pPr>
             <a:r>
@@ -4937,7 +4847,7 @@
           <a:bodyPr wrap="square" rtlCol="0" anchor="ctr"/>
           <a:lstStyle/>
           <a:p>
-            <a:pPr indent="0" marL="0">
+            <a:pPr marL="0" indent="0">
               <a:buNone/>
             </a:pPr>
             <a:r>
@@ -4976,7 +4886,7 @@
           <a:bodyPr wrap="square" rtlCol="0" anchor="ctr"/>
           <a:lstStyle/>
           <a:p>
-            <a:pPr indent="0" marL="0">
+            <a:pPr marL="0" indent="0">
               <a:buNone/>
             </a:pPr>
             <a:r>
@@ -5015,7 +4925,7 @@
           <a:bodyPr wrap="square" rtlCol="0" anchor="ctr"/>
           <a:lstStyle/>
           <a:p>
-            <a:pPr algn="ctr" indent="0" marL="0">
+            <a:pPr marL="0" indent="0" algn="ctr">
               <a:buNone/>
             </a:pPr>
             <a:r>
@@ -5054,7 +4964,7 @@
           <a:bodyPr wrap="square" rtlCol="0" anchor="ctr"/>
           <a:lstStyle/>
           <a:p>
-            <a:pPr indent="0" marL="0">
+            <a:pPr marL="0" indent="0">
               <a:buNone/>
             </a:pPr>
             <a:r>
@@ -5093,7 +5003,7 @@
           <a:bodyPr wrap="square" rtlCol="0" anchor="ctr"/>
           <a:lstStyle/>
           <a:p>
-            <a:pPr indent="0" marL="0">
+            <a:pPr marL="0" indent="0">
               <a:buNone/>
             </a:pPr>
             <a:r>
@@ -5132,7 +5042,7 @@
           <a:bodyPr wrap="square" rtlCol="0" anchor="ctr"/>
           <a:lstStyle/>
           <a:p>
-            <a:pPr algn="ctr" indent="0" marL="0">
+            <a:pPr marL="0" indent="0" algn="ctr">
               <a:buNone/>
             </a:pPr>
             <a:r>
@@ -5171,7 +5081,7 @@
           <a:bodyPr wrap="square" rtlCol="0" anchor="ctr"/>
           <a:lstStyle/>
           <a:p>
-            <a:pPr indent="0" marL="0">
+            <a:pPr marL="0" indent="0">
               <a:buNone/>
             </a:pPr>
             <a:r>
@@ -5210,7 +5120,7 @@
           <a:bodyPr wrap="square" rtlCol="0" anchor="ctr"/>
           <a:lstStyle/>
           <a:p>
-            <a:pPr indent="0" marL="0">
+            <a:pPr marL="0" indent="0">
               <a:buNone/>
             </a:pPr>
             <a:r>
@@ -5249,7 +5159,7 @@
           <a:bodyPr wrap="square" rtlCol="0" anchor="ctr"/>
           <a:lstStyle/>
           <a:p>
-            <a:pPr algn="ctr" indent="0" marL="0">
+            <a:pPr marL="0" indent="0" algn="ctr">
               <a:buNone/>
             </a:pPr>
             <a:r>
@@ -5288,7 +5198,7 @@
           <a:bodyPr wrap="square" rtlCol="0" anchor="ctr"/>
           <a:lstStyle/>
           <a:p>
-            <a:pPr indent="0" marL="0">
+            <a:pPr marL="0" indent="0">
               <a:buNone/>
             </a:pPr>
             <a:r>
@@ -5327,7 +5237,7 @@
           <a:bodyPr wrap="square" rtlCol="0" anchor="ctr"/>
           <a:lstStyle/>
           <a:p>
-            <a:pPr indent="0" marL="0">
+            <a:pPr marL="0" indent="0">
               <a:buNone/>
             </a:pPr>
             <a:r>
@@ -5366,7 +5276,7 @@
           <a:bodyPr wrap="square" rtlCol="0" anchor="ctr"/>
           <a:lstStyle/>
           <a:p>
-            <a:pPr algn="ctr" indent="0" marL="0">
+            <a:pPr marL="0" indent="0" algn="ctr">
               <a:buNone/>
             </a:pPr>
             <a:r>
@@ -5405,7 +5315,7 @@
           <a:bodyPr wrap="square" rtlCol="0" anchor="ctr"/>
           <a:lstStyle/>
           <a:p>
-            <a:pPr indent="0" marL="0">
+            <a:pPr marL="0" indent="0">
               <a:buNone/>
             </a:pPr>
             <a:r>
@@ -5444,7 +5354,7 @@
           <a:bodyPr wrap="square" rtlCol="0" anchor="ctr"/>
           <a:lstStyle/>
           <a:p>
-            <a:pPr indent="0" marL="0">
+            <a:pPr marL="0" indent="0">
               <a:buNone/>
             </a:pPr>
             <a:r>
@@ -5483,7 +5393,7 @@
           <a:bodyPr wrap="square" rtlCol="0" anchor="ctr"/>
           <a:lstStyle/>
           <a:p>
-            <a:pPr algn="ctr" indent="0" marL="0">
+            <a:pPr marL="0" indent="0" algn="ctr">
               <a:buNone/>
             </a:pPr>
             <a:r>
@@ -5522,7 +5432,7 @@
           <a:bodyPr wrap="square" rtlCol="0" anchor="ctr"/>
           <a:lstStyle/>
           <a:p>
-            <a:pPr indent="0" marL="0">
+            <a:pPr marL="0" indent="0">
               <a:buNone/>
             </a:pPr>
             <a:r>
@@ -5561,7 +5471,7 @@
           <a:bodyPr wrap="square" rtlCol="0" anchor="ctr"/>
           <a:lstStyle/>
           <a:p>
-            <a:pPr indent="0" marL="0">
+            <a:pPr marL="0" indent="0">
               <a:buNone/>
             </a:pPr>
             <a:r>
@@ -5601,6 +5511,13 @@
             <a:prstDash val="solid"/>
           </a:ln>
         </p:spPr>
+        <p:txBody>
+          <a:bodyPr/>
+          <a:lstStyle/>
+          <a:p>
+            <a:endParaRPr lang="es-CO"/>
+          </a:p>
+        </p:txBody>
       </p:sp>
       <p:sp>
         <p:nvSpPr>
@@ -5623,7 +5540,7 @@
           <a:bodyPr wrap="square" rtlCol="0" anchor="ctr"/>
           <a:lstStyle/>
           <a:p>
-            <a:pPr algn="ctr" indent="0" marL="0">
+            <a:pPr marL="0" indent="0" algn="ctr">
               <a:buNone/>
             </a:pPr>
             <a:r>
@@ -5635,7 +5552,73 @@
                 <a:ea typeface="Arial" pitchFamily="34" charset="-122"/>
                 <a:cs typeface="Arial" pitchFamily="34" charset="-120"/>
               </a:rPr>
-              <a:t>Universidad de La Sabana  ·  Fundamentos de Diseño y Modelado de Datos  ·  César Augusto Vega Fernández  ·  Mayo 2026</a:t>
+              <a:t>Universidad de La Sabana  ·  </a:t>
+            </a:r>
+            <a:r>
+              <a:rPr lang="en-US" sz="1000" dirty="0" err="1">
+                <a:solidFill>
+                  <a:srgbClr val="7FB3D3"/>
+                </a:solidFill>
+                <a:latin typeface="Arial" pitchFamily="34" charset="0"/>
+                <a:ea typeface="Arial" pitchFamily="34" charset="-122"/>
+                <a:cs typeface="Arial" pitchFamily="34" charset="-120"/>
+              </a:rPr>
+              <a:t>Fundamentos</a:t>
+            </a:r>
+            <a:r>
+              <a:rPr lang="en-US" sz="1000" dirty="0">
+                <a:solidFill>
+                  <a:srgbClr val="7FB3D3"/>
+                </a:solidFill>
+                <a:latin typeface="Arial" pitchFamily="34" charset="0"/>
+                <a:ea typeface="Arial" pitchFamily="34" charset="-122"/>
+                <a:cs typeface="Arial" pitchFamily="34" charset="-120"/>
+              </a:rPr>
+              <a:t> de </a:t>
+            </a:r>
+            <a:r>
+              <a:rPr lang="en-US" sz="1000" dirty="0" err="1">
+                <a:solidFill>
+                  <a:srgbClr val="7FB3D3"/>
+                </a:solidFill>
+                <a:latin typeface="Arial" pitchFamily="34" charset="0"/>
+                <a:ea typeface="Arial" pitchFamily="34" charset="-122"/>
+                <a:cs typeface="Arial" pitchFamily="34" charset="-120"/>
+              </a:rPr>
+              <a:t>Diseño</a:t>
+            </a:r>
+            <a:r>
+              <a:rPr lang="en-US" sz="1000" dirty="0">
+                <a:solidFill>
+                  <a:srgbClr val="7FB3D3"/>
+                </a:solidFill>
+                <a:latin typeface="Arial" pitchFamily="34" charset="0"/>
+                <a:ea typeface="Arial" pitchFamily="34" charset="-122"/>
+                <a:cs typeface="Arial" pitchFamily="34" charset="-120"/>
+              </a:rPr>
+              <a:t> y </a:t>
+            </a:r>
+            <a:r>
+              <a:rPr lang="en-US" sz="1000" dirty="0" err="1">
+                <a:solidFill>
+                  <a:srgbClr val="7FB3D3"/>
+                </a:solidFill>
+                <a:latin typeface="Arial" pitchFamily="34" charset="0"/>
+                <a:ea typeface="Arial" pitchFamily="34" charset="-122"/>
+                <a:cs typeface="Arial" pitchFamily="34" charset="-120"/>
+              </a:rPr>
+              <a:t>Modelado</a:t>
+            </a:r>
+            <a:r>
+              <a:rPr lang="en-US" sz="1000" dirty="0">
+                <a:solidFill>
+                  <a:srgbClr val="7FB3D3"/>
+                </a:solidFill>
+                <a:latin typeface="Arial" pitchFamily="34" charset="0"/>
+                <a:ea typeface="Arial" pitchFamily="34" charset="-122"/>
+                <a:cs typeface="Arial" pitchFamily="34" charset="-120"/>
+              </a:rPr>
+              <a:t> de Datos  · Miguel Alfonso Varela ·  Mayo 2026</a:t>
             </a:r>
             <a:endParaRPr lang="en-US" sz="1000" dirty="0"/>
           </a:p>
@@ -5657,6 +5640,7 @@
         <a:solidFill>
           <a:srgbClr val="F2F4F7"/>
         </a:solidFill>
+        <a:effectLst/>
       </p:bgPr>
     </p:bg>
     <p:spTree>
@@ -5697,6 +5681,13 @@
             <a:prstDash val="solid"/>
           </a:ln>
         </p:spPr>
+        <p:txBody>
+          <a:bodyPr/>
+          <a:lstStyle/>
+          <a:p>
+            <a:endParaRPr lang="es-CO"/>
+          </a:p>
+        </p:txBody>
       </p:sp>
       <p:sp>
         <p:nvSpPr>
@@ -5719,7 +5710,7 @@
           <a:bodyPr wrap="square" rtlCol="0" anchor="ctr"/>
           <a:lstStyle/>
           <a:p>
-            <a:pPr indent="0" marL="0">
+            <a:pPr marL="0" indent="0">
               <a:buNone/>
             </a:pPr>
             <a:r>
@@ -5761,13 +5752,20 @@
             <a:prstDash val="solid"/>
           </a:ln>
           <a:effectLst>
-            <a:outerShdw sx="100000" sy="100000" kx="0" ky="0" algn="bl" rotWithShape="0" blurRad="101600" dist="38100" dir="8100000">
+            <a:outerShdw blurRad="101600" dist="38100" dir="8100000" algn="bl" rotWithShape="0">
               <a:srgbClr val="000000">
                 <a:alpha val="12000"/>
               </a:srgbClr>
             </a:outerShdw>
           </a:effectLst>
         </p:spPr>
+        <p:txBody>
+          <a:bodyPr/>
+          <a:lstStyle/>
+          <a:p>
+            <a:endParaRPr lang="es-CO"/>
+          </a:p>
+        </p:txBody>
       </p:sp>
       <p:sp>
         <p:nvSpPr>
@@ -5790,7 +5788,7 @@
           <a:bodyPr wrap="square" rtlCol="0" anchor="ctr"/>
           <a:lstStyle/>
           <a:p>
-            <a:pPr algn="ctr" indent="0" marL="0">
+            <a:pPr marL="0" indent="0" algn="ctr">
               <a:buNone/>
             </a:pPr>
             <a:r>
@@ -5829,7 +5827,7 @@
           <a:bodyPr wrap="square" rtlCol="0" anchor="ctr"/>
           <a:lstStyle/>
           <a:p>
-            <a:pPr algn="ctr" indent="0" marL="0">
+            <a:pPr marL="0" indent="0" algn="ctr">
               <a:buNone/>
             </a:pPr>
             <a:r>
@@ -5846,7 +5844,7 @@
             <a:endParaRPr lang="en-US" sz="1200" dirty="0"/>
           </a:p>
           <a:p>
-            <a:pPr algn="ctr" indent="0" marL="0">
+            <a:pPr marL="0" indent="0" algn="ctr">
               <a:buNone/>
             </a:pPr>
             <a:r>
@@ -5888,13 +5886,20 @@
             <a:prstDash val="solid"/>
           </a:ln>
           <a:effectLst>
-            <a:outerShdw sx="100000" sy="100000" kx="0" ky="0" algn="bl" rotWithShape="0" blurRad="101600" dist="38100" dir="8100000">
+            <a:outerShdw blurRad="101600" dist="38100" dir="8100000" algn="bl" rotWithShape="0">
               <a:srgbClr val="000000">
                 <a:alpha val="12000"/>
               </a:srgbClr>
             </a:outerShdw>
           </a:effectLst>
         </p:spPr>
+        <p:txBody>
+          <a:bodyPr/>
+          <a:lstStyle/>
+          <a:p>
+            <a:endParaRPr lang="es-CO"/>
+          </a:p>
+        </p:txBody>
       </p:sp>
       <p:sp>
         <p:nvSpPr>
@@ -5917,7 +5922,7 @@
           <a:bodyPr wrap="square" rtlCol="0" anchor="ctr"/>
           <a:lstStyle/>
           <a:p>
-            <a:pPr algn="ctr" indent="0" marL="0">
+            <a:pPr marL="0" indent="0" algn="ctr">
               <a:buNone/>
             </a:pPr>
             <a:r>
@@ -5956,7 +5961,7 @@
           <a:bodyPr wrap="square" rtlCol="0" anchor="ctr"/>
           <a:lstStyle/>
           <a:p>
-            <a:pPr algn="ctr" indent="0" marL="0">
+            <a:pPr marL="0" indent="0" algn="ctr">
               <a:buNone/>
             </a:pPr>
             <a:r>
@@ -5973,7 +5978,7 @@
             <a:endParaRPr lang="en-US" sz="1200" dirty="0"/>
           </a:p>
           <a:p>
-            <a:pPr algn="ctr" indent="0" marL="0">
+            <a:pPr marL="0" indent="0" algn="ctr">
               <a:buNone/>
             </a:pPr>
             <a:r>
@@ -6015,13 +6020,20 @@
             <a:prstDash val="solid"/>
           </a:ln>
           <a:effectLst>
-            <a:outerShdw sx="100000" sy="100000" kx="0" ky="0" algn="bl" rotWithShape="0" blurRad="101600" dist="38100" dir="8100000">
+            <a:outerShdw blurRad="101600" dist="38100" dir="8100000" algn="bl" rotWithShape="0">
               <a:srgbClr val="000000">
                 <a:alpha val="12000"/>
               </a:srgbClr>
             </a:outerShdw>
           </a:effectLst>
         </p:spPr>
+        <p:txBody>
+          <a:bodyPr/>
+          <a:lstStyle/>
+          <a:p>
+            <a:endParaRPr lang="es-CO"/>
+          </a:p>
+        </p:txBody>
       </p:sp>
       <p:sp>
         <p:nvSpPr>
@@ -6044,7 +6056,7 @@
           <a:bodyPr wrap="square" rtlCol="0" anchor="ctr"/>
           <a:lstStyle/>
           <a:p>
-            <a:pPr algn="ctr" indent="0" marL="0">
+            <a:pPr marL="0" indent="0" algn="ctr">
               <a:buNone/>
             </a:pPr>
             <a:r>
@@ -6083,7 +6095,7 @@
           <a:bodyPr wrap="square" rtlCol="0" anchor="ctr"/>
           <a:lstStyle/>
           <a:p>
-            <a:pPr algn="ctr" indent="0" marL="0">
+            <a:pPr marL="0" indent="0" algn="ctr">
               <a:buNone/>
             </a:pPr>
             <a:r>
@@ -6100,7 +6112,7 @@
             <a:endParaRPr lang="en-US" sz="1200" dirty="0"/>
           </a:p>
           <a:p>
-            <a:pPr algn="ctr" indent="0" marL="0">
+            <a:pPr marL="0" indent="0" algn="ctr">
               <a:buNone/>
             </a:pPr>
             <a:r>
@@ -6142,13 +6154,20 @@
             <a:prstDash val="solid"/>
           </a:ln>
           <a:effectLst>
-            <a:outerShdw sx="100000" sy="100000" kx="0" ky="0" algn="bl" rotWithShape="0" blurRad="101600" dist="38100" dir="8100000">
+            <a:outerShdw blurRad="101600" dist="38100" dir="8100000" algn="bl" rotWithShape="0">
               <a:srgbClr val="000000">
                 <a:alpha val="12000"/>
               </a:srgbClr>
             </a:outerShdw>
           </a:effectLst>
         </p:spPr>
+        <p:txBody>
+          <a:bodyPr/>
+          <a:lstStyle/>
+          <a:p>
+            <a:endParaRPr lang="es-CO"/>
+          </a:p>
+        </p:txBody>
       </p:sp>
       <p:sp>
         <p:nvSpPr>
@@ -6171,7 +6190,7 @@
           <a:bodyPr wrap="square" rtlCol="0" anchor="ctr"/>
           <a:lstStyle/>
           <a:p>
-            <a:pPr algn="ctr" indent="0" marL="0">
+            <a:pPr marL="0" indent="0" algn="ctr">
               <a:buNone/>
             </a:pPr>
             <a:r>
@@ -6210,7 +6229,7 @@
           <a:bodyPr wrap="square" rtlCol="0" anchor="ctr"/>
           <a:lstStyle/>
           <a:p>
-            <a:pPr algn="ctr" indent="0" marL="0">
+            <a:pPr marL="0" indent="0" algn="ctr">
               <a:buNone/>
             </a:pPr>
             <a:r>
@@ -6227,7 +6246,7 @@
             <a:endParaRPr lang="en-US" sz="1200" dirty="0"/>
           </a:p>
           <a:p>
-            <a:pPr algn="ctr" indent="0" marL="0">
+            <a:pPr marL="0" indent="0" algn="ctr">
               <a:buNone/>
             </a:pPr>
             <a:r>
@@ -6269,13 +6288,20 @@
             <a:prstDash val="solid"/>
           </a:ln>
           <a:effectLst>
-            <a:outerShdw sx="100000" sy="100000" kx="0" ky="0" algn="bl" rotWithShape="0" blurRad="101600" dist="38100" dir="8100000">
+            <a:outerShdw blurRad="101600" dist="38100" dir="8100000" algn="bl" rotWithShape="0">
               <a:srgbClr val="000000">
                 <a:alpha val="12000"/>
               </a:srgbClr>
             </a:outerShdw>
           </a:effectLst>
         </p:spPr>
+        <p:txBody>
+          <a:bodyPr/>
+          <a:lstStyle/>
+          <a:p>
+            <a:endParaRPr lang="es-CO"/>
+          </a:p>
+        </p:txBody>
       </p:sp>
       <p:sp>
         <p:nvSpPr>
@@ -6298,7 +6324,7 @@
           <a:bodyPr wrap="square" rtlCol="0" anchor="ctr"/>
           <a:lstStyle/>
           <a:p>
-            <a:pPr indent="0" marL="0">
+            <a:pPr marL="0" indent="0">
               <a:buNone/>
             </a:pPr>
             <a:r>
@@ -6337,7 +6363,7 @@
           <a:bodyPr wrap="square" rtlCol="0" anchor="ctr"/>
           <a:lstStyle/>
           <a:p>
-            <a:pPr indent="0" marL="0">
+            <a:pPr marL="0" indent="0">
               <a:buNone/>
             </a:pPr>
             <a:r>
@@ -6354,7 +6380,7 @@
             <a:endParaRPr lang="en-US" sz="1200" dirty="0"/>
           </a:p>
           <a:p>
-            <a:pPr indent="0" marL="0">
+            <a:pPr marL="0" indent="0">
               <a:buNone/>
             </a:pPr>
             <a:r>
@@ -6371,7 +6397,7 @@
             <a:endParaRPr lang="en-US" sz="1200" dirty="0"/>
           </a:p>
           <a:p>
-            <a:pPr indent="0" marL="0">
+            <a:pPr marL="0" indent="0">
               <a:buNone/>
             </a:pPr>
             <a:r>
@@ -6388,7 +6414,7 @@
             <a:endParaRPr lang="en-US" sz="1200" dirty="0"/>
           </a:p>
           <a:p>
-            <a:pPr indent="0" marL="0">
+            <a:pPr marL="0" indent="0">
               <a:buNone/>
             </a:pPr>
             <a:r>
@@ -6430,13 +6456,20 @@
             <a:prstDash val="solid"/>
           </a:ln>
           <a:effectLst>
-            <a:outerShdw sx="100000" sy="100000" kx="0" ky="0" algn="bl" rotWithShape="0" blurRad="101600" dist="38100" dir="8100000">
+            <a:outerShdw blurRad="101600" dist="38100" dir="8100000" algn="bl" rotWithShape="0">
               <a:srgbClr val="000000">
                 <a:alpha val="12000"/>
               </a:srgbClr>
             </a:outerShdw>
           </a:effectLst>
         </p:spPr>
+        <p:txBody>
+          <a:bodyPr/>
+          <a:lstStyle/>
+          <a:p>
+            <a:endParaRPr lang="es-CO"/>
+          </a:p>
+        </p:txBody>
       </p:sp>
       <p:sp>
         <p:nvSpPr>
@@ -6459,7 +6492,7 @@
           <a:bodyPr wrap="square" rtlCol="0" anchor="ctr"/>
           <a:lstStyle/>
           <a:p>
-            <a:pPr indent="0" marL="0">
+            <a:pPr marL="0" indent="0">
               <a:buNone/>
             </a:pPr>
             <a:r>
@@ -6498,7 +6531,7 @@
           <a:bodyPr wrap="square" rtlCol="0" anchor="ctr"/>
           <a:lstStyle/>
           <a:p>
-            <a:pPr indent="0" marL="0">
+            <a:pPr marL="0" indent="0">
               <a:buNone/>
             </a:pPr>
             <a:r>
@@ -6515,7 +6548,7 @@
             <a:endParaRPr lang="en-US" sz="1100" dirty="0"/>
           </a:p>
           <a:p>
-            <a:pPr indent="0" marL="0">
+            <a:pPr marL="0" indent="0">
               <a:buNone/>
             </a:pPr>
             <a:r>
@@ -6532,7 +6565,7 @@
             <a:endParaRPr lang="en-US" sz="1100" dirty="0"/>
           </a:p>
           <a:p>
-            <a:pPr indent="0" marL="0">
+            <a:pPr marL="0" indent="0">
               <a:buNone/>
             </a:pPr>
             <a:r>
@@ -6549,7 +6582,7 @@
             <a:endParaRPr lang="en-US" sz="1100" dirty="0"/>
           </a:p>
           <a:p>
-            <a:pPr indent="0" marL="0">
+            <a:pPr marL="0" indent="0">
               <a:buNone/>
             </a:pPr>
             <a:r>
@@ -6566,7 +6599,7 @@
             <a:endParaRPr lang="en-US" sz="1100" dirty="0"/>
           </a:p>
           <a:p>
-            <a:pPr indent="0" marL="0">
+            <a:pPr marL="0" indent="0">
               <a:buNone/>
             </a:pPr>
             <a:r>
@@ -6583,7 +6616,7 @@
             <a:endParaRPr lang="en-US" sz="1100" dirty="0"/>
           </a:p>
           <a:p>
-            <a:pPr indent="0" marL="0">
+            <a:pPr marL="0" indent="0">
               <a:buNone/>
             </a:pPr>
             <a:r>
@@ -6617,6 +6650,7 @@
         <a:solidFill>
           <a:srgbClr val="FFFFFF"/>
         </a:solidFill>
+        <a:effectLst/>
       </p:bgPr>
     </p:bg>
     <p:spTree>
@@ -6657,6 +6691,13 @@
             <a:prstDash val="solid"/>
           </a:ln>
         </p:spPr>
+        <p:txBody>
+          <a:bodyPr/>
+          <a:lstStyle/>
+          <a:p>
+            <a:endParaRPr lang="es-CO"/>
+          </a:p>
+        </p:txBody>
       </p:sp>
       <p:sp>
         <p:nvSpPr>
@@ -6679,7 +6720,7 @@
           <a:bodyPr wrap="square" rtlCol="0" anchor="ctr"/>
           <a:lstStyle/>
           <a:p>
-            <a:pPr indent="0" marL="0">
+            <a:pPr marL="0" indent="0">
               <a:buNone/>
             </a:pPr>
             <a:r>
@@ -6721,13 +6762,20 @@
             <a:prstDash val="solid"/>
           </a:ln>
           <a:effectLst>
-            <a:outerShdw sx="100000" sy="100000" kx="0" ky="0" algn="bl" rotWithShape="0" blurRad="101600" dist="38100" dir="8100000">
+            <a:outerShdw blurRad="101600" dist="38100" dir="8100000" algn="bl" rotWithShape="0">
               <a:srgbClr val="000000">
                 <a:alpha val="12000"/>
               </a:srgbClr>
             </a:outerShdw>
           </a:effectLst>
         </p:spPr>
+        <p:txBody>
+          <a:bodyPr/>
+          <a:lstStyle/>
+          <a:p>
+            <a:endParaRPr lang="es-CO"/>
+          </a:p>
+        </p:txBody>
       </p:sp>
       <p:sp>
         <p:nvSpPr>
@@ -6753,6 +6801,13 @@
             <a:prstDash val="solid"/>
           </a:ln>
         </p:spPr>
+        <p:txBody>
+          <a:bodyPr/>
+          <a:lstStyle/>
+          <a:p>
+            <a:endParaRPr lang="es-CO"/>
+          </a:p>
+        </p:txBody>
       </p:sp>
       <p:sp>
         <p:nvSpPr>
@@ -6775,7 +6830,7 @@
           <a:bodyPr wrap="square" lIns="0" tIns="0" rIns="0" bIns="0" rtlCol="0" anchor="ctr"/>
           <a:lstStyle/>
           <a:p>
-            <a:pPr algn="ctr" indent="0" marL="0">
+            <a:pPr marL="0" indent="0" algn="ctr">
               <a:buNone/>
             </a:pPr>
             <a:r>
@@ -6814,7 +6869,7 @@
           <a:bodyPr wrap="square" rtlCol="0" anchor="ctr"/>
           <a:lstStyle/>
           <a:p>
-            <a:pPr algn="ctr" indent="0" marL="0">
+            <a:pPr marL="0" indent="0" algn="ctr">
               <a:buNone/>
             </a:pPr>
             <a:r>
@@ -6831,7 +6886,7 @@
             <a:endParaRPr lang="en-US" sz="1100" dirty="0"/>
           </a:p>
           <a:p>
-            <a:pPr algn="ctr" indent="0" marL="0">
+            <a:pPr marL="0" indent="0" algn="ctr">
               <a:buNone/>
             </a:pPr>
             <a:r>
@@ -6873,6 +6928,13 @@
             <a:prstDash val="solid"/>
           </a:ln>
         </p:spPr>
+        <p:txBody>
+          <a:bodyPr/>
+          <a:lstStyle/>
+          <a:p>
+            <a:endParaRPr lang="es-CO"/>
+          </a:p>
+        </p:txBody>
       </p:sp>
       <p:sp>
         <p:nvSpPr>
@@ -6895,7 +6957,7 @@
           <a:bodyPr wrap="square" rtlCol="0" anchor="ctr"/>
           <a:lstStyle/>
           <a:p>
-            <a:pPr indent="0" marL="0">
+            <a:pPr marL="0" indent="0">
               <a:buNone/>
             </a:pPr>
             <a:r>
@@ -6937,6 +6999,13 @@
             <a:prstDash val="solid"/>
           </a:ln>
         </p:spPr>
+        <p:txBody>
+          <a:bodyPr/>
+          <a:lstStyle/>
+          <a:p>
+            <a:endParaRPr lang="es-CO"/>
+          </a:p>
+        </p:txBody>
       </p:sp>
       <p:sp>
         <p:nvSpPr>
@@ -6959,7 +7028,7 @@
           <a:bodyPr wrap="square" rtlCol="0" anchor="ctr"/>
           <a:lstStyle/>
           <a:p>
-            <a:pPr indent="0" marL="0">
+            <a:pPr marL="0" indent="0">
               <a:buNone/>
             </a:pPr>
             <a:r>
@@ -7001,6 +7070,13 @@
             <a:prstDash val="solid"/>
           </a:ln>
         </p:spPr>
+        <p:txBody>
+          <a:bodyPr/>
+          <a:lstStyle/>
+          <a:p>
+            <a:endParaRPr lang="es-CO"/>
+          </a:p>
+        </p:txBody>
       </p:sp>
       <p:sp>
         <p:nvSpPr>
@@ -7023,7 +7099,7 @@
           <a:bodyPr wrap="square" rtlCol="0" anchor="ctr"/>
           <a:lstStyle/>
           <a:p>
-            <a:pPr indent="0" marL="0">
+            <a:pPr marL="0" indent="0">
               <a:buNone/>
             </a:pPr>
             <a:r>
@@ -7065,6 +7141,13 @@
             <a:prstDash val="solid"/>
           </a:ln>
         </p:spPr>
+        <p:txBody>
+          <a:bodyPr/>
+          <a:lstStyle/>
+          <a:p>
+            <a:endParaRPr lang="es-CO"/>
+          </a:p>
+        </p:txBody>
       </p:sp>
       <p:sp>
         <p:nvSpPr>
@@ -7087,7 +7170,7 @@
           <a:bodyPr wrap="square" rtlCol="0" anchor="ctr"/>
           <a:lstStyle/>
           <a:p>
-            <a:pPr indent="0" marL="0">
+            <a:pPr marL="0" indent="0">
               <a:buNone/>
             </a:pPr>
             <a:r>
@@ -7129,6 +7212,13 @@
             <a:prstDash val="solid"/>
           </a:ln>
         </p:spPr>
+        <p:txBody>
+          <a:bodyPr/>
+          <a:lstStyle/>
+          <a:p>
+            <a:endParaRPr lang="es-CO"/>
+          </a:p>
+        </p:txBody>
       </p:sp>
       <p:sp>
         <p:nvSpPr>
@@ -7151,7 +7241,7 @@
           <a:bodyPr wrap="square" rtlCol="0" anchor="ctr"/>
           <a:lstStyle/>
           <a:p>
-            <a:pPr indent="0" marL="0">
+            <a:pPr marL="0" indent="0">
               <a:buNone/>
             </a:pPr>
             <a:r>
@@ -7193,6 +7283,13 @@
             <a:prstDash val="solid"/>
           </a:ln>
         </p:spPr>
+        <p:txBody>
+          <a:bodyPr/>
+          <a:lstStyle/>
+          <a:p>
+            <a:endParaRPr lang="es-CO"/>
+          </a:p>
+        </p:txBody>
       </p:sp>
       <p:sp>
         <p:nvSpPr>
@@ -7215,7 +7312,7 @@
           <a:bodyPr wrap="square" rtlCol="0" anchor="ctr"/>
           <a:lstStyle/>
           <a:p>
-            <a:pPr indent="0" marL="0">
+            <a:pPr marL="0" indent="0">
               <a:buNone/>
             </a:pPr>
             <a:r>
@@ -7257,13 +7354,20 @@
             <a:prstDash val="solid"/>
           </a:ln>
           <a:effectLst>
-            <a:outerShdw sx="100000" sy="100000" kx="0" ky="0" algn="bl" rotWithShape="0" blurRad="101600" dist="38100" dir="8100000">
+            <a:outerShdw blurRad="101600" dist="38100" dir="8100000" algn="bl" rotWithShape="0">
               <a:srgbClr val="000000">
                 <a:alpha val="12000"/>
               </a:srgbClr>
             </a:outerShdw>
           </a:effectLst>
         </p:spPr>
+        <p:txBody>
+          <a:bodyPr/>
+          <a:lstStyle/>
+          <a:p>
+            <a:endParaRPr lang="es-CO"/>
+          </a:p>
+        </p:txBody>
       </p:sp>
       <p:sp>
         <p:nvSpPr>
@@ -7289,6 +7393,13 @@
             <a:prstDash val="solid"/>
           </a:ln>
         </p:spPr>
+        <p:txBody>
+          <a:bodyPr/>
+          <a:lstStyle/>
+          <a:p>
+            <a:endParaRPr lang="es-CO"/>
+          </a:p>
+        </p:txBody>
       </p:sp>
       <p:sp>
         <p:nvSpPr>
@@ -7311,7 +7422,7 @@
           <a:bodyPr wrap="square" lIns="0" tIns="0" rIns="0" bIns="0" rtlCol="0" anchor="ctr"/>
           <a:lstStyle/>
           <a:p>
-            <a:pPr algn="ctr" indent="0" marL="0">
+            <a:pPr marL="0" indent="0" algn="ctr">
               <a:buNone/>
             </a:pPr>
             <a:r>
@@ -7350,7 +7461,7 @@
           <a:bodyPr wrap="square" rtlCol="0" anchor="ctr"/>
           <a:lstStyle/>
           <a:p>
-            <a:pPr algn="ctr" indent="0" marL="0">
+            <a:pPr marL="0" indent="0" algn="ctr">
               <a:buNone/>
             </a:pPr>
             <a:r>
@@ -7367,7 +7478,7 @@
             <a:endParaRPr lang="en-US" sz="1100" dirty="0"/>
           </a:p>
           <a:p>
-            <a:pPr algn="ctr" indent="0" marL="0">
+            <a:pPr marL="0" indent="0" algn="ctr">
               <a:buNone/>
             </a:pPr>
             <a:r>
@@ -7409,6 +7520,13 @@
             <a:prstDash val="solid"/>
           </a:ln>
         </p:spPr>
+        <p:txBody>
+          <a:bodyPr/>
+          <a:lstStyle/>
+          <a:p>
+            <a:endParaRPr lang="es-CO"/>
+          </a:p>
+        </p:txBody>
       </p:sp>
       <p:sp>
         <p:nvSpPr>
@@ -7431,7 +7549,7 @@
           <a:bodyPr wrap="square" rtlCol="0" anchor="ctr"/>
           <a:lstStyle/>
           <a:p>
-            <a:pPr indent="0" marL="0">
+            <a:pPr marL="0" indent="0">
               <a:buNone/>
             </a:pPr>
             <a:r>
@@ -7473,6 +7591,13 @@
             <a:prstDash val="solid"/>
           </a:ln>
         </p:spPr>
+        <p:txBody>
+          <a:bodyPr/>
+          <a:lstStyle/>
+          <a:p>
+            <a:endParaRPr lang="es-CO"/>
+          </a:p>
+        </p:txBody>
       </p:sp>
       <p:sp>
         <p:nvSpPr>
@@ -7495,7 +7620,7 @@
           <a:bodyPr wrap="square" rtlCol="0" anchor="ctr"/>
           <a:lstStyle/>
           <a:p>
-            <a:pPr indent="0" marL="0">
+            <a:pPr marL="0" indent="0">
               <a:buNone/>
             </a:pPr>
             <a:r>
@@ -7537,6 +7662,13 @@
             <a:prstDash val="solid"/>
           </a:ln>
         </p:spPr>
+        <p:txBody>
+          <a:bodyPr/>
+          <a:lstStyle/>
+          <a:p>
+            <a:endParaRPr lang="es-CO"/>
+          </a:p>
+        </p:txBody>
       </p:sp>
       <p:sp>
         <p:nvSpPr>
@@ -7559,7 +7691,7 @@
           <a:bodyPr wrap="square" rtlCol="0" anchor="ctr"/>
           <a:lstStyle/>
           <a:p>
-            <a:pPr indent="0" marL="0">
+            <a:pPr marL="0" indent="0">
               <a:buNone/>
             </a:pPr>
             <a:r>
@@ -7601,6 +7733,13 @@
             <a:prstDash val="solid"/>
           </a:ln>
         </p:spPr>
+        <p:txBody>
+          <a:bodyPr/>
+          <a:lstStyle/>
+          <a:p>
+            <a:endParaRPr lang="es-CO"/>
+          </a:p>
+        </p:txBody>
       </p:sp>
       <p:sp>
         <p:nvSpPr>
@@ -7623,7 +7762,7 @@
           <a:bodyPr wrap="square" rtlCol="0" anchor="ctr"/>
           <a:lstStyle/>
           <a:p>
-            <a:pPr indent="0" marL="0">
+            <a:pPr marL="0" indent="0">
               <a:buNone/>
             </a:pPr>
             <a:r>
@@ -7665,6 +7804,13 @@
             <a:prstDash val="solid"/>
           </a:ln>
         </p:spPr>
+        <p:txBody>
+          <a:bodyPr/>
+          <a:lstStyle/>
+          <a:p>
+            <a:endParaRPr lang="es-CO"/>
+          </a:p>
+        </p:txBody>
       </p:sp>
       <p:sp>
         <p:nvSpPr>
@@ -7687,7 +7833,7 @@
           <a:bodyPr wrap="square" lIns="0" tIns="0" rIns="0" bIns="0" rtlCol="0" anchor="ctr"/>
           <a:lstStyle/>
           <a:p>
-            <a:pPr algn="ctr" indent="0" marL="0">
+            <a:pPr marL="0" indent="0" algn="ctr">
               <a:buNone/>
             </a:pPr>
             <a:r>
@@ -7726,7 +7872,7 @@
           <a:bodyPr wrap="square" rtlCol="0" anchor="ctr"/>
           <a:lstStyle/>
           <a:p>
-            <a:pPr algn="ctr" indent="0" marL="0">
+            <a:pPr marL="0" indent="0" algn="ctr">
               <a:buNone/>
             </a:pPr>
             <a:r>
@@ -7765,7 +7911,7 @@
           <a:bodyPr wrap="square" rtlCol="0" anchor="ctr"/>
           <a:lstStyle/>
           <a:p>
-            <a:pPr algn="ctr" indent="0" marL="0">
+            <a:pPr marL="0" indent="0" algn="ctr">
               <a:buNone/>
             </a:pPr>
             <a:r>
@@ -7799,6 +7945,7 @@
         <a:solidFill>
           <a:srgbClr val="F2F4F7"/>
         </a:solidFill>
+        <a:effectLst/>
       </p:bgPr>
     </p:bg>
     <p:spTree>
@@ -7839,6 +7986,13 @@
             <a:prstDash val="solid"/>
           </a:ln>
         </p:spPr>
+        <p:txBody>
+          <a:bodyPr/>
+          <a:lstStyle/>
+          <a:p>
+            <a:endParaRPr lang="es-CO"/>
+          </a:p>
+        </p:txBody>
       </p:sp>
       <p:sp>
         <p:nvSpPr>
@@ -7861,7 +8015,7 @@
           <a:bodyPr wrap="square" rtlCol="0" anchor="ctr"/>
           <a:lstStyle/>
           <a:p>
-            <a:pPr indent="0" marL="0">
+            <a:pPr marL="0" indent="0">
               <a:buNone/>
             </a:pPr>
             <a:r>
@@ -7903,6 +8057,13 @@
             <a:prstDash val="solid"/>
           </a:ln>
         </p:spPr>
+        <p:txBody>
+          <a:bodyPr/>
+          <a:lstStyle/>
+          <a:p>
+            <a:endParaRPr lang="es-CO"/>
+          </a:p>
+        </p:txBody>
       </p:sp>
       <p:sp>
         <p:nvSpPr>
@@ -7925,7 +8086,7 @@
           <a:bodyPr wrap="square" lIns="0" tIns="0" rIns="0" bIns="0" rtlCol="0" anchor="ctr"/>
           <a:lstStyle/>
           <a:p>
-            <a:pPr algn="ctr" indent="0" marL="0">
+            <a:pPr marL="0" indent="0" algn="ctr">
               <a:buNone/>
             </a:pPr>
             <a:r>
@@ -7967,6 +8128,13 @@
             <a:prstDash val="solid"/>
           </a:ln>
         </p:spPr>
+        <p:txBody>
+          <a:bodyPr/>
+          <a:lstStyle/>
+          <a:p>
+            <a:endParaRPr lang="es-CO"/>
+          </a:p>
+        </p:txBody>
       </p:sp>
       <p:sp>
         <p:nvSpPr>
@@ -7989,7 +8157,7 @@
           <a:bodyPr wrap="square" rtlCol="0" anchor="ctr"/>
           <a:lstStyle/>
           <a:p>
-            <a:pPr indent="0" marL="0">
+            <a:pPr marL="0" indent="0">
               <a:buNone/>
             </a:pPr>
             <a:r>
@@ -8028,7 +8196,7 @@
           <a:bodyPr wrap="square" rtlCol="0" anchor="ctr"/>
           <a:lstStyle/>
           <a:p>
-            <a:pPr indent="0" marL="0">
+            <a:pPr marL="0" indent="0">
               <a:buNone/>
             </a:pPr>
             <a:r>
@@ -8067,7 +8235,7 @@
           <a:bodyPr wrap="square" rtlCol="0" anchor="ctr"/>
           <a:lstStyle/>
           <a:p>
-            <a:pPr indent="0" marL="0">
+            <a:pPr marL="0" indent="0">
               <a:buNone/>
             </a:pPr>
             <a:r>
@@ -8109,6 +8277,13 @@
             <a:prstDash val="solid"/>
           </a:ln>
         </p:spPr>
+        <p:txBody>
+          <a:bodyPr/>
+          <a:lstStyle/>
+          <a:p>
+            <a:endParaRPr lang="es-CO"/>
+          </a:p>
+        </p:txBody>
       </p:sp>
       <p:sp>
         <p:nvSpPr>
@@ -8131,7 +8306,7 @@
           <a:bodyPr wrap="square" lIns="0" tIns="0" rIns="0" bIns="0" rtlCol="0" anchor="ctr"/>
           <a:lstStyle/>
           <a:p>
-            <a:pPr algn="ctr" indent="0" marL="0">
+            <a:pPr marL="0" indent="0" algn="ctr">
               <a:buNone/>
             </a:pPr>
             <a:r>
@@ -8173,6 +8348,13 @@
             <a:prstDash val="solid"/>
           </a:ln>
         </p:spPr>
+        <p:txBody>
+          <a:bodyPr/>
+          <a:lstStyle/>
+          <a:p>
+            <a:endParaRPr lang="es-CO"/>
+          </a:p>
+        </p:txBody>
       </p:sp>
       <p:sp>
         <p:nvSpPr>
@@ -8195,7 +8377,7 @@
           <a:bodyPr wrap="square" rtlCol="0" anchor="ctr"/>
           <a:lstStyle/>
           <a:p>
-            <a:pPr indent="0" marL="0">
+            <a:pPr marL="0" indent="0">
               <a:buNone/>
             </a:pPr>
             <a:r>
@@ -8234,7 +8416,7 @@
           <a:bodyPr wrap="square" rtlCol="0" anchor="ctr"/>
           <a:lstStyle/>
           <a:p>
-            <a:pPr indent="0" marL="0">
+            <a:pPr marL="0" indent="0">
               <a:buNone/>
             </a:pPr>
             <a:r>
@@ -8273,7 +8455,7 @@
           <a:bodyPr wrap="square" rtlCol="0" anchor="ctr"/>
           <a:lstStyle/>
           <a:p>
-            <a:pPr indent="0" marL="0">
+            <a:pPr marL="0" indent="0">
               <a:buNone/>
             </a:pPr>
             <a:r>
@@ -8312,7 +8494,7 @@
           <a:bodyPr wrap="square" rtlCol="0" anchor="ctr"/>
           <a:lstStyle/>
           <a:p>
-            <a:pPr indent="0" marL="0">
+            <a:pPr marL="0" indent="0">
               <a:buNone/>
             </a:pPr>
             <a:r>
@@ -8354,6 +8536,13 @@
             <a:prstDash val="solid"/>
           </a:ln>
         </p:spPr>
+        <p:txBody>
+          <a:bodyPr/>
+          <a:lstStyle/>
+          <a:p>
+            <a:endParaRPr lang="es-CO"/>
+          </a:p>
+        </p:txBody>
       </p:sp>
       <p:sp>
         <p:nvSpPr>
@@ -8376,7 +8565,7 @@
           <a:bodyPr wrap="square" lIns="0" tIns="0" rIns="0" bIns="0" rtlCol="0" anchor="ctr"/>
           <a:lstStyle/>
           <a:p>
-            <a:pPr algn="ctr" indent="0" marL="0">
+            <a:pPr marL="0" indent="0" algn="ctr">
               <a:buNone/>
             </a:pPr>
             <a:r>
@@ -8418,6 +8607,13 @@
             <a:prstDash val="solid"/>
           </a:ln>
         </p:spPr>
+        <p:txBody>
+          <a:bodyPr/>
+          <a:lstStyle/>
+          <a:p>
+            <a:endParaRPr lang="es-CO"/>
+          </a:p>
+        </p:txBody>
       </p:sp>
       <p:sp>
         <p:nvSpPr>
@@ -8440,7 +8636,7 @@
           <a:bodyPr wrap="square" rtlCol="0" anchor="ctr"/>
           <a:lstStyle/>
           <a:p>
-            <a:pPr indent="0" marL="0">
+            <a:pPr marL="0" indent="0">
               <a:buNone/>
             </a:pPr>
             <a:r>
@@ -8479,7 +8675,7 @@
           <a:bodyPr wrap="square" rtlCol="0" anchor="ctr"/>
           <a:lstStyle/>
           <a:p>
-            <a:pPr indent="0" marL="0">
+            <a:pPr marL="0" indent="0">
               <a:buNone/>
             </a:pPr>
             <a:r>
@@ -8518,7 +8714,7 @@
           <a:bodyPr wrap="square" rtlCol="0" anchor="ctr"/>
           <a:lstStyle/>
           <a:p>
-            <a:pPr indent="0" marL="0">
+            <a:pPr marL="0" indent="0">
               <a:buNone/>
             </a:pPr>
             <a:r>
@@ -8557,7 +8753,7 @@
           <a:bodyPr wrap="square" rtlCol="0" anchor="ctr"/>
           <a:lstStyle/>
           <a:p>
-            <a:pPr indent="0" marL="0">
+            <a:pPr marL="0" indent="0">
               <a:buNone/>
             </a:pPr>
             <a:r>
@@ -8599,6 +8795,13 @@
             <a:prstDash val="solid"/>
           </a:ln>
         </p:spPr>
+        <p:txBody>
+          <a:bodyPr/>
+          <a:lstStyle/>
+          <a:p>
+            <a:endParaRPr lang="es-CO"/>
+          </a:p>
+        </p:txBody>
       </p:sp>
       <p:sp>
         <p:nvSpPr>
@@ -8621,7 +8824,7 @@
           <a:bodyPr wrap="square" lIns="0" tIns="0" rIns="0" bIns="0" rtlCol="0" anchor="ctr"/>
           <a:lstStyle/>
           <a:p>
-            <a:pPr algn="ctr" indent="0" marL="0">
+            <a:pPr marL="0" indent="0" algn="ctr">
               <a:buNone/>
             </a:pPr>
             <a:r>
@@ -8663,6 +8866,13 @@
             <a:prstDash val="solid"/>
           </a:ln>
         </p:spPr>
+        <p:txBody>
+          <a:bodyPr/>
+          <a:lstStyle/>
+          <a:p>
+            <a:endParaRPr lang="es-CO"/>
+          </a:p>
+        </p:txBody>
       </p:sp>
       <p:sp>
         <p:nvSpPr>
@@ -8685,7 +8895,7 @@
           <a:bodyPr wrap="square" rtlCol="0" anchor="ctr"/>
           <a:lstStyle/>
           <a:p>
-            <a:pPr indent="0" marL="0">
+            <a:pPr marL="0" indent="0">
               <a:buNone/>
             </a:pPr>
             <a:r>
@@ -8724,7 +8934,7 @@
           <a:bodyPr wrap="square" rtlCol="0" anchor="ctr"/>
           <a:lstStyle/>
           <a:p>
-            <a:pPr indent="0" marL="0">
+            <a:pPr marL="0" indent="0">
               <a:buNone/>
             </a:pPr>
             <a:r>
@@ -8763,7 +8973,7 @@
           <a:bodyPr wrap="square" rtlCol="0" anchor="ctr"/>
           <a:lstStyle/>
           <a:p>
-            <a:pPr indent="0" marL="0">
+            <a:pPr marL="0" indent="0">
               <a:buNone/>
             </a:pPr>
             <a:r>
@@ -8805,6 +9015,13 @@
             <a:prstDash val="solid"/>
           </a:ln>
         </p:spPr>
+        <p:txBody>
+          <a:bodyPr/>
+          <a:lstStyle/>
+          <a:p>
+            <a:endParaRPr lang="es-CO"/>
+          </a:p>
+        </p:txBody>
       </p:sp>
       <p:sp>
         <p:nvSpPr>
@@ -8827,7 +9044,7 @@
           <a:bodyPr wrap="square" lIns="0" tIns="0" rIns="0" bIns="0" rtlCol="0" anchor="ctr"/>
           <a:lstStyle/>
           <a:p>
-            <a:pPr algn="ctr" indent="0" marL="0">
+            <a:pPr marL="0" indent="0" algn="ctr">
               <a:buNone/>
             </a:pPr>
             <a:r>
@@ -8869,6 +9086,13 @@
             <a:prstDash val="solid"/>
           </a:ln>
         </p:spPr>
+        <p:txBody>
+          <a:bodyPr/>
+          <a:lstStyle/>
+          <a:p>
+            <a:endParaRPr lang="es-CO"/>
+          </a:p>
+        </p:txBody>
       </p:sp>
       <p:sp>
         <p:nvSpPr>
@@ -8891,7 +9115,7 @@
           <a:bodyPr wrap="square" rtlCol="0" anchor="ctr"/>
           <a:lstStyle/>
           <a:p>
-            <a:pPr indent="0" marL="0">
+            <a:pPr marL="0" indent="0">
               <a:buNone/>
             </a:pPr>
             <a:r>
@@ -8930,7 +9154,7 @@
           <a:bodyPr wrap="square" rtlCol="0" anchor="ctr"/>
           <a:lstStyle/>
           <a:p>
-            <a:pPr indent="0" marL="0">
+            <a:pPr marL="0" indent="0">
               <a:buNone/>
             </a:pPr>
             <a:r>
@@ -8969,7 +9193,7 @@
           <a:bodyPr wrap="square" rtlCol="0" anchor="ctr"/>
           <a:lstStyle/>
           <a:p>
-            <a:pPr indent="0" marL="0">
+            <a:pPr marL="0" indent="0">
               <a:buNone/>
             </a:pPr>
             <a:r>
@@ -9011,6 +9235,13 @@
             <a:prstDash val="solid"/>
           </a:ln>
         </p:spPr>
+        <p:txBody>
+          <a:bodyPr/>
+          <a:lstStyle/>
+          <a:p>
+            <a:endParaRPr lang="es-CO"/>
+          </a:p>
+        </p:txBody>
       </p:sp>
       <p:sp>
         <p:nvSpPr>
@@ -9033,7 +9264,7 @@
           <a:bodyPr wrap="square" lIns="0" tIns="0" rIns="0" bIns="0" rtlCol="0" anchor="ctr"/>
           <a:lstStyle/>
           <a:p>
-            <a:pPr algn="ctr" indent="0" marL="0">
+            <a:pPr marL="0" indent="0" algn="ctr">
               <a:buNone/>
             </a:pPr>
             <a:r>
@@ -9075,6 +9306,13 @@
             <a:prstDash val="solid"/>
           </a:ln>
         </p:spPr>
+        <p:txBody>
+          <a:bodyPr/>
+          <a:lstStyle/>
+          <a:p>
+            <a:endParaRPr lang="es-CO"/>
+          </a:p>
+        </p:txBody>
       </p:sp>
       <p:sp>
         <p:nvSpPr>
@@ -9097,7 +9335,7 @@
           <a:bodyPr wrap="square" rtlCol="0" anchor="ctr"/>
           <a:lstStyle/>
           <a:p>
-            <a:pPr indent="0" marL="0">
+            <a:pPr marL="0" indent="0">
               <a:buNone/>
             </a:pPr>
             <a:r>
@@ -9136,7 +9374,7 @@
           <a:bodyPr wrap="square" rtlCol="0" anchor="ctr"/>
           <a:lstStyle/>
           <a:p>
-            <a:pPr indent="0" marL="0">
+            <a:pPr marL="0" indent="0">
               <a:buNone/>
             </a:pPr>
             <a:r>
@@ -9175,7 +9413,7 @@
           <a:bodyPr wrap="square" rtlCol="0" anchor="ctr"/>
           <a:lstStyle/>
           <a:p>
-            <a:pPr indent="0" marL="0">
+            <a:pPr marL="0" indent="0">
               <a:buNone/>
             </a:pPr>
             <a:r>
@@ -9214,7 +9452,7 @@
           <a:bodyPr wrap="square" rtlCol="0" anchor="ctr"/>
           <a:lstStyle/>
           <a:p>
-            <a:pPr indent="0" marL="0">
+            <a:pPr marL="0" indent="0">
               <a:buNone/>
             </a:pPr>
             <a:r>
@@ -9253,7 +9491,7 @@
           <a:bodyPr wrap="square" rtlCol="0" anchor="ctr"/>
           <a:lstStyle/>
           <a:p>
-            <a:pPr algn="ctr" indent="0" marL="0">
+            <a:pPr marL="0" indent="0" algn="ctr">
               <a:buNone/>
             </a:pPr>
             <a:r>
@@ -9287,6 +9525,7 @@
         <a:solidFill>
           <a:srgbClr val="FFFFFF"/>
         </a:solidFill>
+        <a:effectLst/>
       </p:bgPr>
     </p:bg>
     <p:spTree>
@@ -9327,6 +9566,13 @@
             <a:prstDash val="solid"/>
           </a:ln>
         </p:spPr>
+        <p:txBody>
+          <a:bodyPr/>
+          <a:lstStyle/>
+          <a:p>
+            <a:endParaRPr lang="es-CO"/>
+          </a:p>
+        </p:txBody>
       </p:sp>
       <p:sp>
         <p:nvSpPr>
@@ -9349,7 +9595,7 @@
           <a:bodyPr wrap="square" rtlCol="0" anchor="ctr"/>
           <a:lstStyle/>
           <a:p>
-            <a:pPr indent="0" marL="0">
+            <a:pPr marL="0" indent="0">
               <a:buNone/>
             </a:pPr>
             <a:r>
@@ -9391,13 +9637,20 @@
             <a:prstDash val="solid"/>
           </a:ln>
           <a:effectLst>
-            <a:outerShdw sx="100000" sy="100000" kx="0" ky="0" algn="bl" rotWithShape="0" blurRad="101600" dist="38100" dir="8100000">
+            <a:outerShdw blurRad="101600" dist="38100" dir="8100000" algn="bl" rotWithShape="0">
               <a:srgbClr val="000000">
                 <a:alpha val="12000"/>
               </a:srgbClr>
             </a:outerShdw>
           </a:effectLst>
         </p:spPr>
+        <p:txBody>
+          <a:bodyPr/>
+          <a:lstStyle/>
+          <a:p>
+            <a:endParaRPr lang="es-CO"/>
+          </a:p>
+        </p:txBody>
       </p:sp>
       <p:sp>
         <p:nvSpPr>
@@ -9423,6 +9676,13 @@
             <a:prstDash val="solid"/>
           </a:ln>
         </p:spPr>
+        <p:txBody>
+          <a:bodyPr/>
+          <a:lstStyle/>
+          <a:p>
+            <a:endParaRPr lang="es-CO"/>
+          </a:p>
+        </p:txBody>
       </p:sp>
       <p:sp>
         <p:nvSpPr>
@@ -9445,7 +9705,7 @@
           <a:bodyPr wrap="square" lIns="0" tIns="0" rIns="0" bIns="0" rtlCol="0" anchor="ctr"/>
           <a:lstStyle/>
           <a:p>
-            <a:pPr algn="ctr" indent="0" marL="0">
+            <a:pPr marL="0" indent="0" algn="ctr">
               <a:buNone/>
             </a:pPr>
             <a:r>
@@ -9484,7 +9744,7 @@
           <a:bodyPr wrap="square" rtlCol="0" anchor="ctr"/>
           <a:lstStyle/>
           <a:p>
-            <a:pPr indent="0" marL="0">
+            <a:pPr marL="0" indent="0">
               <a:buNone/>
             </a:pPr>
             <a:r>
@@ -9526,6 +9786,13 @@
             <a:prstDash val="solid"/>
           </a:ln>
         </p:spPr>
+        <p:txBody>
+          <a:bodyPr/>
+          <a:lstStyle/>
+          <a:p>
+            <a:endParaRPr lang="es-CO"/>
+          </a:p>
+        </p:txBody>
       </p:sp>
       <p:sp>
         <p:nvSpPr>
@@ -9548,7 +9815,7 @@
           <a:bodyPr wrap="square" rtlCol="0" anchor="ctr"/>
           <a:lstStyle/>
           <a:p>
-            <a:pPr indent="0" marL="0">
+            <a:pPr marL="0" indent="0">
               <a:buNone/>
             </a:pPr>
             <a:r>
@@ -9587,7 +9854,7 @@
           <a:bodyPr wrap="square" rtlCol="0" anchor="ctr"/>
           <a:lstStyle/>
           <a:p>
-            <a:pPr indent="0" marL="0">
+            <a:pPr marL="0" indent="0">
               <a:buNone/>
             </a:pPr>
             <a:r>
@@ -9629,13 +9896,20 @@
             <a:prstDash val="solid"/>
           </a:ln>
           <a:effectLst>
-            <a:outerShdw sx="100000" sy="100000" kx="0" ky="0" algn="bl" rotWithShape="0" blurRad="101600" dist="38100" dir="8100000">
+            <a:outerShdw blurRad="101600" dist="38100" dir="8100000" algn="bl" rotWithShape="0">
               <a:srgbClr val="000000">
                 <a:alpha val="12000"/>
               </a:srgbClr>
             </a:outerShdw>
           </a:effectLst>
         </p:spPr>
+        <p:txBody>
+          <a:bodyPr/>
+          <a:lstStyle/>
+          <a:p>
+            <a:endParaRPr lang="es-CO"/>
+          </a:p>
+        </p:txBody>
       </p:sp>
       <p:sp>
         <p:nvSpPr>
@@ -9661,6 +9935,13 @@
             <a:prstDash val="solid"/>
           </a:ln>
         </p:spPr>
+        <p:txBody>
+          <a:bodyPr/>
+          <a:lstStyle/>
+          <a:p>
+            <a:endParaRPr lang="es-CO"/>
+          </a:p>
+        </p:txBody>
       </p:sp>
       <p:sp>
         <p:nvSpPr>
@@ -9683,7 +9964,7 @@
           <a:bodyPr wrap="square" lIns="0" tIns="0" rIns="0" bIns="0" rtlCol="0" anchor="ctr"/>
           <a:lstStyle/>
           <a:p>
-            <a:pPr algn="ctr" indent="0" marL="0">
+            <a:pPr marL="0" indent="0" algn="ctr">
               <a:buNone/>
             </a:pPr>
             <a:r>
@@ -9722,7 +10003,7 @@
           <a:bodyPr wrap="square" rtlCol="0" anchor="ctr"/>
           <a:lstStyle/>
           <a:p>
-            <a:pPr indent="0" marL="0">
+            <a:pPr marL="0" indent="0">
               <a:buNone/>
             </a:pPr>
             <a:r>
@@ -9764,6 +10045,13 @@
             <a:prstDash val="solid"/>
           </a:ln>
         </p:spPr>
+        <p:txBody>
+          <a:bodyPr/>
+          <a:lstStyle/>
+          <a:p>
+            <a:endParaRPr lang="es-CO"/>
+          </a:p>
+        </p:txBody>
       </p:sp>
       <p:sp>
         <p:nvSpPr>
@@ -9786,7 +10074,7 @@
           <a:bodyPr wrap="square" rtlCol="0" anchor="ctr"/>
           <a:lstStyle/>
           <a:p>
-            <a:pPr indent="0" marL="0">
+            <a:pPr marL="0" indent="0">
               <a:buNone/>
             </a:pPr>
             <a:r>
@@ -9825,7 +10113,7 @@
           <a:bodyPr wrap="square" rtlCol="0" anchor="ctr"/>
           <a:lstStyle/>
           <a:p>
-            <a:pPr indent="0" marL="0">
+            <a:pPr marL="0" indent="0">
               <a:buNone/>
             </a:pPr>
             <a:r>
@@ -9867,13 +10155,20 @@
             <a:prstDash val="solid"/>
           </a:ln>
           <a:effectLst>
-            <a:outerShdw sx="100000" sy="100000" kx="0" ky="0" algn="bl" rotWithShape="0" blurRad="101600" dist="38100" dir="8100000">
+            <a:outerShdw blurRad="101600" dist="38100" dir="8100000" algn="bl" rotWithShape="0">
               <a:srgbClr val="000000">
                 <a:alpha val="12000"/>
               </a:srgbClr>
             </a:outerShdw>
           </a:effectLst>
         </p:spPr>
+        <p:txBody>
+          <a:bodyPr/>
+          <a:lstStyle/>
+          <a:p>
+            <a:endParaRPr lang="es-CO"/>
+          </a:p>
+        </p:txBody>
       </p:sp>
       <p:sp>
         <p:nvSpPr>
@@ -9899,6 +10194,13 @@
             <a:prstDash val="solid"/>
           </a:ln>
         </p:spPr>
+        <p:txBody>
+          <a:bodyPr/>
+          <a:lstStyle/>
+          <a:p>
+            <a:endParaRPr lang="es-CO"/>
+          </a:p>
+        </p:txBody>
       </p:sp>
       <p:sp>
         <p:nvSpPr>
@@ -9921,7 +10223,7 @@
           <a:bodyPr wrap="square" lIns="0" tIns="0" rIns="0" bIns="0" rtlCol="0" anchor="ctr"/>
           <a:lstStyle/>
           <a:p>
-            <a:pPr algn="ctr" indent="0" marL="0">
+            <a:pPr marL="0" indent="0" algn="ctr">
               <a:buNone/>
             </a:pPr>
             <a:r>
@@ -9960,7 +10262,7 @@
           <a:bodyPr wrap="square" rtlCol="0" anchor="ctr"/>
           <a:lstStyle/>
           <a:p>
-            <a:pPr indent="0" marL="0">
+            <a:pPr marL="0" indent="0">
               <a:buNone/>
             </a:pPr>
             <a:r>
@@ -10002,6 +10304,13 @@
             <a:prstDash val="solid"/>
           </a:ln>
         </p:spPr>
+        <p:txBody>
+          <a:bodyPr/>
+          <a:lstStyle/>
+          <a:p>
+            <a:endParaRPr lang="es-CO"/>
+          </a:p>
+        </p:txBody>
       </p:sp>
       <p:sp>
         <p:nvSpPr>
@@ -10024,7 +10333,7 @@
           <a:bodyPr wrap="square" rtlCol="0" anchor="ctr"/>
           <a:lstStyle/>
           <a:p>
-            <a:pPr indent="0" marL="0">
+            <a:pPr marL="0" indent="0">
               <a:buNone/>
             </a:pPr>
             <a:r>
@@ -10063,7 +10372,7 @@
           <a:bodyPr wrap="square" rtlCol="0" anchor="ctr"/>
           <a:lstStyle/>
           <a:p>
-            <a:pPr indent="0" marL="0">
+            <a:pPr marL="0" indent="0">
               <a:buNone/>
             </a:pPr>
             <a:r>
@@ -10105,13 +10414,20 @@
             <a:prstDash val="solid"/>
           </a:ln>
           <a:effectLst>
-            <a:outerShdw sx="100000" sy="100000" kx="0" ky="0" algn="bl" rotWithShape="0" blurRad="101600" dist="38100" dir="8100000">
+            <a:outerShdw blurRad="101600" dist="38100" dir="8100000" algn="bl" rotWithShape="0">
               <a:srgbClr val="000000">
                 <a:alpha val="12000"/>
               </a:srgbClr>
             </a:outerShdw>
           </a:effectLst>
         </p:spPr>
+        <p:txBody>
+          <a:bodyPr/>
+          <a:lstStyle/>
+          <a:p>
+            <a:endParaRPr lang="es-CO"/>
+          </a:p>
+        </p:txBody>
       </p:sp>
       <p:sp>
         <p:nvSpPr>
@@ -10137,6 +10453,13 @@
             <a:prstDash val="solid"/>
           </a:ln>
         </p:spPr>
+        <p:txBody>
+          <a:bodyPr/>
+          <a:lstStyle/>
+          <a:p>
+            <a:endParaRPr lang="es-CO"/>
+          </a:p>
+        </p:txBody>
       </p:sp>
       <p:sp>
         <p:nvSpPr>
@@ -10159,7 +10482,7 @@
           <a:bodyPr wrap="square" lIns="0" tIns="0" rIns="0" bIns="0" rtlCol="0" anchor="ctr"/>
           <a:lstStyle/>
           <a:p>
-            <a:pPr algn="ctr" indent="0" marL="0">
+            <a:pPr marL="0" indent="0" algn="ctr">
               <a:buNone/>
             </a:pPr>
             <a:r>
@@ -10198,7 +10521,7 @@
           <a:bodyPr wrap="square" rtlCol="0" anchor="ctr"/>
           <a:lstStyle/>
           <a:p>
-            <a:pPr indent="0" marL="0">
+            <a:pPr marL="0" indent="0">
               <a:buNone/>
             </a:pPr>
             <a:r>
@@ -10240,6 +10563,13 @@
             <a:prstDash val="solid"/>
           </a:ln>
         </p:spPr>
+        <p:txBody>
+          <a:bodyPr/>
+          <a:lstStyle/>
+          <a:p>
+            <a:endParaRPr lang="es-CO"/>
+          </a:p>
+        </p:txBody>
       </p:sp>
       <p:sp>
         <p:nvSpPr>
@@ -10262,7 +10592,7 @@
           <a:bodyPr wrap="square" rtlCol="0" anchor="ctr"/>
           <a:lstStyle/>
           <a:p>
-            <a:pPr indent="0" marL="0">
+            <a:pPr marL="0" indent="0">
               <a:buNone/>
             </a:pPr>
             <a:r>
@@ -10301,7 +10631,7 @@
           <a:bodyPr wrap="square" rtlCol="0" anchor="ctr"/>
           <a:lstStyle/>
           <a:p>
-            <a:pPr indent="0" marL="0">
+            <a:pPr marL="0" indent="0">
               <a:buNone/>
             </a:pPr>
             <a:r>
@@ -10343,13 +10673,20 @@
             <a:prstDash val="solid"/>
           </a:ln>
           <a:effectLst>
-            <a:outerShdw sx="100000" sy="100000" kx="0" ky="0" algn="bl" rotWithShape="0" blurRad="101600" dist="38100" dir="8100000">
+            <a:outerShdw blurRad="101600" dist="38100" dir="8100000" algn="bl" rotWithShape="0">
               <a:srgbClr val="000000">
                 <a:alpha val="12000"/>
               </a:srgbClr>
             </a:outerShdw>
           </a:effectLst>
         </p:spPr>
+        <p:txBody>
+          <a:bodyPr/>
+          <a:lstStyle/>
+          <a:p>
+            <a:endParaRPr lang="es-CO"/>
+          </a:p>
+        </p:txBody>
       </p:sp>
       <p:sp>
         <p:nvSpPr>
@@ -10375,6 +10712,13 @@
             <a:prstDash val="solid"/>
           </a:ln>
         </p:spPr>
+        <p:txBody>
+          <a:bodyPr/>
+          <a:lstStyle/>
+          <a:p>
+            <a:endParaRPr lang="es-CO"/>
+          </a:p>
+        </p:txBody>
       </p:sp>
       <p:sp>
         <p:nvSpPr>
@@ -10397,7 +10741,7 @@
           <a:bodyPr wrap="square" lIns="0" tIns="0" rIns="0" bIns="0" rtlCol="0" anchor="ctr"/>
           <a:lstStyle/>
           <a:p>
-            <a:pPr algn="ctr" indent="0" marL="0">
+            <a:pPr marL="0" indent="0" algn="ctr">
               <a:buNone/>
             </a:pPr>
             <a:r>
@@ -10436,7 +10780,7 @@
           <a:bodyPr wrap="square" rtlCol="0" anchor="ctr"/>
           <a:lstStyle/>
           <a:p>
-            <a:pPr indent="0" marL="0">
+            <a:pPr marL="0" indent="0">
               <a:buNone/>
             </a:pPr>
             <a:r>
@@ -10478,6 +10822,13 @@
             <a:prstDash val="solid"/>
           </a:ln>
         </p:spPr>
+        <p:txBody>
+          <a:bodyPr/>
+          <a:lstStyle/>
+          <a:p>
+            <a:endParaRPr lang="es-CO"/>
+          </a:p>
+        </p:txBody>
       </p:sp>
       <p:sp>
         <p:nvSpPr>
@@ -10500,7 +10851,7 @@
           <a:bodyPr wrap="square" rtlCol="0" anchor="ctr"/>
           <a:lstStyle/>
           <a:p>
-            <a:pPr indent="0" marL="0">
+            <a:pPr marL="0" indent="0">
               <a:buNone/>
             </a:pPr>
             <a:r>
@@ -10539,7 +10890,7 @@
           <a:bodyPr wrap="square" rtlCol="0" anchor="ctr"/>
           <a:lstStyle/>
           <a:p>
-            <a:pPr indent="0" marL="0">
+            <a:pPr marL="0" indent="0">
               <a:buNone/>
             </a:pPr>
             <a:r>
@@ -10573,6 +10924,7 @@
         <a:solidFill>
           <a:srgbClr val="F2F4F7"/>
         </a:solidFill>
+        <a:effectLst/>
       </p:bgPr>
     </p:bg>
     <p:spTree>
@@ -10613,6 +10965,13 @@
             <a:prstDash val="solid"/>
           </a:ln>
         </p:spPr>
+        <p:txBody>
+          <a:bodyPr/>
+          <a:lstStyle/>
+          <a:p>
+            <a:endParaRPr lang="es-CO"/>
+          </a:p>
+        </p:txBody>
       </p:sp>
       <p:sp>
         <p:nvSpPr>
@@ -10635,7 +10994,7 @@
           <a:bodyPr wrap="square" rtlCol="0" anchor="ctr"/>
           <a:lstStyle/>
           <a:p>
-            <a:pPr indent="0" marL="0">
+            <a:pPr marL="0" indent="0">
               <a:buNone/>
             </a:pPr>
             <a:r>
@@ -10677,13 +11036,20 @@
             <a:prstDash val="solid"/>
           </a:ln>
           <a:effectLst>
-            <a:outerShdw sx="100000" sy="100000" kx="0" ky="0" algn="bl" rotWithShape="0" blurRad="101600" dist="38100" dir="8100000">
+            <a:outerShdw blurRad="101600" dist="38100" dir="8100000" algn="bl" rotWithShape="0">
               <a:srgbClr val="000000">
                 <a:alpha val="12000"/>
               </a:srgbClr>
             </a:outerShdw>
           </a:effectLst>
         </p:spPr>
+        <p:txBody>
+          <a:bodyPr/>
+          <a:lstStyle/>
+          <a:p>
+            <a:endParaRPr lang="es-CO"/>
+          </a:p>
+        </p:txBody>
       </p:sp>
       <p:sp>
         <p:nvSpPr>
@@ -10706,7 +11072,7 @@
           <a:bodyPr wrap="square" rtlCol="0" anchor="ctr"/>
           <a:lstStyle/>
           <a:p>
-            <a:pPr indent="0" marL="0">
+            <a:pPr marL="0" indent="0">
               <a:buNone/>
             </a:pPr>
             <a:r>
@@ -10720,9 +11086,6 @@
               </a:rPr>
               <a:t>pg_trgm </a:t>
             </a:r>
-            <a:pPr indent="0" marL="0">
-              <a:buNone/>
-            </a:pPr>
             <a:r>
               <a:rPr lang="en-US" sz="1100" dirty="0">
                 <a:solidFill>
@@ -10759,7 +11122,7 @@
           <a:bodyPr wrap="square" rtlCol="0" anchor="ctr"/>
           <a:lstStyle/>
           <a:p>
-            <a:pPr indent="0" marL="0">
+            <a:pPr marL="0" indent="0">
               <a:buNone/>
             </a:pPr>
             <a:r>
@@ -10801,13 +11164,20 @@
             <a:prstDash val="solid"/>
           </a:ln>
           <a:effectLst>
-            <a:outerShdw sx="100000" sy="100000" kx="0" ky="0" algn="bl" rotWithShape="0" blurRad="101600" dist="38100" dir="8100000">
+            <a:outerShdw blurRad="101600" dist="38100" dir="8100000" algn="bl" rotWithShape="0">
               <a:srgbClr val="000000">
                 <a:alpha val="12000"/>
               </a:srgbClr>
             </a:outerShdw>
           </a:effectLst>
         </p:spPr>
+        <p:txBody>
+          <a:bodyPr/>
+          <a:lstStyle/>
+          <a:p>
+            <a:endParaRPr lang="es-CO"/>
+          </a:p>
+        </p:txBody>
       </p:sp>
       <p:sp>
         <p:nvSpPr>
@@ -10830,7 +11200,7 @@
           <a:bodyPr wrap="square" rtlCol="0" anchor="ctr"/>
           <a:lstStyle/>
           <a:p>
-            <a:pPr indent="0" marL="0">
+            <a:pPr marL="0" indent="0">
               <a:buNone/>
             </a:pPr>
             <a:r>
@@ -10844,9 +11214,6 @@
               </a:rPr>
               <a:t>pgcrypto </a:t>
             </a:r>
-            <a:pPr indent="0" marL="0">
-              <a:buNone/>
-            </a:pPr>
             <a:r>
               <a:rPr lang="en-US" sz="1100" dirty="0">
                 <a:solidFill>
@@ -10883,7 +11250,7 @@
           <a:bodyPr wrap="square" rtlCol="0" anchor="ctr"/>
           <a:lstStyle/>
           <a:p>
-            <a:pPr indent="0" marL="0">
+            <a:pPr marL="0" indent="0">
               <a:buNone/>
             </a:pPr>
             <a:r>
@@ -10925,13 +11292,20 @@
             <a:prstDash val="solid"/>
           </a:ln>
           <a:effectLst>
-            <a:outerShdw sx="100000" sy="100000" kx="0" ky="0" algn="bl" rotWithShape="0" blurRad="101600" dist="38100" dir="8100000">
+            <a:outerShdw blurRad="101600" dist="38100" dir="8100000" algn="bl" rotWithShape="0">
               <a:srgbClr val="000000">
                 <a:alpha val="12000"/>
               </a:srgbClr>
             </a:outerShdw>
           </a:effectLst>
         </p:spPr>
+        <p:txBody>
+          <a:bodyPr/>
+          <a:lstStyle/>
+          <a:p>
+            <a:endParaRPr lang="es-CO"/>
+          </a:p>
+        </p:txBody>
       </p:sp>
       <p:sp>
         <p:nvSpPr>
@@ -10954,7 +11328,7 @@
           <a:bodyPr wrap="square" rtlCol="0" anchor="ctr"/>
           <a:lstStyle/>
           <a:p>
-            <a:pPr indent="0" marL="0">
+            <a:pPr marL="0" indent="0">
               <a:buNone/>
             </a:pPr>
             <a:r>
@@ -10968,9 +11342,6 @@
               </a:rPr>
               <a:t>uuid-ossp </a:t>
             </a:r>
-            <a:pPr indent="0" marL="0">
-              <a:buNone/>
-            </a:pPr>
             <a:r>
               <a:rPr lang="en-US" sz="1100" dirty="0">
                 <a:solidFill>
@@ -11007,7 +11378,7 @@
           <a:bodyPr wrap="square" rtlCol="0" anchor="ctr"/>
           <a:lstStyle/>
           <a:p>
-            <a:pPr indent="0" marL="0">
+            <a:pPr marL="0" indent="0">
               <a:buNone/>
             </a:pPr>
             <a:r>
@@ -11049,13 +11420,20 @@
             <a:prstDash val="solid"/>
           </a:ln>
           <a:effectLst>
-            <a:outerShdw sx="100000" sy="100000" kx="0" ky="0" algn="bl" rotWithShape="0" blurRad="101600" dist="38100" dir="8100000">
+            <a:outerShdw blurRad="101600" dist="38100" dir="8100000" algn="bl" rotWithShape="0">
               <a:srgbClr val="000000">
                 <a:alpha val="12000"/>
               </a:srgbClr>
             </a:outerShdw>
           </a:effectLst>
         </p:spPr>
+        <p:txBody>
+          <a:bodyPr/>
+          <a:lstStyle/>
+          <a:p>
+            <a:endParaRPr lang="es-CO"/>
+          </a:p>
+        </p:txBody>
       </p:sp>
       <p:sp>
         <p:nvSpPr>
@@ -11078,7 +11456,7 @@
           <a:bodyPr wrap="square" rtlCol="0" anchor="ctr"/>
           <a:lstStyle/>
           <a:p>
-            <a:pPr indent="0" marL="0">
+            <a:pPr marL="0" indent="0">
               <a:buNone/>
             </a:pPr>
             <a:r>
@@ -11092,9 +11470,6 @@
               </a:rPr>
               <a:t>btree_gin </a:t>
             </a:r>
-            <a:pPr indent="0" marL="0">
-              <a:buNone/>
-            </a:pPr>
             <a:r>
               <a:rPr lang="en-US" sz="1100" dirty="0">
                 <a:solidFill>
@@ -11131,7 +11506,7 @@
           <a:bodyPr wrap="square" rtlCol="0" anchor="ctr"/>
           <a:lstStyle/>
           <a:p>
-            <a:pPr indent="0" marL="0">
+            <a:pPr marL="0" indent="0">
               <a:buNone/>
             </a:pPr>
             <a:r>
@@ -11157,7 +11532,7 @@
         </p:nvSpPr>
         <p:spPr>
           <a:xfrm>
-            <a:off x="731520" y="3383280"/>
+            <a:off x="502920" y="3383280"/>
             <a:ext cx="2651760" cy="868680"/>
           </a:xfrm>
           <a:prstGeom prst="rect">
@@ -11173,13 +11548,20 @@
             <a:prstDash val="solid"/>
           </a:ln>
           <a:effectLst>
-            <a:outerShdw sx="100000" sy="100000" kx="0" ky="0" algn="bl" rotWithShape="0" blurRad="101600" dist="38100" dir="8100000">
+            <a:outerShdw blurRad="101600" dist="38100" dir="8100000" algn="bl" rotWithShape="0">
               <a:srgbClr val="000000">
                 <a:alpha val="12000"/>
               </a:srgbClr>
             </a:outerShdw>
           </a:effectLst>
         </p:spPr>
+        <p:txBody>
+          <a:bodyPr/>
+          <a:lstStyle/>
+          <a:p>
+            <a:endParaRPr lang="es-CO"/>
+          </a:p>
+        </p:txBody>
       </p:sp>
       <p:sp>
         <p:nvSpPr>
@@ -11202,7 +11584,7 @@
           <a:bodyPr wrap="square" rtlCol="0" anchor="ctr"/>
           <a:lstStyle/>
           <a:p>
-            <a:pPr indent="0" marL="0">
+            <a:pPr marL="0" indent="0">
               <a:buNone/>
             </a:pPr>
             <a:r>
@@ -11216,9 +11598,6 @@
               </a:rPr>
               <a:t>PostGIS </a:t>
             </a:r>
-            <a:pPr indent="0" marL="0">
-              <a:buNone/>
-            </a:pPr>
             <a:r>
               <a:rPr lang="en-US" sz="1100" dirty="0">
                 <a:solidFill>
@@ -11255,7 +11634,7 @@
           <a:bodyPr wrap="square" rtlCol="0" anchor="ctr"/>
           <a:lstStyle/>
           <a:p>
-            <a:pPr indent="0" marL="0">
+            <a:pPr marL="0" indent="0">
               <a:buNone/>
             </a:pPr>
             <a:r>
@@ -11281,7 +11660,7 @@
         </p:nvSpPr>
         <p:spPr>
           <a:xfrm>
-            <a:off x="3703320" y="3383280"/>
+            <a:off x="3566160" y="3383280"/>
             <a:ext cx="2651760" cy="868680"/>
           </a:xfrm>
           <a:prstGeom prst="rect">
@@ -11297,13 +11676,20 @@
             <a:prstDash val="solid"/>
           </a:ln>
           <a:effectLst>
-            <a:outerShdw sx="100000" sy="100000" kx="0" ky="0" algn="bl" rotWithShape="0" blurRad="101600" dist="38100" dir="8100000">
+            <a:outerShdw blurRad="101600" dist="38100" dir="8100000" algn="bl" rotWithShape="0">
               <a:srgbClr val="000000">
                 <a:alpha val="12000"/>
               </a:srgbClr>
             </a:outerShdw>
           </a:effectLst>
         </p:spPr>
+        <p:txBody>
+          <a:bodyPr/>
+          <a:lstStyle/>
+          <a:p>
+            <a:endParaRPr lang="es-CO"/>
+          </a:p>
+        </p:txBody>
       </p:sp>
       <p:sp>
         <p:nvSpPr>
@@ -11326,7 +11712,7 @@
           <a:bodyPr wrap="square" rtlCol="0" anchor="ctr"/>
           <a:lstStyle/>
           <a:p>
-            <a:pPr indent="0" marL="0">
+            <a:pPr marL="0" indent="0">
               <a:buNone/>
             </a:pPr>
             <a:r>
@@ -11340,9 +11726,6 @@
               </a:rPr>
               <a:t>pg_stat_statements </a:t>
             </a:r>
-            <a:pPr indent="0" marL="0">
-              <a:buNone/>
-            </a:pPr>
             <a:r>
               <a:rPr lang="en-US" sz="1100" dirty="0">
                 <a:solidFill>
@@ -11379,7 +11762,7 @@
           <a:bodyPr wrap="square" rtlCol="0" anchor="ctr"/>
           <a:lstStyle/>
           <a:p>
-            <a:pPr indent="0" marL="0">
+            <a:pPr marL="0" indent="0">
               <a:buNone/>
             </a:pPr>
             <a:r>
@@ -11405,8 +11788,8 @@
         </p:nvSpPr>
         <p:spPr>
           <a:xfrm>
-            <a:off x="6675120" y="3383280"/>
-            <a:ext cx="2651760" cy="868680"/>
+            <a:off x="6563607" y="3383280"/>
+            <a:ext cx="2406433" cy="868680"/>
           </a:xfrm>
           <a:prstGeom prst="rect">
             <a:avLst/>
@@ -11421,13 +11804,20 @@
             <a:prstDash val="solid"/>
           </a:ln>
           <a:effectLst>
-            <a:outerShdw sx="100000" sy="100000" kx="0" ky="0" algn="bl" rotWithShape="0" blurRad="101600" dist="38100" dir="8100000">
+            <a:outerShdw blurRad="101600" dist="38100" dir="8100000" algn="bl" rotWithShape="0">
               <a:srgbClr val="000000">
                 <a:alpha val="12000"/>
               </a:srgbClr>
             </a:outerShdw>
           </a:effectLst>
         </p:spPr>
+        <p:txBody>
+          <a:bodyPr/>
+          <a:lstStyle/>
+          <a:p>
+            <a:endParaRPr lang="es-CO"/>
+          </a:p>
+        </p:txBody>
       </p:sp>
       <p:sp>
         <p:nvSpPr>
@@ -11450,7 +11840,7 @@
           <a:bodyPr wrap="square" rtlCol="0" anchor="ctr"/>
           <a:lstStyle/>
           <a:p>
-            <a:pPr indent="0" marL="0">
+            <a:pPr marL="0" indent="0">
               <a:buNone/>
             </a:pPr>
             <a:r>
@@ -11464,9 +11854,6 @@
               </a:rPr>
               <a:t>hstore </a:t>
             </a:r>
-            <a:pPr indent="0" marL="0">
-              <a:buNone/>
-            </a:pPr>
             <a:r>
               <a:rPr lang="en-US" sz="1100" dirty="0">
                 <a:solidFill>
@@ -11503,7 +11890,7 @@
           <a:bodyPr wrap="square" rtlCol="0" anchor="ctr"/>
           <a:lstStyle/>
           <a:p>
-            <a:pPr indent="0" marL="0">
+            <a:pPr marL="0" indent="0">
               <a:buNone/>
             </a:pPr>
             <a:r>
@@ -11537,6 +11924,7 @@
         <a:solidFill>
           <a:srgbClr val="FFFFFF"/>
         </a:solidFill>
+        <a:effectLst/>
       </p:bgPr>
     </p:bg>
     <p:spTree>
@@ -11577,6 +11965,13 @@
             <a:prstDash val="solid"/>
           </a:ln>
         </p:spPr>
+        <p:txBody>
+          <a:bodyPr/>
+          <a:lstStyle/>
+          <a:p>
+            <a:endParaRPr lang="es-CO"/>
+          </a:p>
+        </p:txBody>
       </p:sp>
       <p:sp>
         <p:nvSpPr>
@@ -11599,7 +11994,7 @@
           <a:bodyPr wrap="square" rtlCol="0" anchor="ctr"/>
           <a:lstStyle/>
           <a:p>
-            <a:pPr indent="0" marL="0">
+            <a:pPr marL="0" indent="0">
               <a:buNone/>
             </a:pPr>
             <a:r>
@@ -11638,7 +12033,7 @@
           <a:bodyPr wrap="square" rtlCol="0" anchor="ctr"/>
           <a:lstStyle/>
           <a:p>
-            <a:pPr indent="0" marL="0">
+            <a:pPr marL="0" indent="0">
               <a:buNone/>
             </a:pPr>
             <a:r>
@@ -11680,6 +12075,13 @@
             <a:prstDash val="solid"/>
           </a:ln>
         </p:spPr>
+        <p:txBody>
+          <a:bodyPr/>
+          <a:lstStyle/>
+          <a:p>
+            <a:endParaRPr lang="es-CO"/>
+          </a:p>
+        </p:txBody>
       </p:sp>
       <p:sp>
         <p:nvSpPr>
@@ -11702,7 +12104,7 @@
           <a:bodyPr wrap="square" rtlCol="0" anchor="ctr"/>
           <a:lstStyle/>
           <a:p>
-            <a:pPr indent="0" marL="0">
+            <a:pPr marL="0" indent="0">
               <a:buNone/>
             </a:pPr>
             <a:r>
@@ -11741,7 +12143,7 @@
           <a:bodyPr wrap="square" rtlCol="0" anchor="ctr"/>
           <a:lstStyle/>
           <a:p>
-            <a:pPr indent="0" marL="0">
+            <a:pPr marL="0" indent="0">
               <a:buNone/>
             </a:pPr>
             <a:r>
@@ -11783,6 +12185,13 @@
             <a:prstDash val="solid"/>
           </a:ln>
         </p:spPr>
+        <p:txBody>
+          <a:bodyPr/>
+          <a:lstStyle/>
+          <a:p>
+            <a:endParaRPr lang="es-CO"/>
+          </a:p>
+        </p:txBody>
       </p:sp>
       <p:sp>
         <p:nvSpPr>
@@ -11805,7 +12214,7 @@
           <a:bodyPr wrap="square" rtlCol="0" anchor="ctr"/>
           <a:lstStyle/>
           <a:p>
-            <a:pPr indent="0" marL="0">
+            <a:pPr marL="0" indent="0">
               <a:buNone/>
             </a:pPr>
             <a:r>
@@ -11844,7 +12253,7 @@
           <a:bodyPr wrap="square" rtlCol="0" anchor="ctr"/>
           <a:lstStyle/>
           <a:p>
-            <a:pPr indent="0" marL="0">
+            <a:pPr marL="0" indent="0">
               <a:buNone/>
             </a:pPr>
             <a:r>
@@ -11886,6 +12295,13 @@
             <a:prstDash val="solid"/>
           </a:ln>
         </p:spPr>
+        <p:txBody>
+          <a:bodyPr/>
+          <a:lstStyle/>
+          <a:p>
+            <a:endParaRPr lang="es-CO"/>
+          </a:p>
+        </p:txBody>
       </p:sp>
       <p:sp>
         <p:nvSpPr>
@@ -11908,7 +12324,7 @@
           <a:bodyPr wrap="square" rtlCol="0" anchor="ctr"/>
           <a:lstStyle/>
           <a:p>
-            <a:pPr indent="0" marL="0">
+            <a:pPr marL="0" indent="0">
               <a:buNone/>
             </a:pPr>
             <a:r>
@@ -11947,7 +12363,7 @@
           <a:bodyPr wrap="square" rtlCol="0" anchor="ctr"/>
           <a:lstStyle/>
           <a:p>
-            <a:pPr indent="0" marL="0">
+            <a:pPr marL="0" indent="0">
               <a:buNone/>
             </a:pPr>
             <a:r>
@@ -11989,6 +12405,13 @@
             <a:prstDash val="solid"/>
           </a:ln>
         </p:spPr>
+        <p:txBody>
+          <a:bodyPr/>
+          <a:lstStyle/>
+          <a:p>
+            <a:endParaRPr lang="es-CO"/>
+          </a:p>
+        </p:txBody>
       </p:sp>
       <p:sp>
         <p:nvSpPr>
@@ -12011,7 +12434,7 @@
           <a:bodyPr wrap="square" rtlCol="0" anchor="ctr"/>
           <a:lstStyle/>
           <a:p>
-            <a:pPr indent="0" marL="0">
+            <a:pPr marL="0" indent="0">
               <a:buNone/>
             </a:pPr>
             <a:r>
@@ -12050,7 +12473,7 @@
           <a:bodyPr wrap="square" rtlCol="0" anchor="ctr"/>
           <a:lstStyle/>
           <a:p>
-            <a:pPr indent="0" marL="0">
+            <a:pPr marL="0" indent="0">
               <a:buNone/>
             </a:pPr>
             <a:r>
@@ -12092,6 +12515,13 @@
             <a:prstDash val="solid"/>
           </a:ln>
         </p:spPr>
+        <p:txBody>
+          <a:bodyPr/>
+          <a:lstStyle/>
+          <a:p>
+            <a:endParaRPr lang="es-CO"/>
+          </a:p>
+        </p:txBody>
       </p:sp>
       <p:sp>
         <p:nvSpPr>
@@ -12114,7 +12544,7 @@
           <a:bodyPr wrap="square" rtlCol="0" anchor="ctr"/>
           <a:lstStyle/>
           <a:p>
-            <a:pPr indent="0" marL="0">
+            <a:pPr marL="0" indent="0">
               <a:buNone/>
             </a:pPr>
             <a:r>
@@ -12153,7 +12583,7 @@
           <a:bodyPr wrap="square" rtlCol="0" anchor="ctr"/>
           <a:lstStyle/>
           <a:p>
-            <a:pPr indent="0" marL="0">
+            <a:pPr marL="0" indent="0">
               <a:buNone/>
             </a:pPr>
             <a:r>
@@ -12195,6 +12625,13 @@
             <a:prstDash val="solid"/>
           </a:ln>
         </p:spPr>
+        <p:txBody>
+          <a:bodyPr/>
+          <a:lstStyle/>
+          <a:p>
+            <a:endParaRPr lang="es-CO"/>
+          </a:p>
+        </p:txBody>
       </p:sp>
       <p:sp>
         <p:nvSpPr>
@@ -12217,7 +12654,7 @@
           <a:bodyPr wrap="square" rtlCol="0" anchor="ctr"/>
           <a:lstStyle/>
           <a:p>
-            <a:pPr indent="0" marL="0">
+            <a:pPr marL="0" indent="0">
               <a:buNone/>
             </a:pPr>
             <a:r>
@@ -12256,7 +12693,7 @@
           <a:bodyPr wrap="square" rtlCol="0" anchor="ctr"/>
           <a:lstStyle/>
           <a:p>
-            <a:pPr indent="0" marL="0">
+            <a:pPr marL="0" indent="0">
               <a:buNone/>
             </a:pPr>
             <a:r>
@@ -12295,7 +12732,7 @@
           <a:bodyPr wrap="square" rtlCol="0" anchor="ctr"/>
           <a:lstStyle/>
           <a:p>
-            <a:pPr indent="0" marL="0">
+            <a:pPr marL="0" indent="0">
               <a:buNone/>
             </a:pPr>
             <a:r>
@@ -12337,13 +12774,20 @@
             <a:prstDash val="solid"/>
           </a:ln>
           <a:effectLst>
-            <a:outerShdw sx="100000" sy="100000" kx="0" ky="0" algn="bl" rotWithShape="0" blurRad="101600" dist="38100" dir="8100000">
+            <a:outerShdw blurRad="101600" dist="38100" dir="8100000" algn="bl" rotWithShape="0">
               <a:srgbClr val="000000">
                 <a:alpha val="12000"/>
               </a:srgbClr>
             </a:outerShdw>
           </a:effectLst>
         </p:spPr>
+        <p:txBody>
+          <a:bodyPr/>
+          <a:lstStyle/>
+          <a:p>
+            <a:endParaRPr lang="es-CO"/>
+          </a:p>
+        </p:txBody>
       </p:sp>
       <p:sp>
         <p:nvSpPr>
@@ -12369,6 +12813,13 @@
             <a:prstDash val="solid"/>
           </a:ln>
         </p:spPr>
+        <p:txBody>
+          <a:bodyPr/>
+          <a:lstStyle/>
+          <a:p>
+            <a:endParaRPr lang="es-CO"/>
+          </a:p>
+        </p:txBody>
       </p:sp>
       <p:sp>
         <p:nvSpPr>
@@ -12391,7 +12842,7 @@
           <a:bodyPr wrap="square" lIns="0" tIns="0" rIns="0" bIns="0" rtlCol="0" anchor="ctr"/>
           <a:lstStyle/>
           <a:p>
-            <a:pPr algn="ctr" indent="0" marL="0">
+            <a:pPr marL="0" indent="0" algn="ctr">
               <a:buNone/>
             </a:pPr>
             <a:r>
@@ -12430,7 +12881,7 @@
           <a:bodyPr wrap="square" rtlCol="0" anchor="ctr"/>
           <a:lstStyle/>
           <a:p>
-            <a:pPr indent="0" marL="0">
+            <a:pPr marL="0" indent="0">
               <a:buNone/>
             </a:pPr>
             <a:r>
@@ -12447,7 +12898,7 @@
             <a:endParaRPr lang="en-US" sz="1000" dirty="0"/>
           </a:p>
           <a:p>
-            <a:pPr indent="0" marL="0">
+            <a:pPr marL="0" indent="0">
               <a:buNone/>
             </a:pPr>
             <a:r>
@@ -12474,7 +12925,7 @@
         <p:spPr>
           <a:xfrm>
             <a:off x="5486400" y="3429000"/>
-            <a:ext cx="3383280" cy="1737360"/>
+            <a:ext cx="3383280" cy="1633654"/>
           </a:xfrm>
           <a:prstGeom prst="rect">
             <a:avLst/>
@@ -12489,13 +12940,20 @@
             <a:prstDash val="solid"/>
           </a:ln>
           <a:effectLst>
-            <a:outerShdw sx="100000" sy="100000" kx="0" ky="0" algn="bl" rotWithShape="0" blurRad="101600" dist="38100" dir="8100000">
+            <a:outerShdw blurRad="101600" dist="38100" dir="8100000" algn="bl" rotWithShape="0">
               <a:srgbClr val="000000">
                 <a:alpha val="12000"/>
               </a:srgbClr>
             </a:outerShdw>
           </a:effectLst>
         </p:spPr>
+        <p:txBody>
+          <a:bodyPr/>
+          <a:lstStyle/>
+          <a:p>
+            <a:endParaRPr lang="es-CO"/>
+          </a:p>
+        </p:txBody>
       </p:sp>
       <p:sp>
         <p:nvSpPr>
@@ -12521,6 +12979,13 @@
             <a:prstDash val="solid"/>
           </a:ln>
         </p:spPr>
+        <p:txBody>
+          <a:bodyPr/>
+          <a:lstStyle/>
+          <a:p>
+            <a:endParaRPr lang="es-CO"/>
+          </a:p>
+        </p:txBody>
       </p:sp>
       <p:sp>
         <p:nvSpPr>
@@ -12543,7 +13008,7 @@
           <a:bodyPr wrap="square" lIns="0" tIns="0" rIns="0" bIns="0" rtlCol="0" anchor="ctr"/>
           <a:lstStyle/>
           <a:p>
-            <a:pPr algn="ctr" indent="0" marL="0">
+            <a:pPr marL="0" indent="0" algn="ctr">
               <a:buNone/>
             </a:pPr>
             <a:r>
@@ -12582,7 +13047,7 @@
           <a:bodyPr wrap="square" rtlCol="0" anchor="ctr"/>
           <a:lstStyle/>
           <a:p>
-            <a:pPr indent="0" marL="0">
+            <a:pPr marL="0" indent="0">
               <a:buNone/>
             </a:pPr>
             <a:r>
@@ -12599,7 +13064,7 @@
             <a:endParaRPr lang="en-US" sz="1000" dirty="0"/>
           </a:p>
           <a:p>
-            <a:pPr indent="0" marL="0">
+            <a:pPr marL="0" indent="0">
               <a:buNone/>
             </a:pPr>
             <a:r>
@@ -12616,7 +13081,7 @@
             <a:endParaRPr lang="en-US" sz="1000" dirty="0"/>
           </a:p>
           <a:p>
-            <a:pPr indent="0" marL="0">
+            <a:pPr marL="0" indent="0">
               <a:buNone/>
             </a:pPr>
             <a:r>
@@ -12650,6 +13115,7 @@
         <a:solidFill>
           <a:srgbClr val="F2F4F7"/>
         </a:solidFill>
+        <a:effectLst/>
       </p:bgPr>
     </p:bg>
     <p:spTree>
@@ -12690,6 +13156,13 @@
             <a:prstDash val="solid"/>
           </a:ln>
         </p:spPr>
+        <p:txBody>
+          <a:bodyPr/>
+          <a:lstStyle/>
+          <a:p>
+            <a:endParaRPr lang="es-CO"/>
+          </a:p>
+        </p:txBody>
       </p:sp>
       <p:sp>
         <p:nvSpPr>
@@ -12712,7 +13185,7 @@
           <a:bodyPr wrap="square" rtlCol="0" anchor="ctr"/>
           <a:lstStyle/>
           <a:p>
-            <a:pPr indent="0" marL="0">
+            <a:pPr marL="0" indent="0">
               <a:buNone/>
             </a:pPr>
             <a:r>
@@ -12754,13 +13227,20 @@
             <a:prstDash val="solid"/>
           </a:ln>
           <a:effectLst>
-            <a:outerShdw sx="100000" sy="100000" kx="0" ky="0" algn="bl" rotWithShape="0" blurRad="101600" dist="38100" dir="8100000">
+            <a:outerShdw blurRad="101600" dist="38100" dir="8100000" algn="bl" rotWithShape="0">
               <a:srgbClr val="000000">
                 <a:alpha val="12000"/>
               </a:srgbClr>
             </a:outerShdw>
           </a:effectLst>
         </p:spPr>
+        <p:txBody>
+          <a:bodyPr/>
+          <a:lstStyle/>
+          <a:p>
+            <a:endParaRPr lang="es-CO"/>
+          </a:p>
+        </p:txBody>
       </p:sp>
       <p:sp>
         <p:nvSpPr>
@@ -12786,6 +13266,13 @@
             <a:prstDash val="solid"/>
           </a:ln>
         </p:spPr>
+        <p:txBody>
+          <a:bodyPr/>
+          <a:lstStyle/>
+          <a:p>
+            <a:endParaRPr lang="es-CO"/>
+          </a:p>
+        </p:txBody>
       </p:sp>
       <p:sp>
         <p:nvSpPr>
@@ -12808,7 +13295,7 @@
           <a:bodyPr wrap="square" lIns="0" tIns="0" rIns="0" bIns="0" rtlCol="0" anchor="ctr"/>
           <a:lstStyle/>
           <a:p>
-            <a:pPr algn="ctr" indent="0" marL="0">
+            <a:pPr marL="0" indent="0" algn="ctr">
               <a:buNone/>
             </a:pPr>
             <a:r>
@@ -12847,7 +13334,7 @@
           <a:bodyPr wrap="square" rtlCol="0" anchor="ctr"/>
           <a:lstStyle/>
           <a:p>
-            <a:pPr algn="ctr" indent="0" marL="0">
+            <a:pPr marL="0" indent="0" algn="ctr">
               <a:buNone/>
             </a:pPr>
             <a:r>
@@ -12864,7 +13351,7 @@
             <a:endParaRPr lang="en-US" sz="900" dirty="0"/>
           </a:p>
           <a:p>
-            <a:pPr algn="ctr" indent="0" marL="0">
+            <a:pPr marL="0" indent="0" algn="ctr">
               <a:buNone/>
             </a:pPr>
             <a:r>
@@ -12904,6 +13391,13 @@
             <a:prstDash val="solid"/>
           </a:ln>
         </p:spPr>
+        <p:txBody>
+          <a:bodyPr/>
+          <a:lstStyle/>
+          <a:p>
+            <a:endParaRPr lang="es-CO"/>
+          </a:p>
+        </p:txBody>
       </p:sp>
       <p:sp>
         <p:nvSpPr>
@@ -12926,7 +13420,7 @@
           <a:bodyPr wrap="square" rtlCol="0" anchor="ctr"/>
           <a:lstStyle/>
           <a:p>
-            <a:pPr indent="0" marL="0">
+            <a:pPr marL="0" indent="0">
               <a:buNone/>
             </a:pPr>
             <a:r>
@@ -12965,7 +13459,7 @@
           <a:bodyPr wrap="square" rtlCol="0" anchor="ctr"/>
           <a:lstStyle/>
           <a:p>
-            <a:pPr indent="0" marL="0">
+            <a:pPr marL="0" indent="0">
               <a:buNone/>
             </a:pPr>
             <a:r>
@@ -12982,7 +13476,7 @@
             <a:endParaRPr lang="en-US" sz="800" dirty="0"/>
           </a:p>
           <a:p>
-            <a:pPr indent="0" marL="0">
+            <a:pPr marL="0" indent="0">
               <a:buNone/>
             </a:pPr>
             <a:r>
@@ -12999,7 +13493,7 @@
             <a:endParaRPr lang="en-US" sz="800" dirty="0"/>
           </a:p>
           <a:p>
-            <a:pPr indent="0" marL="0">
+            <a:pPr marL="0" indent="0">
               <a:buNone/>
             </a:pPr>
             <a:r>
@@ -13016,7 +13510,7 @@
             <a:endParaRPr lang="en-US" sz="800" dirty="0"/>
           </a:p>
           <a:p>
-            <a:pPr indent="0" marL="0">
+            <a:pPr marL="0" indent="0">
               <a:buNone/>
             </a:pPr>
             <a:r>
@@ -13056,6 +13550,13 @@
             <a:prstDash val="solid"/>
           </a:ln>
         </p:spPr>
+        <p:txBody>
+          <a:bodyPr/>
+          <a:lstStyle/>
+          <a:p>
+            <a:endParaRPr lang="es-CO"/>
+          </a:p>
+        </p:txBody>
       </p:sp>
       <p:sp>
         <p:nvSpPr>
@@ -13078,7 +13579,7 @@
           <a:bodyPr wrap="square" rtlCol="0" anchor="ctr"/>
           <a:lstStyle/>
           <a:p>
-            <a:pPr indent="0" marL="0">
+            <a:pPr marL="0" indent="0">
               <a:buNone/>
             </a:pPr>
             <a:r>
@@ -13095,7 +13596,7 @@
             <a:endParaRPr lang="en-US" sz="800" dirty="0"/>
           </a:p>
           <a:p>
-            <a:pPr indent="0" marL="0">
+            <a:pPr marL="0" indent="0">
               <a:buNone/>
             </a:pPr>
             <a:r>
@@ -13112,7 +13613,7 @@
             <a:endParaRPr lang="en-US" sz="800" dirty="0"/>
           </a:p>
           <a:p>
-            <a:pPr indent="0" marL="0">
+            <a:pPr marL="0" indent="0">
               <a:buNone/>
             </a:pPr>
             <a:r>
@@ -13154,13 +13655,20 @@
             <a:prstDash val="solid"/>
           </a:ln>
           <a:effectLst>
-            <a:outerShdw sx="100000" sy="100000" kx="0" ky="0" algn="bl" rotWithShape="0" blurRad="101600" dist="38100" dir="8100000">
+            <a:outerShdw blurRad="101600" dist="38100" dir="8100000" algn="bl" rotWithShape="0">
               <a:srgbClr val="000000">
                 <a:alpha val="12000"/>
               </a:srgbClr>
             </a:outerShdw>
           </a:effectLst>
         </p:spPr>
+        <p:txBody>
+          <a:bodyPr/>
+          <a:lstStyle/>
+          <a:p>
+            <a:endParaRPr lang="es-CO"/>
+          </a:p>
+        </p:txBody>
       </p:sp>
       <p:sp>
         <p:nvSpPr>
@@ -13186,6 +13694,13 @@
             <a:prstDash val="solid"/>
           </a:ln>
         </p:spPr>
+        <p:txBody>
+          <a:bodyPr/>
+          <a:lstStyle/>
+          <a:p>
+            <a:endParaRPr lang="es-CO"/>
+          </a:p>
+        </p:txBody>
       </p:sp>
       <p:sp>
         <p:nvSpPr>
@@ -13208,7 +13723,7 @@
           <a:bodyPr wrap="square" lIns="0" tIns="0" rIns="0" bIns="0" rtlCol="0" anchor="ctr"/>
           <a:lstStyle/>
           <a:p>
-            <a:pPr algn="ctr" indent="0" marL="0">
+            <a:pPr marL="0" indent="0" algn="ctr">
               <a:buNone/>
             </a:pPr>
             <a:r>
@@ -13247,7 +13762,7 @@
           <a:bodyPr wrap="square" rtlCol="0" anchor="ctr"/>
           <a:lstStyle/>
           <a:p>
-            <a:pPr algn="ctr" indent="0" marL="0">
+            <a:pPr marL="0" indent="0" algn="ctr">
               <a:buNone/>
             </a:pPr>
             <a:r>
@@ -13264,7 +13779,7 @@
             <a:endParaRPr lang="en-US" sz="900" dirty="0"/>
           </a:p>
           <a:p>
-            <a:pPr algn="ctr" indent="0" marL="0">
+            <a:pPr marL="0" indent="0" algn="ctr">
               <a:buNone/>
             </a:pPr>
             <a:r>
@@ -13304,6 +13819,13 @@
             <a:prstDash val="solid"/>
           </a:ln>
         </p:spPr>
+        <p:txBody>
+          <a:bodyPr/>
+          <a:lstStyle/>
+          <a:p>
+            <a:endParaRPr lang="es-CO"/>
+          </a:p>
+        </p:txBody>
       </p:sp>
       <p:sp>
         <p:nvSpPr>
@@ -13326,7 +13848,7 @@
           <a:bodyPr wrap="square" rtlCol="0" anchor="ctr"/>
           <a:lstStyle/>
           <a:p>
-            <a:pPr indent="0" marL="0">
+            <a:pPr marL="0" indent="0">
               <a:buNone/>
             </a:pPr>
             <a:r>
@@ -13365,7 +13887,7 @@
           <a:bodyPr wrap="square" rtlCol="0" anchor="ctr"/>
           <a:lstStyle/>
           <a:p>
-            <a:pPr indent="0" marL="0">
+            <a:pPr marL="0" indent="0">
               <a:buNone/>
             </a:pPr>
             <a:r>
@@ -13382,7 +13904,7 @@
             <a:endParaRPr lang="en-US" sz="800" dirty="0"/>
           </a:p>
           <a:p>
-            <a:pPr indent="0" marL="0">
+            <a:pPr marL="0" indent="0">
               <a:buNone/>
             </a:pPr>
             <a:r>
@@ -13399,7 +13921,7 @@
             <a:endParaRPr lang="en-US" sz="800" dirty="0"/>
           </a:p>
           <a:p>
-            <a:pPr indent="0" marL="0">
+            <a:pPr marL="0" indent="0">
               <a:buNone/>
             </a:pPr>
             <a:r>
@@ -13416,7 +13938,7 @@
             <a:endParaRPr lang="en-US" sz="800" dirty="0"/>
           </a:p>
           <a:p>
-            <a:pPr indent="0" marL="0">
+            <a:pPr marL="0" indent="0">
               <a:buNone/>
             </a:pPr>
             <a:r>
@@ -13456,6 +13978,13 @@
             <a:prstDash val="solid"/>
           </a:ln>
         </p:spPr>
+        <p:txBody>
+          <a:bodyPr/>
+          <a:lstStyle/>
+          <a:p>
+            <a:endParaRPr lang="es-CO"/>
+          </a:p>
+        </p:txBody>
       </p:sp>
       <p:sp>
         <p:nvSpPr>
@@ -13478,7 +14007,7 @@
           <a:bodyPr wrap="square" rtlCol="0" anchor="ctr"/>
           <a:lstStyle/>
           <a:p>
-            <a:pPr indent="0" marL="0">
+            <a:pPr marL="0" indent="0">
               <a:buNone/>
             </a:pPr>
             <a:r>
@@ -13495,7 +14024,7 @@
             <a:endParaRPr lang="en-US" sz="800" dirty="0"/>
           </a:p>
           <a:p>
-            <a:pPr indent="0" marL="0">
+            <a:pPr marL="0" indent="0">
               <a:buNone/>
             </a:pPr>
             <a:r>
@@ -13512,7 +14041,7 @@
             <a:endParaRPr lang="en-US" sz="800" dirty="0"/>
           </a:p>
           <a:p>
-            <a:pPr indent="0" marL="0">
+            <a:pPr marL="0" indent="0">
               <a:buNone/>
             </a:pPr>
             <a:r>
@@ -13554,13 +14083,20 @@
             <a:prstDash val="solid"/>
           </a:ln>
           <a:effectLst>
-            <a:outerShdw sx="100000" sy="100000" kx="0" ky="0" algn="bl" rotWithShape="0" blurRad="101600" dist="38100" dir="8100000">
+            <a:outerShdw blurRad="101600" dist="38100" dir="8100000" algn="bl" rotWithShape="0">
               <a:srgbClr val="000000">
                 <a:alpha val="12000"/>
               </a:srgbClr>
             </a:outerShdw>
           </a:effectLst>
         </p:spPr>
+        <p:txBody>
+          <a:bodyPr/>
+          <a:lstStyle/>
+          <a:p>
+            <a:endParaRPr lang="es-CO"/>
+          </a:p>
+        </p:txBody>
       </p:sp>
       <p:sp>
         <p:nvSpPr>
@@ -13586,6 +14122,13 @@
             <a:prstDash val="solid"/>
           </a:ln>
         </p:spPr>
+        <p:txBody>
+          <a:bodyPr/>
+          <a:lstStyle/>
+          <a:p>
+            <a:endParaRPr lang="es-CO"/>
+          </a:p>
+        </p:txBody>
       </p:sp>
       <p:sp>
         <p:nvSpPr>
@@ -13608,7 +14151,7 @@
           <a:bodyPr wrap="square" lIns="0" tIns="0" rIns="0" bIns="0" rtlCol="0" anchor="ctr"/>
           <a:lstStyle/>
           <a:p>
-            <a:pPr algn="ctr" indent="0" marL="0">
+            <a:pPr marL="0" indent="0" algn="ctr">
               <a:buNone/>
             </a:pPr>
             <a:r>
@@ -13647,7 +14190,7 @@
           <a:bodyPr wrap="square" rtlCol="0" anchor="ctr"/>
           <a:lstStyle/>
           <a:p>
-            <a:pPr algn="ctr" indent="0" marL="0">
+            <a:pPr marL="0" indent="0" algn="ctr">
               <a:buNone/>
             </a:pPr>
             <a:r>
@@ -13664,7 +14207,7 @@
             <a:endParaRPr lang="en-US" sz="900" dirty="0"/>
           </a:p>
           <a:p>
-            <a:pPr algn="ctr" indent="0" marL="0">
+            <a:pPr marL="0" indent="0" algn="ctr">
               <a:buNone/>
             </a:pPr>
             <a:r>
@@ -13704,6 +14247,13 @@
             <a:prstDash val="solid"/>
           </a:ln>
         </p:spPr>
+        <p:txBody>
+          <a:bodyPr/>
+          <a:lstStyle/>
+          <a:p>
+            <a:endParaRPr lang="es-CO"/>
+          </a:p>
+        </p:txBody>
       </p:sp>
       <p:sp>
         <p:nvSpPr>
@@ -13726,7 +14276,7 @@
           <a:bodyPr wrap="square" rtlCol="0" anchor="ctr"/>
           <a:lstStyle/>
           <a:p>
-            <a:pPr indent="0" marL="0">
+            <a:pPr marL="0" indent="0">
               <a:buNone/>
             </a:pPr>
             <a:r>
@@ -13765,7 +14315,7 @@
           <a:bodyPr wrap="square" rtlCol="0" anchor="ctr"/>
           <a:lstStyle/>
           <a:p>
-            <a:pPr indent="0" marL="0">
+            <a:pPr marL="0" indent="0">
               <a:buNone/>
             </a:pPr>
             <a:r>
@@ -13782,7 +14332,7 @@
             <a:endParaRPr lang="en-US" sz="800" dirty="0"/>
           </a:p>
           <a:p>
-            <a:pPr indent="0" marL="0">
+            <a:pPr marL="0" indent="0">
               <a:buNone/>
             </a:pPr>
             <a:r>
@@ -13799,7 +14349,7 @@
             <a:endParaRPr lang="en-US" sz="800" dirty="0"/>
           </a:p>
           <a:p>
-            <a:pPr indent="0" marL="0">
+            <a:pPr marL="0" indent="0">
               <a:buNone/>
             </a:pPr>
             <a:r>
@@ -13816,7 +14366,7 @@
             <a:endParaRPr lang="en-US" sz="800" dirty="0"/>
           </a:p>
           <a:p>
-            <a:pPr indent="0" marL="0">
+            <a:pPr marL="0" indent="0">
               <a:buNone/>
             </a:pPr>
             <a:r>
@@ -13856,6 +14406,13 @@
             <a:prstDash val="solid"/>
           </a:ln>
         </p:spPr>
+        <p:txBody>
+          <a:bodyPr/>
+          <a:lstStyle/>
+          <a:p>
+            <a:endParaRPr lang="es-CO"/>
+          </a:p>
+        </p:txBody>
       </p:sp>
       <p:sp>
         <p:nvSpPr>
@@ -13878,7 +14435,7 @@
           <a:bodyPr wrap="square" rtlCol="0" anchor="ctr"/>
           <a:lstStyle/>
           <a:p>
-            <a:pPr indent="0" marL="0">
+            <a:pPr marL="0" indent="0">
               <a:buNone/>
             </a:pPr>
             <a:r>
@@ -13895,7 +14452,7 @@
             <a:endParaRPr lang="en-US" sz="800" dirty="0"/>
           </a:p>
           <a:p>
-            <a:pPr indent="0" marL="0">
+            <a:pPr marL="0" indent="0">
               <a:buNone/>
             </a:pPr>
             <a:r>
@@ -13912,7 +14469,7 @@
             <a:endParaRPr lang="en-US" sz="800" dirty="0"/>
           </a:p>
           <a:p>
-            <a:pPr indent="0" marL="0">
+            <a:pPr marL="0" indent="0">
               <a:buNone/>
             </a:pPr>
             <a:r>
@@ -13954,13 +14511,20 @@
             <a:prstDash val="solid"/>
           </a:ln>
           <a:effectLst>
-            <a:outerShdw sx="100000" sy="100000" kx="0" ky="0" algn="bl" rotWithShape="0" blurRad="101600" dist="38100" dir="8100000">
+            <a:outerShdw blurRad="101600" dist="38100" dir="8100000" algn="bl" rotWithShape="0">
               <a:srgbClr val="000000">
                 <a:alpha val="12000"/>
               </a:srgbClr>
             </a:outerShdw>
           </a:effectLst>
         </p:spPr>
+        <p:txBody>
+          <a:bodyPr/>
+          <a:lstStyle/>
+          <a:p>
+            <a:endParaRPr lang="es-CO"/>
+          </a:p>
+        </p:txBody>
       </p:sp>
       <p:sp>
         <p:nvSpPr>
@@ -13986,6 +14550,13 @@
             <a:prstDash val="solid"/>
           </a:ln>
         </p:spPr>
+        <p:txBody>
+          <a:bodyPr/>
+          <a:lstStyle/>
+          <a:p>
+            <a:endParaRPr lang="es-CO"/>
+          </a:p>
+        </p:txBody>
       </p:sp>
       <p:sp>
         <p:nvSpPr>
@@ -14008,7 +14579,7 @@
           <a:bodyPr wrap="square" lIns="0" tIns="0" rIns="0" bIns="0" rtlCol="0" anchor="ctr"/>
           <a:lstStyle/>
           <a:p>
-            <a:pPr algn="ctr" indent="0" marL="0">
+            <a:pPr marL="0" indent="0" algn="ctr">
               <a:buNone/>
             </a:pPr>
             <a:r>
@@ -14047,7 +14618,7 @@
           <a:bodyPr wrap="square" rtlCol="0" anchor="ctr"/>
           <a:lstStyle/>
           <a:p>
-            <a:pPr algn="ctr" indent="0" marL="0">
+            <a:pPr marL="0" indent="0" algn="ctr">
               <a:buNone/>
             </a:pPr>
             <a:r>
@@ -14064,7 +14635,7 @@
             <a:endParaRPr lang="en-US" sz="900" dirty="0"/>
           </a:p>
           <a:p>
-            <a:pPr algn="ctr" indent="0" marL="0">
+            <a:pPr marL="0" indent="0" algn="ctr">
               <a:buNone/>
             </a:pPr>
             <a:r>
@@ -14104,6 +14675,13 @@
             <a:prstDash val="solid"/>
           </a:ln>
         </p:spPr>
+        <p:txBody>
+          <a:bodyPr/>
+          <a:lstStyle/>
+          <a:p>
+            <a:endParaRPr lang="es-CO"/>
+          </a:p>
+        </p:txBody>
       </p:sp>
       <p:sp>
         <p:nvSpPr>
@@ -14126,7 +14704,7 @@
           <a:bodyPr wrap="square" rtlCol="0" anchor="ctr"/>
           <a:lstStyle/>
           <a:p>
-            <a:pPr indent="0" marL="0">
+            <a:pPr marL="0" indent="0">
               <a:buNone/>
             </a:pPr>
             <a:r>
@@ -14165,7 +14743,7 @@
           <a:bodyPr wrap="square" rtlCol="0" anchor="ctr"/>
           <a:lstStyle/>
           <a:p>
-            <a:pPr indent="0" marL="0">
+            <a:pPr marL="0" indent="0">
               <a:buNone/>
             </a:pPr>
             <a:r>
@@ -14182,7 +14760,7 @@
             <a:endParaRPr lang="en-US" sz="800" dirty="0"/>
           </a:p>
           <a:p>
-            <a:pPr indent="0" marL="0">
+            <a:pPr marL="0" indent="0">
               <a:buNone/>
             </a:pPr>
             <a:r>
@@ -14199,7 +14777,7 @@
             <a:endParaRPr lang="en-US" sz="800" dirty="0"/>
           </a:p>
           <a:p>
-            <a:pPr indent="0" marL="0">
+            <a:pPr marL="0" indent="0">
               <a:buNone/>
             </a:pPr>
             <a:r>
@@ -14216,7 +14794,7 @@
             <a:endParaRPr lang="en-US" sz="800" dirty="0"/>
           </a:p>
           <a:p>
-            <a:pPr indent="0" marL="0">
+            <a:pPr marL="0" indent="0">
               <a:buNone/>
             </a:pPr>
             <a:r>
@@ -14256,6 +14834,13 @@
             <a:prstDash val="solid"/>
           </a:ln>
         </p:spPr>
+        <p:txBody>
+          <a:bodyPr/>
+          <a:lstStyle/>
+          <a:p>
+            <a:endParaRPr lang="es-CO"/>
+          </a:p>
+        </p:txBody>
       </p:sp>
       <p:sp>
         <p:nvSpPr>
@@ -14278,7 +14863,7 @@
           <a:bodyPr wrap="square" rtlCol="0" anchor="ctr"/>
           <a:lstStyle/>
           <a:p>
-            <a:pPr indent="0" marL="0">
+            <a:pPr marL="0" indent="0">
               <a:buNone/>
             </a:pPr>
             <a:r>
@@ -14295,7 +14880,7 @@
             <a:endParaRPr lang="en-US" sz="800" dirty="0"/>
           </a:p>
           <a:p>
-            <a:pPr indent="0" marL="0">
+            <a:pPr marL="0" indent="0">
               <a:buNone/>
             </a:pPr>
             <a:r>
@@ -14312,7 +14897,7 @@
             <a:endParaRPr lang="en-US" sz="800" dirty="0"/>
           </a:p>
           <a:p>
-            <a:pPr indent="0" marL="0">
+            <a:pPr marL="0" indent="0">
               <a:buNone/>
             </a:pPr>
             <a:r>
@@ -14346,6 +14931,7 @@
         <a:solidFill>
           <a:srgbClr val="FFFFFF"/>
         </a:solidFill>
+        <a:effectLst/>
       </p:bgPr>
     </p:bg>
     <p:spTree>
@@ -14386,6 +14972,13 @@
             <a:prstDash val="solid"/>
           </a:ln>
         </p:spPr>
+        <p:txBody>
+          <a:bodyPr/>
+          <a:lstStyle/>
+          <a:p>
+            <a:endParaRPr lang="es-CO"/>
+          </a:p>
+        </p:txBody>
       </p:sp>
       <p:sp>
         <p:nvSpPr>
@@ -14408,7 +15001,7 @@
           <a:bodyPr wrap="square" rtlCol="0" anchor="ctr"/>
           <a:lstStyle/>
           <a:p>
-            <a:pPr indent="0" marL="0">
+            <a:pPr marL="0" indent="0">
               <a:buNone/>
             </a:pPr>
             <a:r>
@@ -14442,18 +15035,48 @@
         </p:nvGraphicFramePr>
         <p:xfrm>
           <a:off x="274320" y="1051560"/>
-          <a:ext cx="8595360" cy="914400"/>
+          <a:ext cx="5943600" cy="396240"/>
         </p:xfrm>
         <a:graphic>
           <a:graphicData uri="http://schemas.openxmlformats.org/drawingml/2006/table">
             <a:tbl>
               <a:tblPr/>
               <a:tblGrid>
-                <a:gridCol w="1143000"/>
-                <a:gridCol w="889000"/>
-                <a:gridCol w="635000"/>
-                <a:gridCol w="889000"/>
-                <a:gridCol w="2387600"/>
+                <a:gridCol w="1143000">
+                  <a:extLst>
+                    <a:ext uri="{9D8B030D-6E8A-4147-A177-3AD203B41FA5}">
+                      <a16:colId xmlns:a16="http://schemas.microsoft.com/office/drawing/2014/main" val="20000"/>
+                    </a:ext>
+                  </a:extLst>
+                </a:gridCol>
+                <a:gridCol w="889000">
+                  <a:extLst>
+                    <a:ext uri="{9D8B030D-6E8A-4147-A177-3AD203B41FA5}">
+                      <a16:colId xmlns:a16="http://schemas.microsoft.com/office/drawing/2014/main" val="20001"/>
+                    </a:ext>
+                  </a:extLst>
+                </a:gridCol>
+                <a:gridCol w="635000">
+                  <a:extLst>
+                    <a:ext uri="{9D8B030D-6E8A-4147-A177-3AD203B41FA5}">
+                      <a16:colId xmlns:a16="http://schemas.microsoft.com/office/drawing/2014/main" val="20002"/>
+                    </a:ext>
+                  </a:extLst>
+                </a:gridCol>
+                <a:gridCol w="889000">
+                  <a:extLst>
+                    <a:ext uri="{9D8B030D-6E8A-4147-A177-3AD203B41FA5}">
+                      <a16:colId xmlns:a16="http://schemas.microsoft.com/office/drawing/2014/main" val="20003"/>
+                    </a:ext>
+                  </a:extLst>
+                </a:gridCol>
+                <a:gridCol w="2387600">
+                  <a:extLst>
+                    <a:ext uri="{9D8B030D-6E8A-4147-A177-3AD203B41FA5}">
+                      <a16:colId xmlns:a16="http://schemas.microsoft.com/office/drawing/2014/main" val="20004"/>
+                    </a:ext>
+                  </a:extLst>
+                </a:gridCol>
               </a:tblGrid>
               <a:tr h="0">
                 <a:tc>
@@ -14461,7 +15084,7 @@
                     <a:bodyPr/>
                     <a:lstStyle/>
                     <a:p>
-                      <a:pPr algn="ctr" indent="0" marL="0">
+                      <a:pPr marL="0" indent="0" algn="ctr">
                         <a:buNone/>
                       </a:pPr>
                       <a:r>
@@ -14482,7 +15105,7 @@
                       </a:endParaRPr>
                     </a:p>
                   </a:txBody>
-                  <a:tcPr marL="91440" marR="91440" marT="45720" marB="45720" anchor="ctr">
+                  <a:tcPr anchor="ctr">
                     <a:lnL w="6350" cap="flat" cmpd="sng" algn="ctr">
                       <a:solidFill>
                         <a:srgbClr val="FFFFFF"/>
@@ -14529,7 +15152,7 @@
                     <a:bodyPr/>
                     <a:lstStyle/>
                     <a:p>
-                      <a:pPr algn="ctr" indent="0" marL="0">
+                      <a:pPr marL="0" indent="0" algn="ctr">
                         <a:buNone/>
                       </a:pPr>
                       <a:r>
@@ -14550,7 +15173,7 @@
                       </a:endParaRPr>
                     </a:p>
                   </a:txBody>
-                  <a:tcPr marL="91440" marR="91440" marT="45720" marB="45720" anchor="ctr">
+                  <a:tcPr anchor="ctr">
                     <a:lnL w="6350" cap="flat" cmpd="sng" algn="ctr">
                       <a:solidFill>
                         <a:srgbClr val="FFFFFF"/>
@@ -14597,7 +15220,7 @@
                     <a:bodyPr/>
                     <a:lstStyle/>
                     <a:p>
-                      <a:pPr algn="ctr" indent="0" marL="0">
+                      <a:pPr marL="0" indent="0" algn="ctr">
                         <a:buNone/>
                       </a:pPr>
                       <a:r>
@@ -14618,7 +15241,7 @@
                       </a:endParaRPr>
                     </a:p>
                   </a:txBody>
-                  <a:tcPr marL="91440" marR="91440" marT="45720" marB="45720" anchor="ctr">
+                  <a:tcPr anchor="ctr">
                     <a:lnL w="6350" cap="flat" cmpd="sng" algn="ctr">
                       <a:solidFill>
                         <a:srgbClr val="FFFFFF"/>
@@ -14665,7 +15288,7 @@
                     <a:bodyPr/>
                     <a:lstStyle/>
                     <a:p>
-                      <a:pPr algn="ctr" indent="0" marL="0">
+                      <a:pPr marL="0" indent="0" algn="ctr">
                         <a:buNone/>
                       </a:pPr>
                       <a:r>
@@ -14686,7 +15309,7 @@
                       </a:endParaRPr>
                     </a:p>
                   </a:txBody>
-                  <a:tcPr marL="91440" marR="91440" marT="45720" marB="45720" anchor="ctr">
+                  <a:tcPr anchor="ctr">
                     <a:lnL w="6350" cap="flat" cmpd="sng" algn="ctr">
                       <a:solidFill>
                         <a:srgbClr val="FFFFFF"/>
@@ -14733,7 +15356,7 @@
                     <a:bodyPr/>
                     <a:lstStyle/>
                     <a:p>
-                      <a:pPr algn="ctr" indent="0" marL="0">
+                      <a:pPr marL="0" indent="0" algn="ctr">
                         <a:buNone/>
                       </a:pPr>
                       <a:r>
@@ -14754,7 +15377,7 @@
                       </a:endParaRPr>
                     </a:p>
                   </a:txBody>
-                  <a:tcPr marL="91440" marR="91440" marT="45720" marB="45720" anchor="ctr">
+                  <a:tcPr anchor="ctr">
                     <a:lnL w="6350" cap="flat" cmpd="sng" algn="ctr">
                       <a:solidFill>
                         <a:srgbClr val="FFFFFF"/>
@@ -14796,6 +15419,11 @@
                     </a:solidFill>
                   </a:tcPr>
                 </a:tc>
+                <a:extLst>
+                  <a:ext uri="{0D108BD9-81ED-4DB2-BD59-A6C34878D82A}">
+                    <a16:rowId xmlns:a16="http://schemas.microsoft.com/office/drawing/2014/main" val="10000"/>
+                  </a:ext>
+                </a:extLst>
               </a:tr>
             </a:tbl>
           </a:graphicData>
@@ -14817,18 +15445,48 @@
         </p:nvGraphicFramePr>
         <p:xfrm>
           <a:off x="274320" y="1417320"/>
-          <a:ext cx="8595360" cy="914400"/>
+          <a:ext cx="5943600" cy="228600"/>
         </p:xfrm>
         <a:graphic>
           <a:graphicData uri="http://schemas.openxmlformats.org/drawingml/2006/table">
             <a:tbl>
               <a:tblPr/>
               <a:tblGrid>
-                <a:gridCol w="1143000"/>
-                <a:gridCol w="889000"/>
-                <a:gridCol w="635000"/>
-                <a:gridCol w="889000"/>
-                <a:gridCol w="2387600"/>
+                <a:gridCol w="1143000">
+                  <a:extLst>
+                    <a:ext uri="{9D8B030D-6E8A-4147-A177-3AD203B41FA5}">
+                      <a16:colId xmlns:a16="http://schemas.microsoft.com/office/drawing/2014/main" val="20000"/>
+                    </a:ext>
+                  </a:extLst>
+                </a:gridCol>
+                <a:gridCol w="889000">
+                  <a:extLst>
+                    <a:ext uri="{9D8B030D-6E8A-4147-A177-3AD203B41FA5}">
+                      <a16:colId xmlns:a16="http://schemas.microsoft.com/office/drawing/2014/main" val="20001"/>
+                    </a:ext>
+                  </a:extLst>
+                </a:gridCol>
+                <a:gridCol w="635000">
+                  <a:extLst>
+                    <a:ext uri="{9D8B030D-6E8A-4147-A177-3AD203B41FA5}">
+                      <a16:colId xmlns:a16="http://schemas.microsoft.com/office/drawing/2014/main" val="20002"/>
+                    </a:ext>
+                  </a:extLst>
+                </a:gridCol>
+                <a:gridCol w="889000">
+                  <a:extLst>
+                    <a:ext uri="{9D8B030D-6E8A-4147-A177-3AD203B41FA5}">
+                      <a16:colId xmlns:a16="http://schemas.microsoft.com/office/drawing/2014/main" val="20003"/>
+                    </a:ext>
+                  </a:extLst>
+                </a:gridCol>
+                <a:gridCol w="2387600">
+                  <a:extLst>
+                    <a:ext uri="{9D8B030D-6E8A-4147-A177-3AD203B41FA5}">
+                      <a16:colId xmlns:a16="http://schemas.microsoft.com/office/drawing/2014/main" val="20004"/>
+                    </a:ext>
+                  </a:extLst>
+                </a:gridCol>
               </a:tblGrid>
               <a:tr h="0">
                 <a:tc>
@@ -14836,7 +15494,7 @@
                     <a:bodyPr/>
                     <a:lstStyle/>
                     <a:p>
-                      <a:pPr algn="ctr" indent="0" marL="0">
+                      <a:pPr marL="0" indent="0" algn="ctr">
                         <a:buNone/>
                       </a:pPr>
                       <a:r>
@@ -14857,7 +15515,7 @@
                       </a:endParaRPr>
                     </a:p>
                   </a:txBody>
-                  <a:tcPr marL="91440" marR="91440" marT="45720" marB="45720" anchor="ctr">
+                  <a:tcPr anchor="ctr">
                     <a:lnL w="6350" cap="flat" cmpd="sng" algn="ctr">
                       <a:solidFill>
                         <a:srgbClr val="CCCCCC"/>
@@ -14904,7 +15562,7 @@
                     <a:bodyPr/>
                     <a:lstStyle/>
                     <a:p>
-                      <a:pPr algn="ctr" indent="0" marL="0">
+                      <a:pPr marL="0" indent="0" algn="ctr">
                         <a:buNone/>
                       </a:pPr>
                       <a:r>
@@ -14925,7 +15583,7 @@
                       </a:endParaRPr>
                     </a:p>
                   </a:txBody>
-                  <a:tcPr marL="91440" marR="91440" marT="45720" marB="45720" anchor="ctr">
+                  <a:tcPr anchor="ctr">
                     <a:lnL w="6350" cap="flat" cmpd="sng" algn="ctr">
                       <a:solidFill>
                         <a:srgbClr val="CCCCCC"/>
@@ -14972,7 +15630,7 @@
                     <a:bodyPr/>
                     <a:lstStyle/>
                     <a:p>
-                      <a:pPr algn="ctr" indent="0" marL="0">
+                      <a:pPr marL="0" indent="0" algn="ctr">
                         <a:buNone/>
                       </a:pPr>
                       <a:r>
@@ -14993,7 +15651,7 @@
                       </a:endParaRPr>
                     </a:p>
                   </a:txBody>
-                  <a:tcPr marL="91440" marR="91440" marT="45720" marB="45720" anchor="ctr">
+                  <a:tcPr anchor="ctr">
                     <a:lnL w="6350" cap="flat" cmpd="sng" algn="ctr">
                       <a:solidFill>
                         <a:srgbClr val="CCCCCC"/>
@@ -15040,7 +15698,7 @@
                     <a:bodyPr/>
                     <a:lstStyle/>
                     <a:p>
-                      <a:pPr algn="ctr" indent="0" marL="0">
+                      <a:pPr marL="0" indent="0" algn="ctr">
                         <a:buNone/>
                       </a:pPr>
                       <a:r>
@@ -15061,7 +15719,7 @@
                       </a:endParaRPr>
                     </a:p>
                   </a:txBody>
-                  <a:tcPr marL="91440" marR="91440" marT="45720" marB="45720" anchor="ctr">
+                  <a:tcPr anchor="ctr">
                     <a:lnL w="6350" cap="flat" cmpd="sng" algn="ctr">
                       <a:solidFill>
                         <a:srgbClr val="CCCCCC"/>
@@ -15108,7 +15766,7 @@
                     <a:bodyPr/>
                     <a:lstStyle/>
                     <a:p>
-                      <a:pPr algn="ctr" indent="0" marL="0">
+                      <a:pPr marL="0" indent="0" algn="ctr">
                         <a:buNone/>
                       </a:pPr>
                       <a:r>
@@ -15129,7 +15787,7 @@
                       </a:endParaRPr>
                     </a:p>
                   </a:txBody>
-                  <a:tcPr marL="91440" marR="91440" marT="45720" marB="45720" anchor="ctr">
+                  <a:tcPr anchor="ctr">
                     <a:lnL w="6350" cap="flat" cmpd="sng" algn="ctr">
                       <a:solidFill>
                         <a:srgbClr val="CCCCCC"/>
@@ -15171,6 +15829,11 @@
                     </a:solidFill>
                   </a:tcPr>
                 </a:tc>
+                <a:extLst>
+                  <a:ext uri="{0D108BD9-81ED-4DB2-BD59-A6C34878D82A}">
+                    <a16:rowId xmlns:a16="http://schemas.microsoft.com/office/drawing/2014/main" val="10000"/>
+                  </a:ext>
+                </a:extLst>
               </a:tr>
             </a:tbl>
           </a:graphicData>
@@ -15192,18 +15855,48 @@
         </p:nvGraphicFramePr>
         <p:xfrm>
           <a:off x="274320" y="1856232"/>
-          <a:ext cx="8595360" cy="914400"/>
+          <a:ext cx="5943600" cy="228600"/>
         </p:xfrm>
         <a:graphic>
           <a:graphicData uri="http://schemas.openxmlformats.org/drawingml/2006/table">
             <a:tbl>
               <a:tblPr/>
               <a:tblGrid>
-                <a:gridCol w="1143000"/>
-                <a:gridCol w="889000"/>
-                <a:gridCol w="635000"/>
-                <a:gridCol w="889000"/>
-                <a:gridCol w="2387600"/>
+                <a:gridCol w="1143000">
+                  <a:extLst>
+                    <a:ext uri="{9D8B030D-6E8A-4147-A177-3AD203B41FA5}">
+                      <a16:colId xmlns:a16="http://schemas.microsoft.com/office/drawing/2014/main" val="20000"/>
+                    </a:ext>
+                  </a:extLst>
+                </a:gridCol>
+                <a:gridCol w="889000">
+                  <a:extLst>
+                    <a:ext uri="{9D8B030D-6E8A-4147-A177-3AD203B41FA5}">
+                      <a16:colId xmlns:a16="http://schemas.microsoft.com/office/drawing/2014/main" val="20001"/>
+                    </a:ext>
+                  </a:extLst>
+                </a:gridCol>
+                <a:gridCol w="635000">
+                  <a:extLst>
+                    <a:ext uri="{9D8B030D-6E8A-4147-A177-3AD203B41FA5}">
+                      <a16:colId xmlns:a16="http://schemas.microsoft.com/office/drawing/2014/main" val="20002"/>
+                    </a:ext>
+                  </a:extLst>
+                </a:gridCol>
+                <a:gridCol w="889000">
+                  <a:extLst>
+                    <a:ext uri="{9D8B030D-6E8A-4147-A177-3AD203B41FA5}">
+                      <a16:colId xmlns:a16="http://schemas.microsoft.com/office/drawing/2014/main" val="20003"/>
+                    </a:ext>
+                  </a:extLst>
+                </a:gridCol>
+                <a:gridCol w="2387600">
+                  <a:extLst>
+                    <a:ext uri="{9D8B030D-6E8A-4147-A177-3AD203B41FA5}">
+                      <a16:colId xmlns:a16="http://schemas.microsoft.com/office/drawing/2014/main" val="20004"/>
+                    </a:ext>
+                  </a:extLst>
+                </a:gridCol>
               </a:tblGrid>
               <a:tr h="0">
                 <a:tc>
@@ -15211,7 +15904,7 @@
                     <a:bodyPr/>
                     <a:lstStyle/>
                     <a:p>
-                      <a:pPr algn="ctr" indent="0" marL="0">
+                      <a:pPr marL="0" indent="0" algn="ctr">
                         <a:buNone/>
                       </a:pPr>
                       <a:r>
@@ -15232,7 +15925,7 @@
                       </a:endParaRPr>
                     </a:p>
                   </a:txBody>
-                  <a:tcPr marL="91440" marR="91440" marT="45720" marB="45720" anchor="ctr">
+                  <a:tcPr anchor="ctr">
                     <a:lnL w="6350" cap="flat" cmpd="sng" algn="ctr">
                       <a:solidFill>
                         <a:srgbClr val="CCCCCC"/>
@@ -15279,7 +15972,7 @@
                     <a:bodyPr/>
                     <a:lstStyle/>
                     <a:p>
-                      <a:pPr algn="ctr" indent="0" marL="0">
+                      <a:pPr marL="0" indent="0" algn="ctr">
                         <a:buNone/>
                       </a:pPr>
                       <a:r>
@@ -15300,7 +15993,7 @@
                       </a:endParaRPr>
                     </a:p>
                   </a:txBody>
-                  <a:tcPr marL="91440" marR="91440" marT="45720" marB="45720" anchor="ctr">
+                  <a:tcPr anchor="ctr">
                     <a:lnL w="6350" cap="flat" cmpd="sng" algn="ctr">
                       <a:solidFill>
                         <a:srgbClr val="CCCCCC"/>
@@ -15347,7 +16040,7 @@
                     <a:bodyPr/>
                     <a:lstStyle/>
                     <a:p>
-                      <a:pPr algn="ctr" indent="0" marL="0">
+                      <a:pPr marL="0" indent="0" algn="ctr">
                         <a:buNone/>
                       </a:pPr>
                       <a:r>
@@ -15368,7 +16061,7 @@
                       </a:endParaRPr>
                     </a:p>
                   </a:txBody>
-                  <a:tcPr marL="91440" marR="91440" marT="45720" marB="45720" anchor="ctr">
+                  <a:tcPr anchor="ctr">
                     <a:lnL w="6350" cap="flat" cmpd="sng" algn="ctr">
                       <a:solidFill>
                         <a:srgbClr val="CCCCCC"/>
@@ -15415,7 +16108,7 @@
                     <a:bodyPr/>
                     <a:lstStyle/>
                     <a:p>
-                      <a:pPr algn="ctr" indent="0" marL="0">
+                      <a:pPr marL="0" indent="0" algn="ctr">
                         <a:buNone/>
                       </a:pPr>
                       <a:r>
@@ -15436,7 +16129,7 @@
                       </a:endParaRPr>
                     </a:p>
                   </a:txBody>
-                  <a:tcPr marL="91440" marR="91440" marT="45720" marB="45720" anchor="ctr">
+                  <a:tcPr anchor="ctr">
                     <a:lnL w="6350" cap="flat" cmpd="sng" algn="ctr">
                       <a:solidFill>
                         <a:srgbClr val="CCCCCC"/>
@@ -15483,7 +16176,7 @@
                     <a:bodyPr/>
                     <a:lstStyle/>
                     <a:p>
-                      <a:pPr algn="ctr" indent="0" marL="0">
+                      <a:pPr marL="0" indent="0" algn="ctr">
                         <a:buNone/>
                       </a:pPr>
                       <a:r>
@@ -15504,7 +16197,7 @@
                       </a:endParaRPr>
                     </a:p>
                   </a:txBody>
-                  <a:tcPr marL="91440" marR="91440" marT="45720" marB="45720" anchor="ctr">
+                  <a:tcPr anchor="ctr">
                     <a:lnL w="6350" cap="flat" cmpd="sng" algn="ctr">
                       <a:solidFill>
                         <a:srgbClr val="CCCCCC"/>
@@ -15546,6 +16239,11 @@
                     </a:solidFill>
                   </a:tcPr>
                 </a:tc>
+                <a:extLst>
+                  <a:ext uri="{0D108BD9-81ED-4DB2-BD59-A6C34878D82A}">
+                    <a16:rowId xmlns:a16="http://schemas.microsoft.com/office/drawing/2014/main" val="10000"/>
+                  </a:ext>
+                </a:extLst>
               </a:tr>
             </a:tbl>
           </a:graphicData>
@@ -15567,18 +16265,48 @@
         </p:nvGraphicFramePr>
         <p:xfrm>
           <a:off x="274320" y="2295144"/>
-          <a:ext cx="8595360" cy="914400"/>
+          <a:ext cx="5943600" cy="365760"/>
         </p:xfrm>
         <a:graphic>
           <a:graphicData uri="http://schemas.openxmlformats.org/drawingml/2006/table">
             <a:tbl>
               <a:tblPr/>
               <a:tblGrid>
-                <a:gridCol w="1143000"/>
-                <a:gridCol w="889000"/>
-                <a:gridCol w="635000"/>
-                <a:gridCol w="889000"/>
-                <a:gridCol w="2387600"/>
+                <a:gridCol w="1143000">
+                  <a:extLst>
+                    <a:ext uri="{9D8B030D-6E8A-4147-A177-3AD203B41FA5}">
+                      <a16:colId xmlns:a16="http://schemas.microsoft.com/office/drawing/2014/main" val="20000"/>
+                    </a:ext>
+                  </a:extLst>
+                </a:gridCol>
+                <a:gridCol w="889000">
+                  <a:extLst>
+                    <a:ext uri="{9D8B030D-6E8A-4147-A177-3AD203B41FA5}">
+                      <a16:colId xmlns:a16="http://schemas.microsoft.com/office/drawing/2014/main" val="20001"/>
+                    </a:ext>
+                  </a:extLst>
+                </a:gridCol>
+                <a:gridCol w="635000">
+                  <a:extLst>
+                    <a:ext uri="{9D8B030D-6E8A-4147-A177-3AD203B41FA5}">
+                      <a16:colId xmlns:a16="http://schemas.microsoft.com/office/drawing/2014/main" val="20002"/>
+                    </a:ext>
+                  </a:extLst>
+                </a:gridCol>
+                <a:gridCol w="889000">
+                  <a:extLst>
+                    <a:ext uri="{9D8B030D-6E8A-4147-A177-3AD203B41FA5}">
+                      <a16:colId xmlns:a16="http://schemas.microsoft.com/office/drawing/2014/main" val="20003"/>
+                    </a:ext>
+                  </a:extLst>
+                </a:gridCol>
+                <a:gridCol w="2387600">
+                  <a:extLst>
+                    <a:ext uri="{9D8B030D-6E8A-4147-A177-3AD203B41FA5}">
+                      <a16:colId xmlns:a16="http://schemas.microsoft.com/office/drawing/2014/main" val="20004"/>
+                    </a:ext>
+                  </a:extLst>
+                </a:gridCol>
               </a:tblGrid>
               <a:tr h="0">
                 <a:tc>
@@ -15586,7 +16314,7 @@
                     <a:bodyPr/>
                     <a:lstStyle/>
                     <a:p>
-                      <a:pPr algn="ctr" indent="0" marL="0">
+                      <a:pPr marL="0" indent="0" algn="ctr">
                         <a:buNone/>
                       </a:pPr>
                       <a:r>
@@ -15607,7 +16335,7 @@
                       </a:endParaRPr>
                     </a:p>
                   </a:txBody>
-                  <a:tcPr marL="91440" marR="91440" marT="45720" marB="45720" anchor="ctr">
+                  <a:tcPr anchor="ctr">
                     <a:lnL w="6350" cap="flat" cmpd="sng" algn="ctr">
                       <a:solidFill>
                         <a:srgbClr val="CCCCCC"/>
@@ -15654,7 +16382,7 @@
                     <a:bodyPr/>
                     <a:lstStyle/>
                     <a:p>
-                      <a:pPr algn="ctr" indent="0" marL="0">
+                      <a:pPr marL="0" indent="0" algn="ctr">
                         <a:buNone/>
                       </a:pPr>
                       <a:r>
@@ -15675,7 +16403,7 @@
                       </a:endParaRPr>
                     </a:p>
                   </a:txBody>
-                  <a:tcPr marL="91440" marR="91440" marT="45720" marB="45720" anchor="ctr">
+                  <a:tcPr anchor="ctr">
                     <a:lnL w="6350" cap="flat" cmpd="sng" algn="ctr">
                       <a:solidFill>
                         <a:srgbClr val="CCCCCC"/>
@@ -15722,7 +16450,7 @@
                     <a:bodyPr/>
                     <a:lstStyle/>
                     <a:p>
-                      <a:pPr algn="ctr" indent="0" marL="0">
+                      <a:pPr marL="0" indent="0" algn="ctr">
                         <a:buNone/>
                       </a:pPr>
                       <a:r>
@@ -15743,7 +16471,7 @@
                       </a:endParaRPr>
                     </a:p>
                   </a:txBody>
-                  <a:tcPr marL="91440" marR="91440" marT="45720" marB="45720" anchor="ctr">
+                  <a:tcPr anchor="ctr">
                     <a:lnL w="6350" cap="flat" cmpd="sng" algn="ctr">
                       <a:solidFill>
                         <a:srgbClr val="CCCCCC"/>
@@ -15790,7 +16518,7 @@
                     <a:bodyPr/>
                     <a:lstStyle/>
                     <a:p>
-                      <a:pPr algn="ctr" indent="0" marL="0">
+                      <a:pPr marL="0" indent="0" algn="ctr">
                         <a:buNone/>
                       </a:pPr>
                       <a:r>
@@ -15811,7 +16539,7 @@
                       </a:endParaRPr>
                     </a:p>
                   </a:txBody>
-                  <a:tcPr marL="91440" marR="91440" marT="45720" marB="45720" anchor="ctr">
+                  <a:tcPr anchor="ctr">
                     <a:lnL w="6350" cap="flat" cmpd="sng" algn="ctr">
                       <a:solidFill>
                         <a:srgbClr val="CCCCCC"/>
@@ -15858,7 +16586,7 @@
                     <a:bodyPr/>
                     <a:lstStyle/>
                     <a:p>
-                      <a:pPr algn="ctr" indent="0" marL="0">
+                      <a:pPr marL="0" indent="0" algn="ctr">
                         <a:buNone/>
                       </a:pPr>
                       <a:r>
@@ -15879,7 +16607,7 @@
                       </a:endParaRPr>
                     </a:p>
                   </a:txBody>
-                  <a:tcPr marL="91440" marR="91440" marT="45720" marB="45720" anchor="ctr">
+                  <a:tcPr anchor="ctr">
                     <a:lnL w="6350" cap="flat" cmpd="sng" algn="ctr">
                       <a:solidFill>
                         <a:srgbClr val="CCCCCC"/>
@@ -15921,6 +16649,11 @@
                     </a:solidFill>
                   </a:tcPr>
                 </a:tc>
+                <a:extLst>
+                  <a:ext uri="{0D108BD9-81ED-4DB2-BD59-A6C34878D82A}">
+                    <a16:rowId xmlns:a16="http://schemas.microsoft.com/office/drawing/2014/main" val="10000"/>
+                  </a:ext>
+                </a:extLst>
               </a:tr>
             </a:tbl>
           </a:graphicData>
@@ -15942,18 +16675,48 @@
         </p:nvGraphicFramePr>
         <p:xfrm>
           <a:off x="274320" y="2734056"/>
-          <a:ext cx="8595360" cy="914400"/>
+          <a:ext cx="5943600" cy="365760"/>
         </p:xfrm>
         <a:graphic>
           <a:graphicData uri="http://schemas.openxmlformats.org/drawingml/2006/table">
             <a:tbl>
               <a:tblPr/>
               <a:tblGrid>
-                <a:gridCol w="1143000"/>
-                <a:gridCol w="889000"/>
-                <a:gridCol w="635000"/>
-                <a:gridCol w="889000"/>
-                <a:gridCol w="2387600"/>
+                <a:gridCol w="1143000">
+                  <a:extLst>
+                    <a:ext uri="{9D8B030D-6E8A-4147-A177-3AD203B41FA5}">
+                      <a16:colId xmlns:a16="http://schemas.microsoft.com/office/drawing/2014/main" val="20000"/>
+                    </a:ext>
+                  </a:extLst>
+                </a:gridCol>
+                <a:gridCol w="889000">
+                  <a:extLst>
+                    <a:ext uri="{9D8B030D-6E8A-4147-A177-3AD203B41FA5}">
+                      <a16:colId xmlns:a16="http://schemas.microsoft.com/office/drawing/2014/main" val="20001"/>
+                    </a:ext>
+                  </a:extLst>
+                </a:gridCol>
+                <a:gridCol w="635000">
+                  <a:extLst>
+                    <a:ext uri="{9D8B030D-6E8A-4147-A177-3AD203B41FA5}">
+                      <a16:colId xmlns:a16="http://schemas.microsoft.com/office/drawing/2014/main" val="20002"/>
+                    </a:ext>
+                  </a:extLst>
+                </a:gridCol>
+                <a:gridCol w="889000">
+                  <a:extLst>
+                    <a:ext uri="{9D8B030D-6E8A-4147-A177-3AD203B41FA5}">
+                      <a16:colId xmlns:a16="http://schemas.microsoft.com/office/drawing/2014/main" val="20003"/>
+                    </a:ext>
+                  </a:extLst>
+                </a:gridCol>
+                <a:gridCol w="2387600">
+                  <a:extLst>
+                    <a:ext uri="{9D8B030D-6E8A-4147-A177-3AD203B41FA5}">
+                      <a16:colId xmlns:a16="http://schemas.microsoft.com/office/drawing/2014/main" val="20004"/>
+                    </a:ext>
+                  </a:extLst>
+                </a:gridCol>
               </a:tblGrid>
               <a:tr h="0">
                 <a:tc>
@@ -15961,7 +16724,7 @@
                     <a:bodyPr/>
                     <a:lstStyle/>
                     <a:p>
-                      <a:pPr algn="ctr" indent="0" marL="0">
+                      <a:pPr marL="0" indent="0" algn="ctr">
                         <a:buNone/>
                       </a:pPr>
                       <a:r>
@@ -15982,7 +16745,7 @@
                       </a:endParaRPr>
                     </a:p>
                   </a:txBody>
-                  <a:tcPr marL="91440" marR="91440" marT="45720" marB="45720" anchor="ctr">
+                  <a:tcPr anchor="ctr">
                     <a:lnL w="6350" cap="flat" cmpd="sng" algn="ctr">
                       <a:solidFill>
                         <a:srgbClr val="CCCCCC"/>
@@ -16029,7 +16792,7 @@
                     <a:bodyPr/>
                     <a:lstStyle/>
                     <a:p>
-                      <a:pPr algn="ctr" indent="0" marL="0">
+                      <a:pPr marL="0" indent="0" algn="ctr">
                         <a:buNone/>
                       </a:pPr>
                       <a:r>
@@ -16050,7 +16813,7 @@
                       </a:endParaRPr>
                     </a:p>
                   </a:txBody>
-                  <a:tcPr marL="91440" marR="91440" marT="45720" marB="45720" anchor="ctr">
+                  <a:tcPr anchor="ctr">
                     <a:lnL w="6350" cap="flat" cmpd="sng" algn="ctr">
                       <a:solidFill>
                         <a:srgbClr val="CCCCCC"/>
@@ -16097,7 +16860,7 @@
                     <a:bodyPr/>
                     <a:lstStyle/>
                     <a:p>
-                      <a:pPr algn="ctr" indent="0" marL="0">
+                      <a:pPr marL="0" indent="0" algn="ctr">
                         <a:buNone/>
                       </a:pPr>
                       <a:r>
@@ -16118,7 +16881,7 @@
                       </a:endParaRPr>
                     </a:p>
                   </a:txBody>
-                  <a:tcPr marL="91440" marR="91440" marT="45720" marB="45720" anchor="ctr">
+                  <a:tcPr anchor="ctr">
                     <a:lnL w="6350" cap="flat" cmpd="sng" algn="ctr">
                       <a:solidFill>
                         <a:srgbClr val="CCCCCC"/>
@@ -16165,7 +16928,7 @@
                     <a:bodyPr/>
                     <a:lstStyle/>
                     <a:p>
-                      <a:pPr algn="ctr" indent="0" marL="0">
+                      <a:pPr marL="0" indent="0" algn="ctr">
                         <a:buNone/>
                       </a:pPr>
                       <a:r>
@@ -16186,7 +16949,7 @@
                       </a:endParaRPr>
                     </a:p>
                   </a:txBody>
-                  <a:tcPr marL="91440" marR="91440" marT="45720" marB="45720" anchor="ctr">
+                  <a:tcPr anchor="ctr">
                     <a:lnL w="6350" cap="flat" cmpd="sng" algn="ctr">
                       <a:solidFill>
                         <a:srgbClr val="CCCCCC"/>
@@ -16233,7 +16996,7 @@
                     <a:bodyPr/>
                     <a:lstStyle/>
                     <a:p>
-                      <a:pPr algn="ctr" indent="0" marL="0">
+                      <a:pPr marL="0" indent="0" algn="ctr">
                         <a:buNone/>
                       </a:pPr>
                       <a:r>
@@ -16254,7 +17017,7 @@
                       </a:endParaRPr>
                     </a:p>
                   </a:txBody>
-                  <a:tcPr marL="91440" marR="91440" marT="45720" marB="45720" anchor="ctr">
+                  <a:tcPr anchor="ctr">
                     <a:lnL w="6350" cap="flat" cmpd="sng" algn="ctr">
                       <a:solidFill>
                         <a:srgbClr val="CCCCCC"/>
@@ -16296,6 +17059,11 @@
                     </a:solidFill>
                   </a:tcPr>
                 </a:tc>
+                <a:extLst>
+                  <a:ext uri="{0D108BD9-81ED-4DB2-BD59-A6C34878D82A}">
+                    <a16:rowId xmlns:a16="http://schemas.microsoft.com/office/drawing/2014/main" val="10000"/>
+                  </a:ext>
+                </a:extLst>
               </a:tr>
             </a:tbl>
           </a:graphicData>
@@ -16317,18 +17085,48 @@
         </p:nvGraphicFramePr>
         <p:xfrm>
           <a:off x="274320" y="3172968"/>
-          <a:ext cx="8595360" cy="914400"/>
+          <a:ext cx="5943600" cy="228600"/>
         </p:xfrm>
         <a:graphic>
           <a:graphicData uri="http://schemas.openxmlformats.org/drawingml/2006/table">
             <a:tbl>
               <a:tblPr/>
               <a:tblGrid>
-                <a:gridCol w="1143000"/>
-                <a:gridCol w="889000"/>
-                <a:gridCol w="635000"/>
-                <a:gridCol w="889000"/>
-                <a:gridCol w="2387600"/>
+                <a:gridCol w="1143000">
+                  <a:extLst>
+                    <a:ext uri="{9D8B030D-6E8A-4147-A177-3AD203B41FA5}">
+                      <a16:colId xmlns:a16="http://schemas.microsoft.com/office/drawing/2014/main" val="20000"/>
+                    </a:ext>
+                  </a:extLst>
+                </a:gridCol>
+                <a:gridCol w="889000">
+                  <a:extLst>
+                    <a:ext uri="{9D8B030D-6E8A-4147-A177-3AD203B41FA5}">
+                      <a16:colId xmlns:a16="http://schemas.microsoft.com/office/drawing/2014/main" val="20001"/>
+                    </a:ext>
+                  </a:extLst>
+                </a:gridCol>
+                <a:gridCol w="635000">
+                  <a:extLst>
+                    <a:ext uri="{9D8B030D-6E8A-4147-A177-3AD203B41FA5}">
+                      <a16:colId xmlns:a16="http://schemas.microsoft.com/office/drawing/2014/main" val="20002"/>
+                    </a:ext>
+                  </a:extLst>
+                </a:gridCol>
+                <a:gridCol w="889000">
+                  <a:extLst>
+                    <a:ext uri="{9D8B030D-6E8A-4147-A177-3AD203B41FA5}">
+                      <a16:colId xmlns:a16="http://schemas.microsoft.com/office/drawing/2014/main" val="20003"/>
+                    </a:ext>
+                  </a:extLst>
+                </a:gridCol>
+                <a:gridCol w="2387600">
+                  <a:extLst>
+                    <a:ext uri="{9D8B030D-6E8A-4147-A177-3AD203B41FA5}">
+                      <a16:colId xmlns:a16="http://schemas.microsoft.com/office/drawing/2014/main" val="20004"/>
+                    </a:ext>
+                  </a:extLst>
+                </a:gridCol>
               </a:tblGrid>
               <a:tr h="0">
                 <a:tc>
@@ -16336,7 +17134,7 @@
                     <a:bodyPr/>
                     <a:lstStyle/>
                     <a:p>
-                      <a:pPr algn="ctr" indent="0" marL="0">
+                      <a:pPr marL="0" indent="0" algn="ctr">
                         <a:buNone/>
                       </a:pPr>
                       <a:r>
@@ -16357,7 +17155,7 @@
                       </a:endParaRPr>
                     </a:p>
                   </a:txBody>
-                  <a:tcPr marL="91440" marR="91440" marT="45720" marB="45720" anchor="ctr">
+                  <a:tcPr anchor="ctr">
                     <a:lnL w="6350" cap="flat" cmpd="sng" algn="ctr">
                       <a:solidFill>
                         <a:srgbClr val="CCCCCC"/>
@@ -16404,7 +17202,7 @@
                     <a:bodyPr/>
                     <a:lstStyle/>
                     <a:p>
-                      <a:pPr algn="ctr" indent="0" marL="0">
+                      <a:pPr marL="0" indent="0" algn="ctr">
                         <a:buNone/>
                       </a:pPr>
                       <a:r>
@@ -16425,7 +17223,7 @@
                       </a:endParaRPr>
                     </a:p>
                   </a:txBody>
-                  <a:tcPr marL="91440" marR="91440" marT="45720" marB="45720" anchor="ctr">
+                  <a:tcPr anchor="ctr">
                     <a:lnL w="6350" cap="flat" cmpd="sng" algn="ctr">
                       <a:solidFill>
                         <a:srgbClr val="CCCCCC"/>
@@ -16472,7 +17270,7 @@
                     <a:bodyPr/>
                     <a:lstStyle/>
                     <a:p>
-                      <a:pPr algn="ctr" indent="0" marL="0">
+                      <a:pPr marL="0" indent="0" algn="ctr">
                         <a:buNone/>
                       </a:pPr>
                       <a:r>
@@ -16493,7 +17291,7 @@
                       </a:endParaRPr>
                     </a:p>
                   </a:txBody>
-                  <a:tcPr marL="91440" marR="91440" marT="45720" marB="45720" anchor="ctr">
+                  <a:tcPr anchor="ctr">
                     <a:lnL w="6350" cap="flat" cmpd="sng" algn="ctr">
                       <a:solidFill>
                         <a:srgbClr val="CCCCCC"/>
@@ -16540,7 +17338,7 @@
                     <a:bodyPr/>
                     <a:lstStyle/>
                     <a:p>
-                      <a:pPr algn="ctr" indent="0" marL="0">
+                      <a:pPr marL="0" indent="0" algn="ctr">
                         <a:buNone/>
                       </a:pPr>
                       <a:r>
@@ -16561,7 +17359,7 @@
                       </a:endParaRPr>
                     </a:p>
                   </a:txBody>
-                  <a:tcPr marL="91440" marR="91440" marT="45720" marB="45720" anchor="ctr">
+                  <a:tcPr anchor="ctr">
                     <a:lnL w="6350" cap="flat" cmpd="sng" algn="ctr">
                       <a:solidFill>
                         <a:srgbClr val="CCCCCC"/>
@@ -16608,7 +17406,7 @@
                     <a:bodyPr/>
                     <a:lstStyle/>
                     <a:p>
-                      <a:pPr algn="ctr" indent="0" marL="0">
+                      <a:pPr marL="0" indent="0" algn="ctr">
                         <a:buNone/>
                       </a:pPr>
                       <a:r>
@@ -16629,7 +17427,7 @@
                       </a:endParaRPr>
                     </a:p>
                   </a:txBody>
-                  <a:tcPr marL="91440" marR="91440" marT="45720" marB="45720" anchor="ctr">
+                  <a:tcPr anchor="ctr">
                     <a:lnL w="6350" cap="flat" cmpd="sng" algn="ctr">
                       <a:solidFill>
                         <a:srgbClr val="CCCCCC"/>
@@ -16671,6 +17469,11 @@
                     </a:solidFill>
                   </a:tcPr>
                 </a:tc>
+                <a:extLst>
+                  <a:ext uri="{0D108BD9-81ED-4DB2-BD59-A6C34878D82A}">
+                    <a16:rowId xmlns:a16="http://schemas.microsoft.com/office/drawing/2014/main" val="10000"/>
+                  </a:ext>
+                </a:extLst>
               </a:tr>
             </a:tbl>
           </a:graphicData>
@@ -16692,18 +17495,48 @@
         </p:nvGraphicFramePr>
         <p:xfrm>
           <a:off x="274320" y="3611880"/>
-          <a:ext cx="8595360" cy="914400"/>
+          <a:ext cx="5943600" cy="228600"/>
         </p:xfrm>
         <a:graphic>
           <a:graphicData uri="http://schemas.openxmlformats.org/drawingml/2006/table">
             <a:tbl>
               <a:tblPr/>
               <a:tblGrid>
-                <a:gridCol w="1143000"/>
-                <a:gridCol w="889000"/>
-                <a:gridCol w="635000"/>
-                <a:gridCol w="889000"/>
-                <a:gridCol w="2387600"/>
+                <a:gridCol w="1143000">
+                  <a:extLst>
+                    <a:ext uri="{9D8B030D-6E8A-4147-A177-3AD203B41FA5}">
+                      <a16:colId xmlns:a16="http://schemas.microsoft.com/office/drawing/2014/main" val="20000"/>
+                    </a:ext>
+                  </a:extLst>
+                </a:gridCol>
+                <a:gridCol w="889000">
+                  <a:extLst>
+                    <a:ext uri="{9D8B030D-6E8A-4147-A177-3AD203B41FA5}">
+                      <a16:colId xmlns:a16="http://schemas.microsoft.com/office/drawing/2014/main" val="20001"/>
+                    </a:ext>
+                  </a:extLst>
+                </a:gridCol>
+                <a:gridCol w="635000">
+                  <a:extLst>
+                    <a:ext uri="{9D8B030D-6E8A-4147-A177-3AD203B41FA5}">
+                      <a16:colId xmlns:a16="http://schemas.microsoft.com/office/drawing/2014/main" val="20002"/>
+                    </a:ext>
+                  </a:extLst>
+                </a:gridCol>
+                <a:gridCol w="889000">
+                  <a:extLst>
+                    <a:ext uri="{9D8B030D-6E8A-4147-A177-3AD203B41FA5}">
+                      <a16:colId xmlns:a16="http://schemas.microsoft.com/office/drawing/2014/main" val="20003"/>
+                    </a:ext>
+                  </a:extLst>
+                </a:gridCol>
+                <a:gridCol w="2387600">
+                  <a:extLst>
+                    <a:ext uri="{9D8B030D-6E8A-4147-A177-3AD203B41FA5}">
+                      <a16:colId xmlns:a16="http://schemas.microsoft.com/office/drawing/2014/main" val="20004"/>
+                    </a:ext>
+                  </a:extLst>
+                </a:gridCol>
               </a:tblGrid>
               <a:tr h="0">
                 <a:tc>
@@ -16711,7 +17544,7 @@
                     <a:bodyPr/>
                     <a:lstStyle/>
                     <a:p>
-                      <a:pPr algn="ctr" indent="0" marL="0">
+                      <a:pPr marL="0" indent="0" algn="ctr">
                         <a:buNone/>
                       </a:pPr>
                       <a:r>
@@ -16732,7 +17565,7 @@
                       </a:endParaRPr>
                     </a:p>
                   </a:txBody>
-                  <a:tcPr marL="91440" marR="91440" marT="45720" marB="45720" anchor="ctr">
+                  <a:tcPr anchor="ctr">
                     <a:lnL w="6350" cap="flat" cmpd="sng" algn="ctr">
                       <a:solidFill>
                         <a:srgbClr val="CCCCCC"/>
@@ -16779,7 +17612,7 @@
                     <a:bodyPr/>
                     <a:lstStyle/>
                     <a:p>
-                      <a:pPr algn="ctr" indent="0" marL="0">
+                      <a:pPr marL="0" indent="0" algn="ctr">
                         <a:buNone/>
                       </a:pPr>
                       <a:r>
@@ -16800,7 +17633,7 @@
                       </a:endParaRPr>
                     </a:p>
                   </a:txBody>
-                  <a:tcPr marL="91440" marR="91440" marT="45720" marB="45720" anchor="ctr">
+                  <a:tcPr anchor="ctr">
                     <a:lnL w="6350" cap="flat" cmpd="sng" algn="ctr">
                       <a:solidFill>
                         <a:srgbClr val="CCCCCC"/>
@@ -16847,7 +17680,7 @@
                     <a:bodyPr/>
                     <a:lstStyle/>
                     <a:p>
-                      <a:pPr algn="ctr" indent="0" marL="0">
+                      <a:pPr marL="0" indent="0" algn="ctr">
                         <a:buNone/>
                       </a:pPr>
                       <a:r>
@@ -16868,7 +17701,7 @@
                       </a:endParaRPr>
                     </a:p>
                   </a:txBody>
-                  <a:tcPr marL="91440" marR="91440" marT="45720" marB="45720" anchor="ctr">
+                  <a:tcPr anchor="ctr">
                     <a:lnL w="6350" cap="flat" cmpd="sng" algn="ctr">
                       <a:solidFill>
                         <a:srgbClr val="CCCCCC"/>
@@ -16915,7 +17748,7 @@
                     <a:bodyPr/>
                     <a:lstStyle/>
                     <a:p>
-                      <a:pPr algn="ctr" indent="0" marL="0">
+                      <a:pPr marL="0" indent="0" algn="ctr">
                         <a:buNone/>
                       </a:pPr>
                       <a:r>
@@ -16936,7 +17769,7 @@
                       </a:endParaRPr>
                     </a:p>
                   </a:txBody>
-                  <a:tcPr marL="91440" marR="91440" marT="45720" marB="45720" anchor="ctr">
+                  <a:tcPr anchor="ctr">
                     <a:lnL w="6350" cap="flat" cmpd="sng" algn="ctr">
                       <a:solidFill>
                         <a:srgbClr val="CCCCCC"/>
@@ -16983,7 +17816,7 @@
                     <a:bodyPr/>
                     <a:lstStyle/>
                     <a:p>
-                      <a:pPr algn="ctr" indent="0" marL="0">
+                      <a:pPr marL="0" indent="0" algn="ctr">
                         <a:buNone/>
                       </a:pPr>
                       <a:r>
@@ -17004,7 +17837,7 @@
                       </a:endParaRPr>
                     </a:p>
                   </a:txBody>
-                  <a:tcPr marL="91440" marR="91440" marT="45720" marB="45720" anchor="ctr">
+                  <a:tcPr anchor="ctr">
                     <a:lnL w="6350" cap="flat" cmpd="sng" algn="ctr">
                       <a:solidFill>
                         <a:srgbClr val="CCCCCC"/>
@@ -17046,6 +17879,11 @@
                     </a:solidFill>
                   </a:tcPr>
                 </a:tc>
+                <a:extLst>
+                  <a:ext uri="{0D108BD9-81ED-4DB2-BD59-A6C34878D82A}">
+                    <a16:rowId xmlns:a16="http://schemas.microsoft.com/office/drawing/2014/main" val="10000"/>
+                  </a:ext>
+                </a:extLst>
               </a:tr>
             </a:tbl>
           </a:graphicData>
@@ -17067,18 +17905,48 @@
         </p:nvGraphicFramePr>
         <p:xfrm>
           <a:off x="274320" y="4050792"/>
-          <a:ext cx="8595360" cy="914400"/>
+          <a:ext cx="5943600" cy="228600"/>
         </p:xfrm>
         <a:graphic>
           <a:graphicData uri="http://schemas.openxmlformats.org/drawingml/2006/table">
             <a:tbl>
               <a:tblPr/>
               <a:tblGrid>
-                <a:gridCol w="1143000"/>
-                <a:gridCol w="889000"/>
-                <a:gridCol w="635000"/>
-                <a:gridCol w="889000"/>
-                <a:gridCol w="2387600"/>
+                <a:gridCol w="1143000">
+                  <a:extLst>
+                    <a:ext uri="{9D8B030D-6E8A-4147-A177-3AD203B41FA5}">
+                      <a16:colId xmlns:a16="http://schemas.microsoft.com/office/drawing/2014/main" val="20000"/>
+                    </a:ext>
+                  </a:extLst>
+                </a:gridCol>
+                <a:gridCol w="889000">
+                  <a:extLst>
+                    <a:ext uri="{9D8B030D-6E8A-4147-A177-3AD203B41FA5}">
+                      <a16:colId xmlns:a16="http://schemas.microsoft.com/office/drawing/2014/main" val="20001"/>
+                    </a:ext>
+                  </a:extLst>
+                </a:gridCol>
+                <a:gridCol w="635000">
+                  <a:extLst>
+                    <a:ext uri="{9D8B030D-6E8A-4147-A177-3AD203B41FA5}">
+                      <a16:colId xmlns:a16="http://schemas.microsoft.com/office/drawing/2014/main" val="20002"/>
+                    </a:ext>
+                  </a:extLst>
+                </a:gridCol>
+                <a:gridCol w="889000">
+                  <a:extLst>
+                    <a:ext uri="{9D8B030D-6E8A-4147-A177-3AD203B41FA5}">
+                      <a16:colId xmlns:a16="http://schemas.microsoft.com/office/drawing/2014/main" val="20003"/>
+                    </a:ext>
+                  </a:extLst>
+                </a:gridCol>
+                <a:gridCol w="2387600">
+                  <a:extLst>
+                    <a:ext uri="{9D8B030D-6E8A-4147-A177-3AD203B41FA5}">
+                      <a16:colId xmlns:a16="http://schemas.microsoft.com/office/drawing/2014/main" val="20004"/>
+                    </a:ext>
+                  </a:extLst>
+                </a:gridCol>
               </a:tblGrid>
               <a:tr h="0">
                 <a:tc>
@@ -17086,7 +17954,7 @@
                     <a:bodyPr/>
                     <a:lstStyle/>
                     <a:p>
-                      <a:pPr algn="ctr" indent="0" marL="0">
+                      <a:pPr marL="0" indent="0" algn="ctr">
                         <a:buNone/>
                       </a:pPr>
                       <a:r>
@@ -17107,7 +17975,7 @@
                       </a:endParaRPr>
                     </a:p>
                   </a:txBody>
-                  <a:tcPr marL="91440" marR="91440" marT="45720" marB="45720" anchor="ctr">
+                  <a:tcPr anchor="ctr">
                     <a:lnL w="6350" cap="flat" cmpd="sng" algn="ctr">
                       <a:solidFill>
                         <a:srgbClr val="CCCCCC"/>
@@ -17154,7 +18022,7 @@
                     <a:bodyPr/>
                     <a:lstStyle/>
                     <a:p>
-                      <a:pPr algn="ctr" indent="0" marL="0">
+                      <a:pPr marL="0" indent="0" algn="ctr">
                         <a:buNone/>
                       </a:pPr>
                       <a:r>
@@ -17175,7 +18043,7 @@
                       </a:endParaRPr>
                     </a:p>
                   </a:txBody>
-                  <a:tcPr marL="91440" marR="91440" marT="45720" marB="45720" anchor="ctr">
+                  <a:tcPr anchor="ctr">
                     <a:lnL w="6350" cap="flat" cmpd="sng" algn="ctr">
                       <a:solidFill>
                         <a:srgbClr val="CCCCCC"/>
@@ -17222,7 +18090,7 @@
                     <a:bodyPr/>
                     <a:lstStyle/>
                     <a:p>
-                      <a:pPr algn="ctr" indent="0" marL="0">
+                      <a:pPr marL="0" indent="0" algn="ctr">
                         <a:buNone/>
                       </a:pPr>
                       <a:r>
@@ -17243,7 +18111,7 @@
                       </a:endParaRPr>
                     </a:p>
                   </a:txBody>
-                  <a:tcPr marL="91440" marR="91440" marT="45720" marB="45720" anchor="ctr">
+                  <a:tcPr anchor="ctr">
                     <a:lnL w="6350" cap="flat" cmpd="sng" algn="ctr">
                       <a:solidFill>
                         <a:srgbClr val="CCCCCC"/>
@@ -17290,7 +18158,7 @@
                     <a:bodyPr/>
                     <a:lstStyle/>
                     <a:p>
-                      <a:pPr algn="ctr" indent="0" marL="0">
+                      <a:pPr marL="0" indent="0" algn="ctr">
                         <a:buNone/>
                       </a:pPr>
                       <a:r>
@@ -17311,7 +18179,7 @@
                       </a:endParaRPr>
                     </a:p>
                   </a:txBody>
-                  <a:tcPr marL="91440" marR="91440" marT="45720" marB="45720" anchor="ctr">
+                  <a:tcPr anchor="ctr">
                     <a:lnL w="6350" cap="flat" cmpd="sng" algn="ctr">
                       <a:solidFill>
                         <a:srgbClr val="CCCCCC"/>
@@ -17358,7 +18226,7 @@
                     <a:bodyPr/>
                     <a:lstStyle/>
                     <a:p>
-                      <a:pPr algn="ctr" indent="0" marL="0">
+                      <a:pPr marL="0" indent="0" algn="ctr">
                         <a:buNone/>
                       </a:pPr>
                       <a:r>
@@ -17379,7 +18247,7 @@
                       </a:endParaRPr>
                     </a:p>
                   </a:txBody>
-                  <a:tcPr marL="91440" marR="91440" marT="45720" marB="45720" anchor="ctr">
+                  <a:tcPr anchor="ctr">
                     <a:lnL w="6350" cap="flat" cmpd="sng" algn="ctr">
                       <a:solidFill>
                         <a:srgbClr val="CCCCCC"/>
@@ -17421,6 +18289,11 @@
                     </a:solidFill>
                   </a:tcPr>
                 </a:tc>
+                <a:extLst>
+                  <a:ext uri="{0D108BD9-81ED-4DB2-BD59-A6C34878D82A}">
+                    <a16:rowId xmlns:a16="http://schemas.microsoft.com/office/drawing/2014/main" val="10000"/>
+                  </a:ext>
+                </a:extLst>
               </a:tr>
             </a:tbl>
           </a:graphicData>
@@ -17442,18 +18315,48 @@
         </p:nvGraphicFramePr>
         <p:xfrm>
           <a:off x="274320" y="4489704"/>
-          <a:ext cx="8595360" cy="914400"/>
+          <a:ext cx="5943600" cy="365760"/>
         </p:xfrm>
         <a:graphic>
           <a:graphicData uri="http://schemas.openxmlformats.org/drawingml/2006/table">
             <a:tbl>
               <a:tblPr/>
               <a:tblGrid>
-                <a:gridCol w="1143000"/>
-                <a:gridCol w="889000"/>
-                <a:gridCol w="635000"/>
-                <a:gridCol w="889000"/>
-                <a:gridCol w="2387600"/>
+                <a:gridCol w="1143000">
+                  <a:extLst>
+                    <a:ext uri="{9D8B030D-6E8A-4147-A177-3AD203B41FA5}">
+                      <a16:colId xmlns:a16="http://schemas.microsoft.com/office/drawing/2014/main" val="20000"/>
+                    </a:ext>
+                  </a:extLst>
+                </a:gridCol>
+                <a:gridCol w="889000">
+                  <a:extLst>
+                    <a:ext uri="{9D8B030D-6E8A-4147-A177-3AD203B41FA5}">
+                      <a16:colId xmlns:a16="http://schemas.microsoft.com/office/drawing/2014/main" val="20001"/>
+                    </a:ext>
+                  </a:extLst>
+                </a:gridCol>
+                <a:gridCol w="635000">
+                  <a:extLst>
+                    <a:ext uri="{9D8B030D-6E8A-4147-A177-3AD203B41FA5}">
+                      <a16:colId xmlns:a16="http://schemas.microsoft.com/office/drawing/2014/main" val="20002"/>
+                    </a:ext>
+                  </a:extLst>
+                </a:gridCol>
+                <a:gridCol w="889000">
+                  <a:extLst>
+                    <a:ext uri="{9D8B030D-6E8A-4147-A177-3AD203B41FA5}">
+                      <a16:colId xmlns:a16="http://schemas.microsoft.com/office/drawing/2014/main" val="20003"/>
+                    </a:ext>
+                  </a:extLst>
+                </a:gridCol>
+                <a:gridCol w="2387600">
+                  <a:extLst>
+                    <a:ext uri="{9D8B030D-6E8A-4147-A177-3AD203B41FA5}">
+                      <a16:colId xmlns:a16="http://schemas.microsoft.com/office/drawing/2014/main" val="20004"/>
+                    </a:ext>
+                  </a:extLst>
+                </a:gridCol>
               </a:tblGrid>
               <a:tr h="0">
                 <a:tc>
@@ -17461,7 +18364,7 @@
                     <a:bodyPr/>
                     <a:lstStyle/>
                     <a:p>
-                      <a:pPr algn="ctr" indent="0" marL="0">
+                      <a:pPr marL="0" indent="0" algn="ctr">
                         <a:buNone/>
                       </a:pPr>
                       <a:r>
@@ -17482,7 +18385,7 @@
                       </a:endParaRPr>
                     </a:p>
                   </a:txBody>
-                  <a:tcPr marL="91440" marR="91440" marT="45720" marB="45720" anchor="ctr">
+                  <a:tcPr anchor="ctr">
                     <a:lnL w="6350" cap="flat" cmpd="sng" algn="ctr">
                       <a:solidFill>
                         <a:srgbClr val="CCCCCC"/>
@@ -17529,7 +18432,7 @@
                     <a:bodyPr/>
                     <a:lstStyle/>
                     <a:p>
-                      <a:pPr algn="ctr" indent="0" marL="0">
+                      <a:pPr marL="0" indent="0" algn="ctr">
                         <a:buNone/>
                       </a:pPr>
                       <a:r>
@@ -17550,7 +18453,7 @@
                       </a:endParaRPr>
                     </a:p>
                   </a:txBody>
-                  <a:tcPr marL="91440" marR="91440" marT="45720" marB="45720" anchor="ctr">
+                  <a:tcPr anchor="ctr">
                     <a:lnL w="6350" cap="flat" cmpd="sng" algn="ctr">
                       <a:solidFill>
                         <a:srgbClr val="CCCCCC"/>
@@ -17597,7 +18500,7 @@
                     <a:bodyPr/>
                     <a:lstStyle/>
                     <a:p>
-                      <a:pPr algn="ctr" indent="0" marL="0">
+                      <a:pPr marL="0" indent="0" algn="ctr">
                         <a:buNone/>
                       </a:pPr>
                       <a:r>
@@ -17618,7 +18521,7 @@
                       </a:endParaRPr>
                     </a:p>
                   </a:txBody>
-                  <a:tcPr marL="91440" marR="91440" marT="45720" marB="45720" anchor="ctr">
+                  <a:tcPr anchor="ctr">
                     <a:lnL w="6350" cap="flat" cmpd="sng" algn="ctr">
                       <a:solidFill>
                         <a:srgbClr val="CCCCCC"/>
@@ -17665,7 +18568,7 @@
                     <a:bodyPr/>
                     <a:lstStyle/>
                     <a:p>
-                      <a:pPr algn="ctr" indent="0" marL="0">
+                      <a:pPr marL="0" indent="0" algn="ctr">
                         <a:buNone/>
                       </a:pPr>
                       <a:r>
@@ -17686,7 +18589,7 @@
                       </a:endParaRPr>
                     </a:p>
                   </a:txBody>
-                  <a:tcPr marL="91440" marR="91440" marT="45720" marB="45720" anchor="ctr">
+                  <a:tcPr anchor="ctr">
                     <a:lnL w="6350" cap="flat" cmpd="sng" algn="ctr">
                       <a:solidFill>
                         <a:srgbClr val="CCCCCC"/>
@@ -17733,7 +18636,7 @@
                     <a:bodyPr/>
                     <a:lstStyle/>
                     <a:p>
-                      <a:pPr algn="ctr" indent="0" marL="0">
+                      <a:pPr marL="0" indent="0" algn="ctr">
                         <a:buNone/>
                       </a:pPr>
                       <a:r>
@@ -17754,7 +18657,7 @@
                       </a:endParaRPr>
                     </a:p>
                   </a:txBody>
-                  <a:tcPr marL="91440" marR="91440" marT="45720" marB="45720" anchor="ctr">
+                  <a:tcPr anchor="ctr">
                     <a:lnL w="6350" cap="flat" cmpd="sng" algn="ctr">
                       <a:solidFill>
                         <a:srgbClr val="CCCCCC"/>
@@ -17796,6 +18699,11 @@
                     </a:solidFill>
                   </a:tcPr>
                 </a:tc>
+                <a:extLst>
+                  <a:ext uri="{0D108BD9-81ED-4DB2-BD59-A6C34878D82A}">
+                    <a16:rowId xmlns:a16="http://schemas.microsoft.com/office/drawing/2014/main" val="10000"/>
+                  </a:ext>
+                </a:extLst>
               </a:tr>
             </a:tbl>
           </a:graphicData>
@@ -18102,4 +19010,319 @@
     </a:ext>
   </a:extLst>
 </a:theme>
+</file>
+
+<file path=ppt/theme/theme2.xml><?xml version="1.0" encoding="utf-8"?>
+<a:theme xmlns:a="http://schemas.openxmlformats.org/drawingml/2006/main" name="Tema de Office">
+  <a:themeElements>
+    <a:clrScheme name="Office">
+      <a:dk1>
+        <a:sysClr val="windowText" lastClr="000000"/>
+      </a:dk1>
+      <a:lt1>
+        <a:sysClr val="window" lastClr="FFFFFF"/>
+      </a:lt1>
+      <a:dk2>
+        <a:srgbClr val="0E2841"/>
+      </a:dk2>
+      <a:lt2>
+        <a:srgbClr val="E8E8E8"/>
+      </a:lt2>
+      <a:accent1>
+        <a:srgbClr val="156082"/>
+      </a:accent1>
+      <a:accent2>
+        <a:srgbClr val="E97132"/>
+      </a:accent2>
+      <a:accent3>
+        <a:srgbClr val="196B24"/>
+      </a:accent3>
+      <a:accent4>
+        <a:srgbClr val="0F9ED5"/>
+      </a:accent4>
+      <a:accent5>
+        <a:srgbClr val="A02B93"/>
+      </a:accent5>
+      <a:accent6>
+        <a:srgbClr val="4EA72E"/>
+      </a:accent6>
+      <a:hlink>
+        <a:srgbClr val="467886"/>
+      </a:hlink>
+      <a:folHlink>
+        <a:srgbClr val="96607D"/>
+      </a:folHlink>
+    </a:clrScheme>
+    <a:fontScheme name="Office">
+      <a:majorFont>
+        <a:latin typeface="Aptos Display" panose="02110004020202020204"/>
+        <a:ea typeface=""/>
+        <a:cs typeface=""/>
+        <a:font script="Jpan" typeface="游ゴシック Light"/>
+        <a:font script="Hang" typeface="맑은 고딕"/>
+        <a:font script="Hans" typeface="等线 Light"/>
+        <a:font script="Hant" typeface="新細明體"/>
+        <a:font script="Arab" typeface="Times New Roman"/>
+        <a:font script="Hebr" typeface="Times New Roman"/>
+        <a:font script="Thai" typeface="Angsana New"/>
+        <a:font script="Ethi" typeface="Nyala"/>
+        <a:font script="Beng" typeface="Vrinda"/>
+        <a:font script="Gujr" typeface="Shruti"/>
+        <a:font script="Khmr" typeface="MoolBoran"/>
+        <a:font script="Knda" typeface="Tunga"/>
+        <a:font script="Guru" typeface="Raavi"/>
+        <a:font script="Cans" typeface="Euphemia"/>
+        <a:font script="Cher" typeface="Plantagenet Cherokee"/>
+        <a:font script="Yiii" typeface="Microsoft Yi Baiti"/>
+        <a:font script="Tibt" typeface="Microsoft Himalaya"/>
+        <a:font script="Thaa" typeface="MV Boli"/>
+        <a:font script="Deva" typeface="Mangal"/>
+        <a:font script="Telu" typeface="Gautami"/>
+        <a:font script="Taml" typeface="Latha"/>
+        <a:font script="Syrc" typeface="Estrangelo Edessa"/>
+        <a:font script="Orya" typeface="Kalinga"/>
+        <a:font script="Mlym" typeface="Kartika"/>
+        <a:font script="Laoo" typeface="DokChampa"/>
+        <a:font script="Sinh" typeface="Iskoola Pota"/>
+        <a:font script="Mong" typeface="Mongolian Baiti"/>
+        <a:font script="Viet" typeface="Times New Roman"/>
+        <a:font script="Uigh" typeface="Microsoft Uighur"/>
+        <a:font script="Geor" typeface="Sylfaen"/>
+        <a:font script="Armn" typeface="Arial"/>
+        <a:font script="Bugi" typeface="Leelawadee UI"/>
+        <a:font script="Bopo" typeface="Microsoft JhengHei"/>
+        <a:font script="Java" typeface="Javanese Text"/>
+        <a:font script="Lisu" typeface="Segoe UI"/>
+        <a:font script="Mymr" typeface="Myanmar Text"/>
+        <a:font script="Nkoo" typeface="Ebrima"/>
+        <a:font script="Olck" typeface="Nirmala UI"/>
+        <a:font script="Osma" typeface="Ebrima"/>
+        <a:font script="Phag" typeface="Phagspa"/>
+        <a:font script="Syrn" typeface="Estrangelo Edessa"/>
+        <a:font script="Syrj" typeface="Estrangelo Edessa"/>
+        <a:font script="Syre" typeface="Estrangelo Edessa"/>
+        <a:font script="Sora" typeface="Nirmala UI"/>
+        <a:font script="Tale" typeface="Microsoft Tai Le"/>
+        <a:font script="Talu" typeface="Microsoft New Tai Lue"/>
+        <a:font script="Tfng" typeface="Ebrima"/>
+      </a:majorFont>
+      <a:minorFont>
+        <a:latin typeface="Aptos" panose="02110004020202020204"/>
+        <a:ea typeface=""/>
+        <a:cs typeface=""/>
+        <a:font script="Jpan" typeface="游ゴシック"/>
+        <a:font script="Hang" typeface="맑은 고딕"/>
+        <a:font script="Hans" typeface="等线"/>
+        <a:font script="Hant" typeface="新細明體"/>
+        <a:font script="Arab" typeface="Arial"/>
+        <a:font script="Hebr" typeface="Arial"/>
+        <a:font script="Thai" typeface="Cordia New"/>
+        <a:font script="Ethi" typeface="Nyala"/>
+        <a:font script="Beng" typeface="Vrinda"/>
+        <a:font script="Gujr" typeface="Shruti"/>
+        <a:font script="Khmr" typeface="DaunPenh"/>
+        <a:font script="Knda" typeface="Tunga"/>
+        <a:font script="Guru" typeface="Raavi"/>
+        <a:font script="Cans" typeface="Euphemia"/>
+        <a:font script="Cher" typeface="Plantagenet Cherokee"/>
+        <a:font script="Yiii" typeface="Microsoft Yi Baiti"/>
+        <a:font script="Tibt" typeface="Microsoft Himalaya"/>
+        <a:font script="Thaa" typeface="MV Boli"/>
+        <a:font script="Deva" typeface="Mangal"/>
+        <a:font script="Telu" typeface="Gautami"/>
+        <a:font script="Taml" typeface="Latha"/>
+        <a:font script="Syrc" typeface="Estrangelo Edessa"/>
+        <a:font script="Orya" typeface="Kalinga"/>
+        <a:font script="Mlym" typeface="Kartika"/>
+        <a:font script="Laoo" typeface="DokChampa"/>
+        <a:font script="Sinh" typeface="Iskoola Pota"/>
+        <a:font script="Mong" typeface="Mongolian Baiti"/>
+        <a:font script="Viet" typeface="Arial"/>
+        <a:font script="Uigh" typeface="Microsoft Uighur"/>
+        <a:font script="Geor" typeface="Sylfaen"/>
+        <a:font script="Armn" typeface="Arial"/>
+        <a:font script="Bugi" typeface="Leelawadee UI"/>
+        <a:font script="Bopo" typeface="Microsoft JhengHei"/>
+        <a:font script="Java" typeface="Javanese Text"/>
+        <a:font script="Lisu" typeface="Segoe UI"/>
+        <a:font script="Mymr" typeface="Myanmar Text"/>
+        <a:font script="Nkoo" typeface="Ebrima"/>
+        <a:font script="Olck" typeface="Nirmala UI"/>
+        <a:font script="Osma" typeface="Ebrima"/>
+        <a:font script="Phag" typeface="Phagspa"/>
+        <a:font script="Syrn" typeface="Estrangelo Edessa"/>
+        <a:font script="Syrj" typeface="Estrangelo Edessa"/>
+        <a:font script="Syre" typeface="Estrangelo Edessa"/>
+        <a:font script="Sora" typeface="Nirmala UI"/>
+        <a:font script="Tale" typeface="Microsoft Tai Le"/>
+        <a:font script="Talu" typeface="Microsoft New Tai Lue"/>
+        <a:font script="Tfng" typeface="Ebrima"/>
+      </a:minorFont>
+    </a:fontScheme>
+    <a:fmtScheme name="Office">
+      <a:fillStyleLst>
+        <a:solidFill>
+          <a:schemeClr val="phClr"/>
+        </a:solidFill>
+        <a:gradFill rotWithShape="1">
+          <a:gsLst>
+            <a:gs pos="0">
+              <a:schemeClr val="phClr">
+                <a:lumMod val="110000"/>
+                <a:satMod val="105000"/>
+                <a:tint val="67000"/>
+              </a:schemeClr>
+            </a:gs>
+            <a:gs pos="50000">
+              <a:schemeClr val="phClr">
+                <a:lumMod val="105000"/>
+                <a:satMod val="103000"/>
+                <a:tint val="73000"/>
+              </a:schemeClr>
+            </a:gs>
+            <a:gs pos="100000">
+              <a:schemeClr val="phClr">
+                <a:lumMod val="105000"/>
+                <a:satMod val="109000"/>
+                <a:tint val="81000"/>
+              </a:schemeClr>
+            </a:gs>
+          </a:gsLst>
+          <a:lin ang="5400000" scaled="0"/>
+        </a:gradFill>
+        <a:gradFill rotWithShape="1">
+          <a:gsLst>
+            <a:gs pos="0">
+              <a:schemeClr val="phClr">
+                <a:satMod val="103000"/>
+                <a:lumMod val="102000"/>
+                <a:tint val="94000"/>
+              </a:schemeClr>
+            </a:gs>
+            <a:gs pos="50000">
+              <a:schemeClr val="phClr">
+                <a:satMod val="110000"/>
+                <a:lumMod val="100000"/>
+                <a:shade val="100000"/>
+              </a:schemeClr>
+            </a:gs>
+            <a:gs pos="100000">
+              <a:schemeClr val="phClr">
+                <a:lumMod val="99000"/>
+                <a:satMod val="120000"/>
+                <a:shade val="78000"/>
+              </a:schemeClr>
+            </a:gs>
+          </a:gsLst>
+          <a:lin ang="5400000" scaled="0"/>
+        </a:gradFill>
+      </a:fillStyleLst>
+      <a:lnStyleLst>
+        <a:ln w="12700" cap="flat" cmpd="sng" algn="ctr">
+          <a:solidFill>
+            <a:schemeClr val="phClr"/>
+          </a:solidFill>
+          <a:prstDash val="solid"/>
+          <a:miter lim="800000"/>
+        </a:ln>
+        <a:ln w="19050" cap="flat" cmpd="sng" algn="ctr">
+          <a:solidFill>
+            <a:schemeClr val="phClr"/>
+          </a:solidFill>
+          <a:prstDash val="solid"/>
+          <a:miter lim="800000"/>
+        </a:ln>
+        <a:ln w="25400" cap="flat" cmpd="sng" algn="ctr">
+          <a:solidFill>
+            <a:schemeClr val="phClr"/>
+          </a:solidFill>
+          <a:prstDash val="solid"/>
+          <a:miter lim="800000"/>
+        </a:ln>
+      </a:lnStyleLst>
+      <a:effectStyleLst>
+        <a:effectStyle>
+          <a:effectLst/>
+        </a:effectStyle>
+        <a:effectStyle>
+          <a:effectLst/>
+        </a:effectStyle>
+        <a:effectStyle>
+          <a:effectLst>
+            <a:outerShdw blurRad="57150" dist="19050" dir="5400000" algn="ctr" rotWithShape="0">
+              <a:srgbClr val="000000">
+                <a:alpha val="63000"/>
+              </a:srgbClr>
+            </a:outerShdw>
+          </a:effectLst>
+        </a:effectStyle>
+      </a:effectStyleLst>
+      <a:bgFillStyleLst>
+        <a:solidFill>
+          <a:schemeClr val="phClr"/>
+        </a:solidFill>
+        <a:solidFill>
+          <a:schemeClr val="phClr">
+            <a:tint val="95000"/>
+            <a:satMod val="170000"/>
+          </a:schemeClr>
+        </a:solidFill>
+        <a:gradFill rotWithShape="1">
+          <a:gsLst>
+            <a:gs pos="0">
+              <a:schemeClr val="phClr">
+                <a:tint val="93000"/>
+                <a:satMod val="150000"/>
+                <a:shade val="98000"/>
+                <a:lumMod val="102000"/>
+              </a:schemeClr>
+            </a:gs>
+            <a:gs pos="50000">
+              <a:schemeClr val="phClr">
+                <a:tint val="98000"/>
+                <a:satMod val="130000"/>
+                <a:shade val="90000"/>
+                <a:lumMod val="103000"/>
+              </a:schemeClr>
+            </a:gs>
+            <a:gs pos="100000">
+              <a:schemeClr val="phClr">
+                <a:shade val="63000"/>
+                <a:satMod val="120000"/>
+              </a:schemeClr>
+            </a:gs>
+          </a:gsLst>
+          <a:lin ang="5400000" scaled="0"/>
+        </a:gradFill>
+      </a:bgFillStyleLst>
+    </a:fmtScheme>
+  </a:themeElements>
+  <a:objectDefaults>
+    <a:lnDef>
+      <a:spPr/>
+      <a:bodyPr/>
+      <a:lstStyle/>
+      <a:style>
+        <a:lnRef idx="2">
+          <a:schemeClr val="accent1"/>
+        </a:lnRef>
+        <a:fillRef idx="0">
+          <a:schemeClr val="accent1"/>
+        </a:fillRef>
+        <a:effectRef idx="1">
+          <a:schemeClr val="accent1"/>
+        </a:effectRef>
+        <a:fontRef idx="minor">
+          <a:schemeClr val="tx1"/>
+        </a:fontRef>
+      </a:style>
+    </a:lnDef>
+  </a:objectDefaults>
+  <a:extraClrSchemeLst/>
+  <a:extLst>
+    <a:ext uri="{05A4C25C-085E-4340-85A3-A5531E510DB2}">
+      <thm15:themeFamily xmlns:thm15="http://schemas.microsoft.com/office/thememl/2012/main" name="Office Theme" id="{2E142A2C-CD16-42D6-873A-C26D2A0506FA}" vid="{1BDDFF52-6CD6-40A5-AB3C-68EB2F1E4D0A}"/>
+    </a:ext>
+  </a:extLst>
+</a:theme>
 </file>